--- a/commercial-deliverables-2026-09-18/Commercial_Department_Deliverables_Sep2026.pptx
+++ b/commercial-deliverables-2026-09-18/Commercial_Department_Deliverables_Sep2026.pptx
@@ -14,10 +14,9 @@
     <p:sldId id="262" r:id="rId8"/>
     <p:sldId id="263" r:id="rId9"/>
     <p:sldId id="264" r:id="rId10"/>
-    <p:sldId id="265" r:id="rId11"/>
   </p:sldIdLst>
   <p:notesMasterIdLst>
-    <p:notesMasterId r:id="rId12"/>
+    <p:notesMasterId r:id="rId11"/>
   </p:notesMasterIdLst>
   <p:sldSz cx="12192000" cy="6858000"/>
   <p:notesSz cx="6858000" cy="12192000"/>
@@ -326,10 +325,10 @@
               <c:numCache>
                 <c:ptCount val="3"/>
                 <c:pt idx="0">
-                  <c:v>17</c:v>
+                  <c:v>18</c:v>
                 </c:pt>
                 <c:pt idx="1">
-                  <c:v>4</c:v>
+                  <c:v>3</c:v>
                 </c:pt>
                 <c:pt idx="2">
                   <c:v>1</c:v>
@@ -424,20 +423,17 @@
           </c:dLbls>
           <c:cat>
             <c:multiLvlStrRef>
-              <c:f>Sheet1!$A$2:$A$5</c:f>
+              <c:f>Sheet1!$A$2:$A$4</c:f>
               <c:multiLvlStrCache>
-                <c:ptCount val="4"/>
+                <c:ptCount val="3"/>
                 <c:lvl>
                   <c:pt idx="0">
                     <c:v>Priority Insurance</c:v>
                   </c:pt>
                   <c:pt idx="1">
-                    <c:v>Ecole Int'l School</c:v>
+                    <c:v>Stanbic Bank</c:v>
                   </c:pt>
                   <c:pt idx="2">
-                    <c:v>Stanbic Bank</c:v>
-                  </c:pt>
-                  <c:pt idx="3">
                     <c:v>Kinbu Canteen Tender</c:v>
                   </c:pt>
                 </c:lvl>
@@ -446,10 +442,10 @@
           </c:cat>
           <c:val>
             <c:numRef>
-              <c:f>Sheet1!$B$2:$B$5</c:f>
+              <c:f>Sheet1!$B$2:$B$4</c:f>
               <c:numCache>
                 <c:formatCode>General</c:formatCode>
-                <c:ptCount val="4"/>
+                <c:ptCount val="3"/>
                 <c:pt idx="0">
                   <c:v>25</c:v>
                 </c:pt>
@@ -457,9 +453,6 @@
                   <c:v>100</c:v>
                 </c:pt>
                 <c:pt idx="2">
-                  <c:v>100</c:v>
-                </c:pt>
-                <c:pt idx="3">
                   <c:v>100</c:v>
                 </c:pt>
               </c:numCache>
@@ -513,20 +506,17 @@
           </c:dLbls>
           <c:cat>
             <c:multiLvlStrRef>
-              <c:f>Sheet1!$A$2:$A$5</c:f>
+              <c:f>Sheet1!$A$2:$A$4</c:f>
               <c:multiLvlStrCache>
-                <c:ptCount val="4"/>
+                <c:ptCount val="3"/>
                 <c:lvl>
                   <c:pt idx="0">
                     <c:v>Priority Insurance</c:v>
                   </c:pt>
                   <c:pt idx="1">
-                    <c:v>Ecole Int'l School</c:v>
+                    <c:v>Stanbic Bank</c:v>
                   </c:pt>
                   <c:pt idx="2">
-                    <c:v>Stanbic Bank</c:v>
-                  </c:pt>
-                  <c:pt idx="3">
                     <c:v>Kinbu Canteen Tender</c:v>
                   </c:pt>
                 </c:lvl>
@@ -535,10 +525,10 @@
           </c:cat>
           <c:val>
             <c:numRef>
-              <c:f>Sheet1!$C$2:$C$5</c:f>
+              <c:f>Sheet1!$C$2:$C$4</c:f>
               <c:numCache>
                 <c:formatCode>General</c:formatCode>
-                <c:ptCount val="4"/>
+                <c:ptCount val="3"/>
                 <c:pt idx="0">
                   <c:v>20</c:v>
                 </c:pt>
@@ -546,9 +536,6 @@
                   <c:v>50</c:v>
                 </c:pt>
                 <c:pt idx="2">
-                  <c:v>50</c:v>
-                </c:pt>
-                <c:pt idx="3">
                   <c:v>10</c:v>
                 </c:pt>
               </c:numCache>
@@ -819,10 +806,10 @@
                   <c:v>0</c:v>
                 </c:pt>
                 <c:pt idx="1">
-                  <c:v>0</c:v>
+                  <c:v>1</c:v>
                 </c:pt>
                 <c:pt idx="2">
-                  <c:v>2</c:v>
+                  <c:v>3</c:v>
                 </c:pt>
                 <c:pt idx="3">
                   <c:v>3</c:v>
@@ -831,7 +818,7 @@
                   <c:v>4</c:v>
                 </c:pt>
                 <c:pt idx="5">
-                  <c:v>8</c:v>
+                  <c:v>9</c:v>
                 </c:pt>
               </c:numCache>
             </c:numRef>
@@ -921,10 +908,10 @@
                   <c:v>2</c:v>
                 </c:pt>
                 <c:pt idx="1">
-                  <c:v>3</c:v>
+                  <c:v>2</c:v>
                 </c:pt>
                 <c:pt idx="2">
-                  <c:v>1</c:v>
+                  <c:v>0</c:v>
                 </c:pt>
                 <c:pt idx="3">
                   <c:v>2</c:v>
@@ -933,7 +920,7 @@
                   <c:v>2</c:v>
                 </c:pt>
                 <c:pt idx="5">
-                  <c:v>1</c:v>
+                  <c:v>0</c:v>
                 </c:pt>
               </c:numCache>
             </c:numRef>
@@ -1503,7 +1490,7 @@
           <a:p>
             <a:r>
               <a:rPr lang="en-US" dirty="0"/>
-              <a:t>Good morning. This is the commercial department status report as at 18 September 2026, covering pre and post contract deliverables across 13 active projects. Twenty-two deliverables are being tracked. Seventeen are complete. Five remain outstanding, and three of those need a decision from this meeting.</a:t>
+              <a:t>Good morning. This is the commercial department status report as at 18 September 2026, covering pre and post contract deliverables across 13 active projects. Twenty-two deliverables are being tracked. Eighteen are complete. Four remain outstanding, and three items on this register need a decision from this meeting.</a:t>
             </a:r>
             <a:endParaRPr lang="en-US" dirty="0"/>
           </a:p>
@@ -1527,94 +1514,6 @@
             <a:fld id="{F7021451-1387-4CA6-816F-3879F97B5CBC}" type="slidenum">
               <a:rPr lang="en-US"/>
               <a:t>1</a:t>
-            </a:fld>
-            <a:endParaRPr lang="en-US"/>
-          </a:p>
-        </p:txBody>
-      </p:sp>
-    </p:spTree>
-    <p:extLst>
-      <p:ext uri="{BB962C8B-B14F-4D97-AF65-F5344CB8AC3E}">
-        <p14:creationId xmlns:p14="http://schemas.microsoft.com/office/powerpoint/2010/main" val="1024086991"/>
-      </p:ext>
-    </p:extLst>
-  </p:cSld>
-  <p:clrMapOvr>
-    <a:masterClrMapping/>
-  </p:clrMapOvr>
-</p:notes>
-</file>
-
-<file path=ppt/notesSlides/notesSlide10.xml><?xml version="1.0" encoding="utf-8"?>
-<p:notes xmlns:a="http://schemas.openxmlformats.org/drawingml/2006/main" xmlns:r="http://schemas.openxmlformats.org/officeDocument/2006/relationships" xmlns:p="http://schemas.openxmlformats.org/presentationml/2006/main">
-  <p:cSld>
-    <p:spTree>
-      <p:nvGrpSpPr>
-        <p:cNvPr id="1" name=""/>
-        <p:cNvGrpSpPr/>
-        <p:nvPr/>
-      </p:nvGrpSpPr>
-      <p:grpSpPr>
-        <a:xfrm>
-          <a:off x="0" y="0"/>
-          <a:ext cx="0" cy="0"/>
-          <a:chOff x="0" y="0"/>
-          <a:chExt cx="0" cy="0"/>
-        </a:xfrm>
-      </p:grpSpPr>
-      <p:sp>
-        <p:nvSpPr>
-          <p:cNvPr id="2" name="Slide Image Placeholder 1"/>
-          <p:cNvSpPr>
-            <a:spLocks noGrp="1" noRot="1" noChangeAspect="1"/>
-          </p:cNvSpPr>
-          <p:nvPr>
-            <p:ph type="sldImg"/>
-          </p:nvPr>
-        </p:nvSpPr>
-        <p:spPr/>
-      </p:sp>
-      <p:sp>
-        <p:nvSpPr>
-          <p:cNvPr id="3" name="Notes Placeholder 2"/>
-          <p:cNvSpPr>
-            <a:spLocks noGrp="1"/>
-          </p:cNvSpPr>
-          <p:nvPr>
-            <p:ph type="body" idx="1"/>
-          </p:nvPr>
-        </p:nvSpPr>
-        <p:spPr/>
-        <p:txBody>
-          <a:bodyPr/>
-          <a:lstStyle/>
-          <a:p>
-            <a:r>
-              <a:rPr lang="en-US" dirty="0"/>
-              <a:t>To close: four actions. Name the two tender leads today. Finish Ecole by the twenty-second. Chase the Priority Insurance drawings by the twenty-third. Clear the Anglogold review by the twenty-second. Items one and two on their own take us back to plan. I need decisions on the tender ownership and the drawings before we leave this room.</a:t>
-            </a:r>
-            <a:endParaRPr lang="en-US" dirty="0"/>
-          </a:p>
-        </p:txBody>
-      </p:sp>
-      <p:sp>
-        <p:nvSpPr>
-          <p:cNvPr id="4" name="Slide Number Placeholder 3"/>
-          <p:cNvSpPr>
-            <a:spLocks noGrp="1"/>
-          </p:cNvSpPr>
-          <p:nvPr>
-            <p:ph type="sldNum" sz="quarter" idx="10"/>
-          </p:nvPr>
-        </p:nvSpPr>
-        <p:spPr/>
-        <p:txBody>
-          <a:bodyPr/>
-          <a:lstStyle/>
-          <a:p>
-            <a:fld id="{F7021451-1387-4CA6-816F-3879F97B5CBC}" type="slidenum">
-              <a:rPr lang="en-US"/>
-              <a:t>10</a:t>
             </a:fld>
             <a:endParaRPr lang="en-US"/>
           </a:p>
@@ -1679,7 +1578,7 @@
           <a:p>
             <a:r>
               <a:rPr lang="en-US" dirty="0"/>
-              <a:t>Three things to take away. First, we are 84% complete against a 93% plan — a nine point gap, and it is concentrated, not spread. Second, two tenders close on 24 September and one of them, Kinbu, is only 10% priced. Third, Priority Insurance is blocked on information we do not control. Slides four to eight take each of these in turn.</a:t>
+              <a:t>Three things to take away. First, we are 86% complete against a 93% plan — a gap of just under seven points, and it is concentrated, not spread. Ecole closed out since the last review. Second, two tenders close on 24 September and one of them, Kinbu, is only 10% priced. Third, Priority Insurance is blocked on information we do not control.</a:t>
             </a:r>
             <a:endParaRPr lang="en-US" dirty="0"/>
           </a:p>
@@ -1767,7 +1666,7 @@
           <a:p>
             <a:r>
               <a:rPr lang="en-US" dirty="0"/>
-              <a:t>Seventeen of twenty-two deliverables are complete — just over three quarters of the register. Four are in progress and one has not started, though that one is still inside its plan. Measured on progress rather than headcount, we are at 84.1% against a planned 93.2% — a gap of about two deliverables.</a:t>
+              <a:t>Eighteen of twenty-two deliverables are complete — over four fifths of the register. Three are in progress and one has not started, though that one is still inside its plan. Measured on progress rather than headcount, we are at 86.4% against a planned 93.2% — a gap of one and a half deliverables.</a:t>
             </a:r>
             <a:endParaRPr lang="en-US" dirty="0"/>
           </a:p>
@@ -1855,7 +1754,7 @@
           <a:p>
             <a:r>
               <a:rPr lang="en-US" dirty="0"/>
-              <a:t>This is where the variance actually sits. Kinbu is the outlier — 10% against a 100% plan. Stanbic and Ecole are both at half of what was planned. Priority Insurance looks small at 20 against 25, and it is small, because only half of its BoQ was ever scheduled to be done by today. Every other project in the portfolio, nine of them, is complete.</a:t>
+              <a:t>This is where the variance actually sits, and it is now three projects rather than four. Kinbu is the outlier at 10% against a 100% plan. Stanbic is at half of what was planned. Priority Insurance looks small at 20 against 25, and it is small, because only half of its BoQ was ever scheduled to be done by today. Every other project in the portfolio, ten of them, is complete.</a:t>
             </a:r>
             <a:endParaRPr lang="en-US" dirty="0"/>
           </a:p>
@@ -1943,7 +1842,7 @@
           <a:p>
             <a:r>
               <a:rPr lang="en-US" dirty="0"/>
-              <a:t>This is the delivered column. Nine projects are fully closed out for the period — seventeen deliverables in total. Anglogold, the Warehouse and RE Villa each carried three. Worth noting that the Anglogold budget is finished but is sitting with a reviewer; I will come back to that on the blockers slide.</a:t>
+              <a:t>This is the delivered column, and Ecole has now joined it. Ten projects are fully closed out for the period — eighteen deliverables in total. Anglogold, the Warehouse and RE Villa each carried three. Worth noting that the Anglogold budget is finished but is sitting with a reviewer; I will come back to that on the blockers slide.</a:t>
             </a:r>
             <a:endParaRPr lang="en-US" dirty="0"/>
           </a:p>
@@ -2031,7 +1930,7 @@
           <a:p>
             <a:r>
               <a:rPr lang="en-US" dirty="0"/>
-              <a:t>Five items. Kinbu is the one that should worry us — 10% priced with six days to submission. Stanbic is at half. Ecole was due today and is at half. Priority Insurance BoQ is only ten points behind plan, but it is blocked rather than late. The Priority budget has not started and does not need to have — it follows the BoQ.</a:t>
+              <a:t>Four items now that Ecole has closed. Kinbu is the one that should worry us — 10% priced with six days to submission. Stanbic is at half. The Priority Insurance BoQ is only ten points behind plan, but it is blocked rather than late. The Priority budget has not started and does not need to have — it follows the BoQ.</a:t>
             </a:r>
             <a:endParaRPr lang="en-US" dirty="0"/>
           </a:p>
@@ -2119,7 +2018,7 @@
           <a:p>
             <a:r>
               <a:rPr lang="en-US" dirty="0"/>
-              <a:t>Laid out on a calendar, the exposure is obvious. Today Ecole is due. Six days from now two tenders close on the same day. The Priority BoQ follows on the thirtieth and its budget on the ninth of October. The twenty-fourth is the pinch point, and neither of those two tenders has a named owner.</a:t>
+              <a:t>Laid out on a calendar, the exposure is obvious. Nothing falls due today now that Ecole has closed. Six days from now two tenders close on the same day. The Priority BoQ follows on the thirtieth and its budget on the ninth of October. The twenty-fourth is the pinch point, and neither of those two tenders has a named owner.</a:t>
             </a:r>
             <a:endParaRPr lang="en-US" dirty="0"/>
           </a:p>
@@ -2295,7 +2194,7 @@
           <a:p>
             <a:r>
               <a:rPr lang="en-US" dirty="0"/>
-              <a:t>On resourcing: Eunice is carrying nine deliverables and has closed eight. Gilbert six, Sedem five. Obed shows three open and none closed, but all three are shared items on blocked projects, so that is a blockage rather than a performance question. The two unowned items are the same two tenders we keep coming back to.</a:t>
+              <a:t>On resourcing: Eunice is carrying nine deliverables and has now closed all nine. Gilbert six, Sedem five. Tracy is also fully closed out. Obed has two items left, both on Priority Insurance, so that is a blockage rather than a performance question. The two unowned items are the same two tenders we keep coming back to.</a:t>
             </a:r>
             <a:endParaRPr lang="en-US" dirty="0"/>
           </a:p>
@@ -3217,7 +3116,7 @@
                 <a:ea typeface="Cambria" pitchFamily="34" charset="-122"/>
                 <a:cs typeface="Cambria" pitchFamily="34" charset="-120"/>
               </a:rPr>
-              <a:t>77%</a:t>
+              <a:t>82%</a:t>
             </a:r>
             <a:endParaRPr lang="en-US" sz="2700" dirty="0"/>
           </a:p>
@@ -3326,7 +3225,7 @@
                 <a:ea typeface="Cambria" pitchFamily="34" charset="-122"/>
                 <a:cs typeface="Cambria" pitchFamily="34" charset="-120"/>
               </a:rPr>
-              <a:t>5</a:t>
+              <a:t>4</a:t>
             </a:r>
             <a:endParaRPr lang="en-US" sz="2700" dirty="0"/>
           </a:p>
@@ -3407,1454 +3306,6 @@
               <a:t>Presented by the Commercial Manager</a:t>
             </a:r>
             <a:endParaRPr lang="en-US" sz="1050" dirty="0"/>
-          </a:p>
-        </p:txBody>
-      </p:sp>
-    </p:spTree>
-  </p:cSld>
-  <p:clrMapOvr>
-    <a:masterClrMapping/>
-  </p:clrMapOvr>
-</p:sld>
-</file>
-
-<file path=ppt/slides/slide10.xml><?xml version="1.0" encoding="utf-8"?>
-<p:sld xmlns:a="http://schemas.openxmlformats.org/drawingml/2006/main" xmlns:r="http://schemas.openxmlformats.org/officeDocument/2006/relationships" xmlns:p="http://schemas.openxmlformats.org/presentationml/2006/main">
-  <p:cSld name="Slide 10">
-    <p:bg>
-      <p:bgPr>
-        <a:solidFill>
-          <a:srgbClr val="1B2A41"/>
-        </a:solidFill>
-      </p:bgPr>
-    </p:bg>
-    <p:spTree>
-      <p:nvGrpSpPr>
-        <p:cNvPr id="1" name=""/>
-        <p:cNvGrpSpPr/>
-        <p:nvPr/>
-      </p:nvGrpSpPr>
-      <p:grpSpPr>
-        <a:xfrm>
-          <a:off x="0" y="0"/>
-          <a:ext cx="0" cy="0"/>
-          <a:chOff x="0" y="0"/>
-          <a:chExt cx="0" cy="0"/>
-        </a:xfrm>
-      </p:grpSpPr>
-      <p:sp>
-        <p:nvSpPr>
-          <p:cNvPr id="2" name="Shape 0"/>
-          <p:cNvSpPr/>
-          <p:nvPr/>
-        </p:nvSpPr>
-        <p:spPr>
-          <a:xfrm>
-            <a:off x="10607040" y="-1874520"/>
-            <a:ext cx="3291840" cy="3291840"/>
-          </a:xfrm>
-          <a:prstGeom prst="ellipse">
-            <a:avLst/>
-          </a:prstGeom>
-          <a:solidFill>
-            <a:srgbClr val="FFFFFF">
-              <a:alpha val="4000"/>
-            </a:srgbClr>
-          </a:solidFill>
-          <a:ln/>
-        </p:spPr>
-      </p:sp>
-      <p:sp>
-        <p:nvSpPr>
-          <p:cNvPr id="3" name="Shape 1"/>
-          <p:cNvSpPr/>
-          <p:nvPr/>
-        </p:nvSpPr>
-        <p:spPr>
-          <a:xfrm>
-            <a:off x="-1554480" y="5623560"/>
-            <a:ext cx="2743200" cy="2743200"/>
-          </a:xfrm>
-          <a:prstGeom prst="ellipse">
-            <a:avLst/>
-          </a:prstGeom>
-          <a:solidFill>
-            <a:srgbClr val="E08A3C">
-              <a:alpha val="8000"/>
-            </a:srgbClr>
-          </a:solidFill>
-          <a:ln/>
-        </p:spPr>
-      </p:sp>
-      <p:sp>
-        <p:nvSpPr>
-          <p:cNvPr id="4" name="Text 2"/>
-          <p:cNvSpPr txBox="1"/>
-          <p:nvPr/>
-        </p:nvSpPr>
-        <p:spPr>
-          <a:xfrm>
-            <a:off x="566928" y="566928"/>
-            <a:ext cx="11057839" cy="237744"/>
-          </a:xfrm>
-          <a:prstGeom prst="rect">
-            <a:avLst/>
-          </a:prstGeom>
-          <a:noFill/>
-          <a:ln/>
-        </p:spPr>
-        <p:txBody>
-          <a:bodyPr wrap="square" lIns="0" tIns="0" rIns="0" bIns="0" rtlCol="0" anchor="ctr"/>
-          <a:lstStyle/>
-          <a:p>
-            <a:pPr indent="0" marL="0">
-              <a:buNone/>
-            </a:pPr>
-            <a:r>
-              <a:rPr lang="en-US" sz="1050" b="1" spc="160" kern="0" dirty="0">
-                <a:solidFill>
-                  <a:srgbClr val="E08A3C"/>
-                </a:solidFill>
-                <a:latin typeface="Calibri" pitchFamily="34" charset="0"/>
-                <a:ea typeface="Calibri" pitchFamily="34" charset="-122"/>
-                <a:cs typeface="Calibri" pitchFamily="34" charset="-120"/>
-              </a:rPr>
-              <a:t>NEXT STEPS</a:t>
-            </a:r>
-            <a:endParaRPr lang="en-US" sz="1050" dirty="0"/>
-          </a:p>
-        </p:txBody>
-      </p:sp>
-      <p:sp>
-        <p:nvSpPr>
-          <p:cNvPr id="5" name="Text 3"/>
-          <p:cNvSpPr txBox="1"/>
-          <p:nvPr/>
-        </p:nvSpPr>
-        <p:spPr>
-          <a:xfrm>
-            <a:off x="566928" y="822960"/>
-            <a:ext cx="11057839" cy="566928"/>
-          </a:xfrm>
-          <a:prstGeom prst="rect">
-            <a:avLst/>
-          </a:prstGeom>
-          <a:noFill/>
-          <a:ln/>
-        </p:spPr>
-        <p:txBody>
-          <a:bodyPr wrap="square" lIns="0" tIns="0" rIns="0" bIns="0" rtlCol="0" anchor="ctr"/>
-          <a:lstStyle/>
-          <a:p>
-            <a:pPr indent="0" marL="0">
-              <a:buNone/>
-            </a:pPr>
-            <a:r>
-              <a:rPr lang="en-US" sz="3300" b="1" dirty="0">
-                <a:solidFill>
-                  <a:srgbClr val="FFFFFF"/>
-                </a:solidFill>
-                <a:latin typeface="Cambria" pitchFamily="34" charset="0"/>
-                <a:ea typeface="Cambria" pitchFamily="34" charset="-122"/>
-                <a:cs typeface="Cambria" pitchFamily="34" charset="-120"/>
-              </a:rPr>
-              <a:t>Closing the Nine-Point Gap</a:t>
-            </a:r>
-            <a:endParaRPr lang="en-US" sz="3300" dirty="0"/>
-          </a:p>
-        </p:txBody>
-      </p:sp>
-      <p:sp>
-        <p:nvSpPr>
-          <p:cNvPr id="6" name="Shape 4"/>
-          <p:cNvSpPr/>
-          <p:nvPr/>
-        </p:nvSpPr>
-        <p:spPr>
-          <a:xfrm>
-            <a:off x="566928" y="1664208"/>
-            <a:ext cx="11057839" cy="859536"/>
-          </a:xfrm>
-          <a:prstGeom prst="roundRect">
-            <a:avLst>
-              <a:gd name="adj" fmla="val 10638"/>
-            </a:avLst>
-          </a:prstGeom>
-          <a:solidFill>
-            <a:srgbClr val="FFFFFF">
-              <a:alpha val="9000"/>
-            </a:srgbClr>
-          </a:solidFill>
-          <a:ln w="9525">
-            <a:solidFill>
-              <a:srgbClr val="FFFFFF">
-                <a:alpha val="24000"/>
-              </a:srgbClr>
-            </a:solidFill>
-            <a:prstDash val="solid"/>
-          </a:ln>
-        </p:spPr>
-      </p:sp>
-      <p:sp>
-        <p:nvSpPr>
-          <p:cNvPr id="7" name="Text 5"/>
-          <p:cNvSpPr txBox="1"/>
-          <p:nvPr/>
-        </p:nvSpPr>
-        <p:spPr>
-          <a:xfrm>
-            <a:off x="804672" y="1865376"/>
-            <a:ext cx="457200" cy="457200"/>
-          </a:xfrm>
-          <a:prstGeom prst="rect">
-            <a:avLst/>
-          </a:prstGeom>
-          <a:noFill/>
-          <a:ln/>
-        </p:spPr>
-        <p:txBody>
-          <a:bodyPr wrap="square" lIns="0" tIns="0" rIns="0" bIns="0" rtlCol="0" anchor="ctr"/>
-          <a:lstStyle/>
-          <a:p>
-            <a:pPr algn="ctr" indent="0" marL="0">
-              <a:buNone/>
-            </a:pPr>
-            <a:r>
-              <a:rPr lang="en-US" sz="2200" b="1" dirty="0">
-                <a:solidFill>
-                  <a:srgbClr val="E08A3C"/>
-                </a:solidFill>
-                <a:latin typeface="Cambria" pitchFamily="34" charset="0"/>
-                <a:ea typeface="Cambria" pitchFamily="34" charset="-122"/>
-                <a:cs typeface="Cambria" pitchFamily="34" charset="-120"/>
-              </a:rPr>
-              <a:t>1</a:t>
-            </a:r>
-            <a:endParaRPr lang="en-US" sz="2200" dirty="0"/>
-          </a:p>
-        </p:txBody>
-      </p:sp>
-      <p:sp>
-        <p:nvSpPr>
-          <p:cNvPr id="8" name="Text 6"/>
-          <p:cNvSpPr txBox="1"/>
-          <p:nvPr/>
-        </p:nvSpPr>
-        <p:spPr>
-          <a:xfrm>
-            <a:off x="1408176" y="1810512"/>
-            <a:ext cx="5577840" cy="274320"/>
-          </a:xfrm>
-          <a:prstGeom prst="rect">
-            <a:avLst/>
-          </a:prstGeom>
-          <a:noFill/>
-          <a:ln/>
-        </p:spPr>
-        <p:txBody>
-          <a:bodyPr wrap="square" lIns="0" tIns="0" rIns="0" bIns="0" rtlCol="0" anchor="ctr"/>
-          <a:lstStyle/>
-          <a:p>
-            <a:pPr indent="0" marL="0">
-              <a:buNone/>
-            </a:pPr>
-            <a:r>
-              <a:rPr lang="en-US" sz="1350" b="1" dirty="0">
-                <a:solidFill>
-                  <a:srgbClr val="FFFFFF"/>
-                </a:solidFill>
-                <a:latin typeface="Calibri" pitchFamily="34" charset="0"/>
-                <a:ea typeface="Calibri" pitchFamily="34" charset="-122"/>
-                <a:cs typeface="Calibri" pitchFamily="34" charset="-120"/>
-              </a:rPr>
-              <a:t>Name a lead for each open tender</a:t>
-            </a:r>
-            <a:endParaRPr lang="en-US" sz="1350" dirty="0"/>
-          </a:p>
-        </p:txBody>
-      </p:sp>
-      <p:sp>
-        <p:nvSpPr>
-          <p:cNvPr id="9" name="Text 7"/>
-          <p:cNvSpPr txBox="1"/>
-          <p:nvPr/>
-        </p:nvSpPr>
-        <p:spPr>
-          <a:xfrm>
-            <a:off x="1408176" y="2103120"/>
-            <a:ext cx="5577840" cy="256032"/>
-          </a:xfrm>
-          <a:prstGeom prst="rect">
-            <a:avLst/>
-          </a:prstGeom>
-          <a:noFill/>
-          <a:ln/>
-        </p:spPr>
-        <p:txBody>
-          <a:bodyPr wrap="square" lIns="0" tIns="0" rIns="0" bIns="0" rtlCol="0" anchor="ctr"/>
-          <a:lstStyle/>
-          <a:p>
-            <a:pPr indent="0" marL="0">
-              <a:buNone/>
-            </a:pPr>
-            <a:r>
-              <a:rPr lang="en-US" sz="1000" dirty="0">
-                <a:solidFill>
-                  <a:srgbClr val="AFC1D6"/>
-                </a:solidFill>
-                <a:latin typeface="Calibri" pitchFamily="34" charset="0"/>
-                <a:ea typeface="Calibri" pitchFamily="34" charset="-122"/>
-                <a:cs typeface="Calibri" pitchFamily="34" charset="-120"/>
-              </a:rPr>
-              <a:t>Kinbu priced BoQ and Stanbic preliminary estimate</a:t>
-            </a:r>
-            <a:endParaRPr lang="en-US" sz="1000" dirty="0"/>
-          </a:p>
-        </p:txBody>
-      </p:sp>
-      <p:sp>
-        <p:nvSpPr>
-          <p:cNvPr id="10" name="Text 8"/>
-          <p:cNvSpPr txBox="1"/>
-          <p:nvPr/>
-        </p:nvSpPr>
-        <p:spPr>
-          <a:xfrm>
-            <a:off x="7287768" y="1847088"/>
-            <a:ext cx="2194560" cy="182880"/>
-          </a:xfrm>
-          <a:prstGeom prst="rect">
-            <a:avLst/>
-          </a:prstGeom>
-          <a:noFill/>
-          <a:ln/>
-        </p:spPr>
-        <p:txBody>
-          <a:bodyPr wrap="square" lIns="0" tIns="0" rIns="0" bIns="0" rtlCol="0" anchor="ctr"/>
-          <a:lstStyle/>
-          <a:p>
-            <a:pPr indent="0" marL="0">
-              <a:buNone/>
-            </a:pPr>
-            <a:r>
-              <a:rPr lang="en-US" sz="800" b="1" spc="110" kern="0" dirty="0">
-                <a:solidFill>
-                  <a:srgbClr val="E08A3C"/>
-                </a:solidFill>
-                <a:latin typeface="Calibri" pitchFamily="34" charset="0"/>
-                <a:ea typeface="Calibri" pitchFamily="34" charset="-122"/>
-                <a:cs typeface="Calibri" pitchFamily="34" charset="-120"/>
-              </a:rPr>
-              <a:t>OWNER</a:t>
-            </a:r>
-            <a:endParaRPr lang="en-US" sz="800" dirty="0"/>
-          </a:p>
-        </p:txBody>
-      </p:sp>
-      <p:sp>
-        <p:nvSpPr>
-          <p:cNvPr id="11" name="Text 9"/>
-          <p:cNvSpPr txBox="1"/>
-          <p:nvPr/>
-        </p:nvSpPr>
-        <p:spPr>
-          <a:xfrm>
-            <a:off x="7287768" y="2048256"/>
-            <a:ext cx="2194560" cy="274320"/>
-          </a:xfrm>
-          <a:prstGeom prst="rect">
-            <a:avLst/>
-          </a:prstGeom>
-          <a:noFill/>
-          <a:ln/>
-        </p:spPr>
-        <p:txBody>
-          <a:bodyPr wrap="square" lIns="0" tIns="0" rIns="0" bIns="0" rtlCol="0" anchor="ctr"/>
-          <a:lstStyle/>
-          <a:p>
-            <a:pPr indent="0" marL="0">
-              <a:buNone/>
-            </a:pPr>
-            <a:r>
-              <a:rPr lang="en-US" sz="1100" dirty="0">
-                <a:solidFill>
-                  <a:srgbClr val="FFFFFF"/>
-                </a:solidFill>
-                <a:latin typeface="Calibri" pitchFamily="34" charset="0"/>
-                <a:ea typeface="Calibri" pitchFamily="34" charset="-122"/>
-                <a:cs typeface="Calibri" pitchFamily="34" charset="-120"/>
-              </a:rPr>
-              <a:t>Commercial Manager</a:t>
-            </a:r>
-            <a:endParaRPr lang="en-US" sz="1100" dirty="0"/>
-          </a:p>
-        </p:txBody>
-      </p:sp>
-      <p:sp>
-        <p:nvSpPr>
-          <p:cNvPr id="12" name="Text 10"/>
-          <p:cNvSpPr txBox="1"/>
-          <p:nvPr/>
-        </p:nvSpPr>
-        <p:spPr>
-          <a:xfrm>
-            <a:off x="9756648" y="1847088"/>
-            <a:ext cx="1645920" cy="182880"/>
-          </a:xfrm>
-          <a:prstGeom prst="rect">
-            <a:avLst/>
-          </a:prstGeom>
-          <a:noFill/>
-          <a:ln/>
-        </p:spPr>
-        <p:txBody>
-          <a:bodyPr wrap="square" lIns="0" tIns="0" rIns="0" bIns="0" rtlCol="0" anchor="ctr"/>
-          <a:lstStyle/>
-          <a:p>
-            <a:pPr indent="0" marL="0">
-              <a:buNone/>
-            </a:pPr>
-            <a:r>
-              <a:rPr lang="en-US" sz="800" b="1" spc="110" kern="0" dirty="0">
-                <a:solidFill>
-                  <a:srgbClr val="E08A3C"/>
-                </a:solidFill>
-                <a:latin typeface="Calibri" pitchFamily="34" charset="0"/>
-                <a:ea typeface="Calibri" pitchFamily="34" charset="-122"/>
-                <a:cs typeface="Calibri" pitchFamily="34" charset="-120"/>
-              </a:rPr>
-              <a:t>BY</a:t>
-            </a:r>
-            <a:endParaRPr lang="en-US" sz="800" dirty="0"/>
-          </a:p>
-        </p:txBody>
-      </p:sp>
-      <p:sp>
-        <p:nvSpPr>
-          <p:cNvPr id="13" name="Text 11"/>
-          <p:cNvSpPr txBox="1"/>
-          <p:nvPr/>
-        </p:nvSpPr>
-        <p:spPr>
-          <a:xfrm>
-            <a:off x="9756648" y="2048256"/>
-            <a:ext cx="1645920" cy="274320"/>
-          </a:xfrm>
-          <a:prstGeom prst="rect">
-            <a:avLst/>
-          </a:prstGeom>
-          <a:noFill/>
-          <a:ln/>
-        </p:spPr>
-        <p:txBody>
-          <a:bodyPr wrap="square" lIns="0" tIns="0" rIns="0" bIns="0" rtlCol="0" anchor="ctr"/>
-          <a:lstStyle/>
-          <a:p>
-            <a:pPr indent="0" marL="0">
-              <a:buNone/>
-            </a:pPr>
-            <a:r>
-              <a:rPr lang="en-US" sz="1200" b="1" dirty="0">
-                <a:solidFill>
-                  <a:srgbClr val="FFFFFF"/>
-                </a:solidFill>
-                <a:latin typeface="Calibri" pitchFamily="34" charset="0"/>
-                <a:ea typeface="Calibri" pitchFamily="34" charset="-122"/>
-                <a:cs typeface="Calibri" pitchFamily="34" charset="-120"/>
-              </a:rPr>
-              <a:t>Today</a:t>
-            </a:r>
-            <a:endParaRPr lang="en-US" sz="1200" dirty="0"/>
-          </a:p>
-        </p:txBody>
-      </p:sp>
-      <p:sp>
-        <p:nvSpPr>
-          <p:cNvPr id="14" name="Shape 12"/>
-          <p:cNvSpPr/>
-          <p:nvPr/>
-        </p:nvSpPr>
-        <p:spPr>
-          <a:xfrm>
-            <a:off x="566928" y="2679192"/>
-            <a:ext cx="11057839" cy="859536"/>
-          </a:xfrm>
-          <a:prstGeom prst="roundRect">
-            <a:avLst>
-              <a:gd name="adj" fmla="val 10638"/>
-            </a:avLst>
-          </a:prstGeom>
-          <a:solidFill>
-            <a:srgbClr val="FFFFFF">
-              <a:alpha val="9000"/>
-            </a:srgbClr>
-          </a:solidFill>
-          <a:ln w="9525">
-            <a:solidFill>
-              <a:srgbClr val="FFFFFF">
-                <a:alpha val="24000"/>
-              </a:srgbClr>
-            </a:solidFill>
-            <a:prstDash val="solid"/>
-          </a:ln>
-        </p:spPr>
-      </p:sp>
-      <p:sp>
-        <p:nvSpPr>
-          <p:cNvPr id="15" name="Text 13"/>
-          <p:cNvSpPr txBox="1"/>
-          <p:nvPr/>
-        </p:nvSpPr>
-        <p:spPr>
-          <a:xfrm>
-            <a:off x="804672" y="2880360"/>
-            <a:ext cx="457200" cy="457200"/>
-          </a:xfrm>
-          <a:prstGeom prst="rect">
-            <a:avLst/>
-          </a:prstGeom>
-          <a:noFill/>
-          <a:ln/>
-        </p:spPr>
-        <p:txBody>
-          <a:bodyPr wrap="square" lIns="0" tIns="0" rIns="0" bIns="0" rtlCol="0" anchor="ctr"/>
-          <a:lstStyle/>
-          <a:p>
-            <a:pPr algn="ctr" indent="0" marL="0">
-              <a:buNone/>
-            </a:pPr>
-            <a:r>
-              <a:rPr lang="en-US" sz="2200" b="1" dirty="0">
-                <a:solidFill>
-                  <a:srgbClr val="E08A3C"/>
-                </a:solidFill>
-                <a:latin typeface="Cambria" pitchFamily="34" charset="0"/>
-                <a:ea typeface="Cambria" pitchFamily="34" charset="-122"/>
-                <a:cs typeface="Cambria" pitchFamily="34" charset="-120"/>
-              </a:rPr>
-              <a:t>2</a:t>
-            </a:r>
-            <a:endParaRPr lang="en-US" sz="2200" dirty="0"/>
-          </a:p>
-        </p:txBody>
-      </p:sp>
-      <p:sp>
-        <p:nvSpPr>
-          <p:cNvPr id="16" name="Text 14"/>
-          <p:cNvSpPr txBox="1"/>
-          <p:nvPr/>
-        </p:nvSpPr>
-        <p:spPr>
-          <a:xfrm>
-            <a:off x="1408176" y="2825496"/>
-            <a:ext cx="5577840" cy="274320"/>
-          </a:xfrm>
-          <a:prstGeom prst="rect">
-            <a:avLst/>
-          </a:prstGeom>
-          <a:noFill/>
-          <a:ln/>
-        </p:spPr>
-        <p:txBody>
-          <a:bodyPr wrap="square" lIns="0" tIns="0" rIns="0" bIns="0" rtlCol="0" anchor="ctr"/>
-          <a:lstStyle/>
-          <a:p>
-            <a:pPr indent="0" marL="0">
-              <a:buNone/>
-            </a:pPr>
-            <a:r>
-              <a:rPr lang="en-US" sz="1350" b="1" dirty="0">
-                <a:solidFill>
-                  <a:srgbClr val="FFFFFF"/>
-                </a:solidFill>
-                <a:latin typeface="Calibri" pitchFamily="34" charset="0"/>
-                <a:ea typeface="Calibri" pitchFamily="34" charset="-122"/>
-                <a:cs typeface="Calibri" pitchFamily="34" charset="-120"/>
-              </a:rPr>
-              <a:t>Close out the Ecole BoQ and budget</a:t>
-            </a:r>
-            <a:endParaRPr lang="en-US" sz="1350" dirty="0"/>
-          </a:p>
-        </p:txBody>
-      </p:sp>
-      <p:sp>
-        <p:nvSpPr>
-          <p:cNvPr id="17" name="Text 15"/>
-          <p:cNvSpPr txBox="1"/>
-          <p:nvPr/>
-        </p:nvSpPr>
-        <p:spPr>
-          <a:xfrm>
-            <a:off x="1408176" y="3118104"/>
-            <a:ext cx="5577840" cy="256032"/>
-          </a:xfrm>
-          <a:prstGeom prst="rect">
-            <a:avLst/>
-          </a:prstGeom>
-          <a:noFill/>
-          <a:ln/>
-        </p:spPr>
-        <p:txBody>
-          <a:bodyPr wrap="square" lIns="0" tIns="0" rIns="0" bIns="0" rtlCol="0" anchor="ctr"/>
-          <a:lstStyle/>
-          <a:p>
-            <a:pPr indent="0" marL="0">
-              <a:buNone/>
-            </a:pPr>
-            <a:r>
-              <a:rPr lang="en-US" sz="1000" dirty="0">
-                <a:solidFill>
-                  <a:srgbClr val="AFC1D6"/>
-                </a:solidFill>
-                <a:latin typeface="Calibri" pitchFamily="34" charset="0"/>
-                <a:ea typeface="Calibri" pitchFamily="34" charset="-122"/>
-                <a:cs typeface="Calibri" pitchFamily="34" charset="-120"/>
-              </a:rPr>
-              <a:t>Now at 50% and past its due date</a:t>
-            </a:r>
-            <a:endParaRPr lang="en-US" sz="1000" dirty="0"/>
-          </a:p>
-        </p:txBody>
-      </p:sp>
-      <p:sp>
-        <p:nvSpPr>
-          <p:cNvPr id="18" name="Text 16"/>
-          <p:cNvSpPr txBox="1"/>
-          <p:nvPr/>
-        </p:nvSpPr>
-        <p:spPr>
-          <a:xfrm>
-            <a:off x="7287768" y="2862072"/>
-            <a:ext cx="2194560" cy="182880"/>
-          </a:xfrm>
-          <a:prstGeom prst="rect">
-            <a:avLst/>
-          </a:prstGeom>
-          <a:noFill/>
-          <a:ln/>
-        </p:spPr>
-        <p:txBody>
-          <a:bodyPr wrap="square" lIns="0" tIns="0" rIns="0" bIns="0" rtlCol="0" anchor="ctr"/>
-          <a:lstStyle/>
-          <a:p>
-            <a:pPr indent="0" marL="0">
-              <a:buNone/>
-            </a:pPr>
-            <a:r>
-              <a:rPr lang="en-US" sz="800" b="1" spc="110" kern="0" dirty="0">
-                <a:solidFill>
-                  <a:srgbClr val="E08A3C"/>
-                </a:solidFill>
-                <a:latin typeface="Calibri" pitchFamily="34" charset="0"/>
-                <a:ea typeface="Calibri" pitchFamily="34" charset="-122"/>
-                <a:cs typeface="Calibri" pitchFamily="34" charset="-120"/>
-              </a:rPr>
-              <a:t>OWNER</a:t>
-            </a:r>
-            <a:endParaRPr lang="en-US" sz="800" dirty="0"/>
-          </a:p>
-        </p:txBody>
-      </p:sp>
-      <p:sp>
-        <p:nvSpPr>
-          <p:cNvPr id="19" name="Text 17"/>
-          <p:cNvSpPr txBox="1"/>
-          <p:nvPr/>
-        </p:nvSpPr>
-        <p:spPr>
-          <a:xfrm>
-            <a:off x="7287768" y="3063240"/>
-            <a:ext cx="2194560" cy="274320"/>
-          </a:xfrm>
-          <a:prstGeom prst="rect">
-            <a:avLst/>
-          </a:prstGeom>
-          <a:noFill/>
-          <a:ln/>
-        </p:spPr>
-        <p:txBody>
-          <a:bodyPr wrap="square" lIns="0" tIns="0" rIns="0" bIns="0" rtlCol="0" anchor="ctr"/>
-          <a:lstStyle/>
-          <a:p>
-            <a:pPr indent="0" marL="0">
-              <a:buNone/>
-            </a:pPr>
-            <a:r>
-              <a:rPr lang="en-US" sz="1100" dirty="0">
-                <a:solidFill>
-                  <a:srgbClr val="FFFFFF"/>
-                </a:solidFill>
-                <a:latin typeface="Calibri" pitchFamily="34" charset="0"/>
-                <a:ea typeface="Calibri" pitchFamily="34" charset="-122"/>
-                <a:cs typeface="Calibri" pitchFamily="34" charset="-120"/>
-              </a:rPr>
-              <a:t>Tracy, Obed, Eunice</a:t>
-            </a:r>
-            <a:endParaRPr lang="en-US" sz="1100" dirty="0"/>
-          </a:p>
-        </p:txBody>
-      </p:sp>
-      <p:sp>
-        <p:nvSpPr>
-          <p:cNvPr id="20" name="Text 18"/>
-          <p:cNvSpPr txBox="1"/>
-          <p:nvPr/>
-        </p:nvSpPr>
-        <p:spPr>
-          <a:xfrm>
-            <a:off x="9756648" y="2862072"/>
-            <a:ext cx="1645920" cy="182880"/>
-          </a:xfrm>
-          <a:prstGeom prst="rect">
-            <a:avLst/>
-          </a:prstGeom>
-          <a:noFill/>
-          <a:ln/>
-        </p:spPr>
-        <p:txBody>
-          <a:bodyPr wrap="square" lIns="0" tIns="0" rIns="0" bIns="0" rtlCol="0" anchor="ctr"/>
-          <a:lstStyle/>
-          <a:p>
-            <a:pPr indent="0" marL="0">
-              <a:buNone/>
-            </a:pPr>
-            <a:r>
-              <a:rPr lang="en-US" sz="800" b="1" spc="110" kern="0" dirty="0">
-                <a:solidFill>
-                  <a:srgbClr val="E08A3C"/>
-                </a:solidFill>
-                <a:latin typeface="Calibri" pitchFamily="34" charset="0"/>
-                <a:ea typeface="Calibri" pitchFamily="34" charset="-122"/>
-                <a:cs typeface="Calibri" pitchFamily="34" charset="-120"/>
-              </a:rPr>
-              <a:t>BY</a:t>
-            </a:r>
-            <a:endParaRPr lang="en-US" sz="800" dirty="0"/>
-          </a:p>
-        </p:txBody>
-      </p:sp>
-      <p:sp>
-        <p:nvSpPr>
-          <p:cNvPr id="21" name="Text 19"/>
-          <p:cNvSpPr txBox="1"/>
-          <p:nvPr/>
-        </p:nvSpPr>
-        <p:spPr>
-          <a:xfrm>
-            <a:off x="9756648" y="3063240"/>
-            <a:ext cx="1645920" cy="274320"/>
-          </a:xfrm>
-          <a:prstGeom prst="rect">
-            <a:avLst/>
-          </a:prstGeom>
-          <a:noFill/>
-          <a:ln/>
-        </p:spPr>
-        <p:txBody>
-          <a:bodyPr wrap="square" lIns="0" tIns="0" rIns="0" bIns="0" rtlCol="0" anchor="ctr"/>
-          <a:lstStyle/>
-          <a:p>
-            <a:pPr indent="0" marL="0">
-              <a:buNone/>
-            </a:pPr>
-            <a:r>
-              <a:rPr lang="en-US" sz="1200" b="1" dirty="0">
-                <a:solidFill>
-                  <a:srgbClr val="FFFFFF"/>
-                </a:solidFill>
-                <a:latin typeface="Calibri" pitchFamily="34" charset="0"/>
-                <a:ea typeface="Calibri" pitchFamily="34" charset="-122"/>
-                <a:cs typeface="Calibri" pitchFamily="34" charset="-120"/>
-              </a:rPr>
-              <a:t>22 Sep</a:t>
-            </a:r>
-            <a:endParaRPr lang="en-US" sz="1200" dirty="0"/>
-          </a:p>
-        </p:txBody>
-      </p:sp>
-      <p:sp>
-        <p:nvSpPr>
-          <p:cNvPr id="22" name="Shape 20"/>
-          <p:cNvSpPr/>
-          <p:nvPr/>
-        </p:nvSpPr>
-        <p:spPr>
-          <a:xfrm>
-            <a:off x="566928" y="3694176"/>
-            <a:ext cx="11057839" cy="859536"/>
-          </a:xfrm>
-          <a:prstGeom prst="roundRect">
-            <a:avLst>
-              <a:gd name="adj" fmla="val 10638"/>
-            </a:avLst>
-          </a:prstGeom>
-          <a:solidFill>
-            <a:srgbClr val="FFFFFF">
-              <a:alpha val="9000"/>
-            </a:srgbClr>
-          </a:solidFill>
-          <a:ln w="9525">
-            <a:solidFill>
-              <a:srgbClr val="FFFFFF">
-                <a:alpha val="24000"/>
-              </a:srgbClr>
-            </a:solidFill>
-            <a:prstDash val="solid"/>
-          </a:ln>
-        </p:spPr>
-      </p:sp>
-      <p:sp>
-        <p:nvSpPr>
-          <p:cNvPr id="23" name="Text 21"/>
-          <p:cNvSpPr txBox="1"/>
-          <p:nvPr/>
-        </p:nvSpPr>
-        <p:spPr>
-          <a:xfrm>
-            <a:off x="804672" y="3895344"/>
-            <a:ext cx="457200" cy="457200"/>
-          </a:xfrm>
-          <a:prstGeom prst="rect">
-            <a:avLst/>
-          </a:prstGeom>
-          <a:noFill/>
-          <a:ln/>
-        </p:spPr>
-        <p:txBody>
-          <a:bodyPr wrap="square" lIns="0" tIns="0" rIns="0" bIns="0" rtlCol="0" anchor="ctr"/>
-          <a:lstStyle/>
-          <a:p>
-            <a:pPr algn="ctr" indent="0" marL="0">
-              <a:buNone/>
-            </a:pPr>
-            <a:r>
-              <a:rPr lang="en-US" sz="2200" b="1" dirty="0">
-                <a:solidFill>
-                  <a:srgbClr val="E08A3C"/>
-                </a:solidFill>
-                <a:latin typeface="Cambria" pitchFamily="34" charset="0"/>
-                <a:ea typeface="Cambria" pitchFamily="34" charset="-122"/>
-                <a:cs typeface="Cambria" pitchFamily="34" charset="-120"/>
-              </a:rPr>
-              <a:t>3</a:t>
-            </a:r>
-            <a:endParaRPr lang="en-US" sz="2200" dirty="0"/>
-          </a:p>
-        </p:txBody>
-      </p:sp>
-      <p:sp>
-        <p:nvSpPr>
-          <p:cNvPr id="24" name="Text 22"/>
-          <p:cNvSpPr txBox="1"/>
-          <p:nvPr/>
-        </p:nvSpPr>
-        <p:spPr>
-          <a:xfrm>
-            <a:off x="1408176" y="3840480"/>
-            <a:ext cx="5577840" cy="274320"/>
-          </a:xfrm>
-          <a:prstGeom prst="rect">
-            <a:avLst/>
-          </a:prstGeom>
-          <a:noFill/>
-          <a:ln/>
-        </p:spPr>
-        <p:txBody>
-          <a:bodyPr wrap="square" lIns="0" tIns="0" rIns="0" bIns="0" rtlCol="0" anchor="ctr"/>
-          <a:lstStyle/>
-          <a:p>
-            <a:pPr indent="0" marL="0">
-              <a:buNone/>
-            </a:pPr>
-            <a:r>
-              <a:rPr lang="en-US" sz="1350" b="1" dirty="0">
-                <a:solidFill>
-                  <a:srgbClr val="FFFFFF"/>
-                </a:solidFill>
-                <a:latin typeface="Calibri" pitchFamily="34" charset="0"/>
-                <a:ea typeface="Calibri" pitchFamily="34" charset="-122"/>
-                <a:cs typeface="Calibri" pitchFamily="34" charset="-120"/>
-              </a:rPr>
-              <a:t>Obtain the Priority Insurance drawings</a:t>
-            </a:r>
-            <a:endParaRPr lang="en-US" sz="1350" dirty="0"/>
-          </a:p>
-        </p:txBody>
-      </p:sp>
-      <p:sp>
-        <p:nvSpPr>
-          <p:cNvPr id="25" name="Text 23"/>
-          <p:cNvSpPr txBox="1"/>
-          <p:nvPr/>
-        </p:nvSpPr>
-        <p:spPr>
-          <a:xfrm>
-            <a:off x="1408176" y="4133088"/>
-            <a:ext cx="5577840" cy="256032"/>
-          </a:xfrm>
-          <a:prstGeom prst="rect">
-            <a:avLst/>
-          </a:prstGeom>
-          <a:noFill/>
-          <a:ln/>
-        </p:spPr>
-        <p:txBody>
-          <a:bodyPr wrap="square" lIns="0" tIns="0" rIns="0" bIns="0" rtlCol="0" anchor="ctr"/>
-          <a:lstStyle/>
-          <a:p>
-            <a:pPr indent="0" marL="0">
-              <a:buNone/>
-            </a:pPr>
-            <a:r>
-              <a:rPr lang="en-US" sz="1000" dirty="0">
-                <a:solidFill>
-                  <a:srgbClr val="AFC1D6"/>
-                </a:solidFill>
-                <a:latin typeface="Calibri" pitchFamily="34" charset="0"/>
-                <a:ea typeface="Calibri" pitchFamily="34" charset="-122"/>
-                <a:cs typeface="Calibri" pitchFamily="34" charset="-120"/>
-              </a:rPr>
-              <a:t>Floor finishes schedule and structural drawings</a:t>
-            </a:r>
-            <a:endParaRPr lang="en-US" sz="1000" dirty="0"/>
-          </a:p>
-        </p:txBody>
-      </p:sp>
-      <p:sp>
-        <p:nvSpPr>
-          <p:cNvPr id="26" name="Text 24"/>
-          <p:cNvSpPr txBox="1"/>
-          <p:nvPr/>
-        </p:nvSpPr>
-        <p:spPr>
-          <a:xfrm>
-            <a:off x="7287768" y="3877056"/>
-            <a:ext cx="2194560" cy="182880"/>
-          </a:xfrm>
-          <a:prstGeom prst="rect">
-            <a:avLst/>
-          </a:prstGeom>
-          <a:noFill/>
-          <a:ln/>
-        </p:spPr>
-        <p:txBody>
-          <a:bodyPr wrap="square" lIns="0" tIns="0" rIns="0" bIns="0" rtlCol="0" anchor="ctr"/>
-          <a:lstStyle/>
-          <a:p>
-            <a:pPr indent="0" marL="0">
-              <a:buNone/>
-            </a:pPr>
-            <a:r>
-              <a:rPr lang="en-US" sz="800" b="1" spc="110" kern="0" dirty="0">
-                <a:solidFill>
-                  <a:srgbClr val="E08A3C"/>
-                </a:solidFill>
-                <a:latin typeface="Calibri" pitchFamily="34" charset="0"/>
-                <a:ea typeface="Calibri" pitchFamily="34" charset="-122"/>
-                <a:cs typeface="Calibri" pitchFamily="34" charset="-120"/>
-              </a:rPr>
-              <a:t>OWNER</a:t>
-            </a:r>
-            <a:endParaRPr lang="en-US" sz="800" dirty="0"/>
-          </a:p>
-        </p:txBody>
-      </p:sp>
-      <p:sp>
-        <p:nvSpPr>
-          <p:cNvPr id="27" name="Text 25"/>
-          <p:cNvSpPr txBox="1"/>
-          <p:nvPr/>
-        </p:nvSpPr>
-        <p:spPr>
-          <a:xfrm>
-            <a:off x="7287768" y="4078224"/>
-            <a:ext cx="2194560" cy="274320"/>
-          </a:xfrm>
-          <a:prstGeom prst="rect">
-            <a:avLst/>
-          </a:prstGeom>
-          <a:noFill/>
-          <a:ln/>
-        </p:spPr>
-        <p:txBody>
-          <a:bodyPr wrap="square" lIns="0" tIns="0" rIns="0" bIns="0" rtlCol="0" anchor="ctr"/>
-          <a:lstStyle/>
-          <a:p>
-            <a:pPr indent="0" marL="0">
-              <a:buNone/>
-            </a:pPr>
-            <a:r>
-              <a:rPr lang="en-US" sz="1100" dirty="0">
-                <a:solidFill>
-                  <a:srgbClr val="FFFFFF"/>
-                </a:solidFill>
-                <a:latin typeface="Calibri" pitchFamily="34" charset="0"/>
-                <a:ea typeface="Calibri" pitchFamily="34" charset="-122"/>
-                <a:cs typeface="Calibri" pitchFamily="34" charset="-120"/>
-              </a:rPr>
-              <a:t>Design team / client</a:t>
-            </a:r>
-            <a:endParaRPr lang="en-US" sz="1100" dirty="0"/>
-          </a:p>
-        </p:txBody>
-      </p:sp>
-      <p:sp>
-        <p:nvSpPr>
-          <p:cNvPr id="28" name="Text 26"/>
-          <p:cNvSpPr txBox="1"/>
-          <p:nvPr/>
-        </p:nvSpPr>
-        <p:spPr>
-          <a:xfrm>
-            <a:off x="9756648" y="3877056"/>
-            <a:ext cx="1645920" cy="182880"/>
-          </a:xfrm>
-          <a:prstGeom prst="rect">
-            <a:avLst/>
-          </a:prstGeom>
-          <a:noFill/>
-          <a:ln/>
-        </p:spPr>
-        <p:txBody>
-          <a:bodyPr wrap="square" lIns="0" tIns="0" rIns="0" bIns="0" rtlCol="0" anchor="ctr"/>
-          <a:lstStyle/>
-          <a:p>
-            <a:pPr indent="0" marL="0">
-              <a:buNone/>
-            </a:pPr>
-            <a:r>
-              <a:rPr lang="en-US" sz="800" b="1" spc="110" kern="0" dirty="0">
-                <a:solidFill>
-                  <a:srgbClr val="E08A3C"/>
-                </a:solidFill>
-                <a:latin typeface="Calibri" pitchFamily="34" charset="0"/>
-                <a:ea typeface="Calibri" pitchFamily="34" charset="-122"/>
-                <a:cs typeface="Calibri" pitchFamily="34" charset="-120"/>
-              </a:rPr>
-              <a:t>BY</a:t>
-            </a:r>
-            <a:endParaRPr lang="en-US" sz="800" dirty="0"/>
-          </a:p>
-        </p:txBody>
-      </p:sp>
-      <p:sp>
-        <p:nvSpPr>
-          <p:cNvPr id="29" name="Text 27"/>
-          <p:cNvSpPr txBox="1"/>
-          <p:nvPr/>
-        </p:nvSpPr>
-        <p:spPr>
-          <a:xfrm>
-            <a:off x="9756648" y="4078224"/>
-            <a:ext cx="1645920" cy="274320"/>
-          </a:xfrm>
-          <a:prstGeom prst="rect">
-            <a:avLst/>
-          </a:prstGeom>
-          <a:noFill/>
-          <a:ln/>
-        </p:spPr>
-        <p:txBody>
-          <a:bodyPr wrap="square" lIns="0" tIns="0" rIns="0" bIns="0" rtlCol="0" anchor="ctr"/>
-          <a:lstStyle/>
-          <a:p>
-            <a:pPr indent="0" marL="0">
-              <a:buNone/>
-            </a:pPr>
-            <a:r>
-              <a:rPr lang="en-US" sz="1200" b="1" dirty="0">
-                <a:solidFill>
-                  <a:srgbClr val="FFFFFF"/>
-                </a:solidFill>
-                <a:latin typeface="Calibri" pitchFamily="34" charset="0"/>
-                <a:ea typeface="Calibri" pitchFamily="34" charset="-122"/>
-                <a:cs typeface="Calibri" pitchFamily="34" charset="-120"/>
-              </a:rPr>
-              <a:t>23 Sep</a:t>
-            </a:r>
-            <a:endParaRPr lang="en-US" sz="1200" dirty="0"/>
-          </a:p>
-        </p:txBody>
-      </p:sp>
-      <p:sp>
-        <p:nvSpPr>
-          <p:cNvPr id="30" name="Shape 28"/>
-          <p:cNvSpPr/>
-          <p:nvPr/>
-        </p:nvSpPr>
-        <p:spPr>
-          <a:xfrm>
-            <a:off x="566928" y="4709160"/>
-            <a:ext cx="11057839" cy="859536"/>
-          </a:xfrm>
-          <a:prstGeom prst="roundRect">
-            <a:avLst>
-              <a:gd name="adj" fmla="val 10638"/>
-            </a:avLst>
-          </a:prstGeom>
-          <a:solidFill>
-            <a:srgbClr val="FFFFFF">
-              <a:alpha val="9000"/>
-            </a:srgbClr>
-          </a:solidFill>
-          <a:ln w="9525">
-            <a:solidFill>
-              <a:srgbClr val="FFFFFF">
-                <a:alpha val="24000"/>
-              </a:srgbClr>
-            </a:solidFill>
-            <a:prstDash val="solid"/>
-          </a:ln>
-        </p:spPr>
-      </p:sp>
-      <p:sp>
-        <p:nvSpPr>
-          <p:cNvPr id="31" name="Text 29"/>
-          <p:cNvSpPr txBox="1"/>
-          <p:nvPr/>
-        </p:nvSpPr>
-        <p:spPr>
-          <a:xfrm>
-            <a:off x="804672" y="4910328"/>
-            <a:ext cx="457200" cy="457200"/>
-          </a:xfrm>
-          <a:prstGeom prst="rect">
-            <a:avLst/>
-          </a:prstGeom>
-          <a:noFill/>
-          <a:ln/>
-        </p:spPr>
-        <p:txBody>
-          <a:bodyPr wrap="square" lIns="0" tIns="0" rIns="0" bIns="0" rtlCol="0" anchor="ctr"/>
-          <a:lstStyle/>
-          <a:p>
-            <a:pPr algn="ctr" indent="0" marL="0">
-              <a:buNone/>
-            </a:pPr>
-            <a:r>
-              <a:rPr lang="en-US" sz="2200" b="1" dirty="0">
-                <a:solidFill>
-                  <a:srgbClr val="E08A3C"/>
-                </a:solidFill>
-                <a:latin typeface="Cambria" pitchFamily="34" charset="0"/>
-                <a:ea typeface="Cambria" pitchFamily="34" charset="-122"/>
-                <a:cs typeface="Cambria" pitchFamily="34" charset="-120"/>
-              </a:rPr>
-              <a:t>4</a:t>
-            </a:r>
-            <a:endParaRPr lang="en-US" sz="2200" dirty="0"/>
-          </a:p>
-        </p:txBody>
-      </p:sp>
-      <p:sp>
-        <p:nvSpPr>
-          <p:cNvPr id="32" name="Text 30"/>
-          <p:cNvSpPr txBox="1"/>
-          <p:nvPr/>
-        </p:nvSpPr>
-        <p:spPr>
-          <a:xfrm>
-            <a:off x="1408176" y="4855464"/>
-            <a:ext cx="5577840" cy="274320"/>
-          </a:xfrm>
-          <a:prstGeom prst="rect">
-            <a:avLst/>
-          </a:prstGeom>
-          <a:noFill/>
-          <a:ln/>
-        </p:spPr>
-        <p:txBody>
-          <a:bodyPr wrap="square" lIns="0" tIns="0" rIns="0" bIns="0" rtlCol="0" anchor="ctr"/>
-          <a:lstStyle/>
-          <a:p>
-            <a:pPr indent="0" marL="0">
-              <a:buNone/>
-            </a:pPr>
-            <a:r>
-              <a:rPr lang="en-US" sz="1350" b="1" dirty="0">
-                <a:solidFill>
-                  <a:srgbClr val="FFFFFF"/>
-                </a:solidFill>
-                <a:latin typeface="Calibri" pitchFamily="34" charset="0"/>
-                <a:ea typeface="Calibri" pitchFamily="34" charset="-122"/>
-                <a:cs typeface="Calibri" pitchFamily="34" charset="-120"/>
-              </a:rPr>
-              <a:t>Clear the Anglogold budget review</a:t>
-            </a:r>
-            <a:endParaRPr lang="en-US" sz="1350" dirty="0"/>
-          </a:p>
-        </p:txBody>
-      </p:sp>
-      <p:sp>
-        <p:nvSpPr>
-          <p:cNvPr id="33" name="Text 31"/>
-          <p:cNvSpPr txBox="1"/>
-          <p:nvPr/>
-        </p:nvSpPr>
-        <p:spPr>
-          <a:xfrm>
-            <a:off x="1408176" y="5148072"/>
-            <a:ext cx="5577840" cy="256032"/>
-          </a:xfrm>
-          <a:prstGeom prst="rect">
-            <a:avLst/>
-          </a:prstGeom>
-          <a:noFill/>
-          <a:ln/>
-        </p:spPr>
-        <p:txBody>
-          <a:bodyPr wrap="square" lIns="0" tIns="0" rIns="0" bIns="0" rtlCol="0" anchor="ctr"/>
-          <a:lstStyle/>
-          <a:p>
-            <a:pPr indent="0" marL="0">
-              <a:buNone/>
-            </a:pPr>
-            <a:r>
-              <a:rPr lang="en-US" sz="1000" dirty="0">
-                <a:solidFill>
-                  <a:srgbClr val="AFC1D6"/>
-                </a:solidFill>
-                <a:latin typeface="Calibri" pitchFamily="34" charset="0"/>
-                <a:ea typeface="Calibri" pitchFamily="34" charset="-122"/>
-                <a:cs typeface="Calibri" pitchFamily="34" charset="-120"/>
-              </a:rPr>
-              <a:t>Complete since 11 September, awaiting a reviewer</a:t>
-            </a:r>
-            <a:endParaRPr lang="en-US" sz="1000" dirty="0"/>
-          </a:p>
-        </p:txBody>
-      </p:sp>
-      <p:sp>
-        <p:nvSpPr>
-          <p:cNvPr id="34" name="Text 32"/>
-          <p:cNvSpPr txBox="1"/>
-          <p:nvPr/>
-        </p:nvSpPr>
-        <p:spPr>
-          <a:xfrm>
-            <a:off x="7287768" y="4892040"/>
-            <a:ext cx="2194560" cy="182880"/>
-          </a:xfrm>
-          <a:prstGeom prst="rect">
-            <a:avLst/>
-          </a:prstGeom>
-          <a:noFill/>
-          <a:ln/>
-        </p:spPr>
-        <p:txBody>
-          <a:bodyPr wrap="square" lIns="0" tIns="0" rIns="0" bIns="0" rtlCol="0" anchor="ctr"/>
-          <a:lstStyle/>
-          <a:p>
-            <a:pPr indent="0" marL="0">
-              <a:buNone/>
-            </a:pPr>
-            <a:r>
-              <a:rPr lang="en-US" sz="800" b="1" spc="110" kern="0" dirty="0">
-                <a:solidFill>
-                  <a:srgbClr val="E08A3C"/>
-                </a:solidFill>
-                <a:latin typeface="Calibri" pitchFamily="34" charset="0"/>
-                <a:ea typeface="Calibri" pitchFamily="34" charset="-122"/>
-                <a:cs typeface="Calibri" pitchFamily="34" charset="-120"/>
-              </a:rPr>
-              <a:t>OWNER</a:t>
-            </a:r>
-            <a:endParaRPr lang="en-US" sz="800" dirty="0"/>
-          </a:p>
-        </p:txBody>
-      </p:sp>
-      <p:sp>
-        <p:nvSpPr>
-          <p:cNvPr id="35" name="Text 33"/>
-          <p:cNvSpPr txBox="1"/>
-          <p:nvPr/>
-        </p:nvSpPr>
-        <p:spPr>
-          <a:xfrm>
-            <a:off x="7287768" y="5093208"/>
-            <a:ext cx="2194560" cy="274320"/>
-          </a:xfrm>
-          <a:prstGeom prst="rect">
-            <a:avLst/>
-          </a:prstGeom>
-          <a:noFill/>
-          <a:ln/>
-        </p:spPr>
-        <p:txBody>
-          <a:bodyPr wrap="square" lIns="0" tIns="0" rIns="0" bIns="0" rtlCol="0" anchor="ctr"/>
-          <a:lstStyle/>
-          <a:p>
-            <a:pPr indent="0" marL="0">
-              <a:buNone/>
-            </a:pPr>
-            <a:r>
-              <a:rPr lang="en-US" sz="1100" dirty="0">
-                <a:solidFill>
-                  <a:srgbClr val="FFFFFF"/>
-                </a:solidFill>
-                <a:latin typeface="Calibri" pitchFamily="34" charset="0"/>
-                <a:ea typeface="Calibri" pitchFamily="34" charset="-122"/>
-                <a:cs typeface="Calibri" pitchFamily="34" charset="-120"/>
-              </a:rPr>
-              <a:t>Nominated reviewer</a:t>
-            </a:r>
-            <a:endParaRPr lang="en-US" sz="1100" dirty="0"/>
-          </a:p>
-        </p:txBody>
-      </p:sp>
-      <p:sp>
-        <p:nvSpPr>
-          <p:cNvPr id="36" name="Text 34"/>
-          <p:cNvSpPr txBox="1"/>
-          <p:nvPr/>
-        </p:nvSpPr>
-        <p:spPr>
-          <a:xfrm>
-            <a:off x="9756648" y="4892040"/>
-            <a:ext cx="1645920" cy="182880"/>
-          </a:xfrm>
-          <a:prstGeom prst="rect">
-            <a:avLst/>
-          </a:prstGeom>
-          <a:noFill/>
-          <a:ln/>
-        </p:spPr>
-        <p:txBody>
-          <a:bodyPr wrap="square" lIns="0" tIns="0" rIns="0" bIns="0" rtlCol="0" anchor="ctr"/>
-          <a:lstStyle/>
-          <a:p>
-            <a:pPr indent="0" marL="0">
-              <a:buNone/>
-            </a:pPr>
-            <a:r>
-              <a:rPr lang="en-US" sz="800" b="1" spc="110" kern="0" dirty="0">
-                <a:solidFill>
-                  <a:srgbClr val="E08A3C"/>
-                </a:solidFill>
-                <a:latin typeface="Calibri" pitchFamily="34" charset="0"/>
-                <a:ea typeface="Calibri" pitchFamily="34" charset="-122"/>
-                <a:cs typeface="Calibri" pitchFamily="34" charset="-120"/>
-              </a:rPr>
-              <a:t>BY</a:t>
-            </a:r>
-            <a:endParaRPr lang="en-US" sz="800" dirty="0"/>
-          </a:p>
-        </p:txBody>
-      </p:sp>
-      <p:sp>
-        <p:nvSpPr>
-          <p:cNvPr id="37" name="Text 35"/>
-          <p:cNvSpPr txBox="1"/>
-          <p:nvPr/>
-        </p:nvSpPr>
-        <p:spPr>
-          <a:xfrm>
-            <a:off x="9756648" y="5093208"/>
-            <a:ext cx="1645920" cy="274320"/>
-          </a:xfrm>
-          <a:prstGeom prst="rect">
-            <a:avLst/>
-          </a:prstGeom>
-          <a:noFill/>
-          <a:ln/>
-        </p:spPr>
-        <p:txBody>
-          <a:bodyPr wrap="square" lIns="0" tIns="0" rIns="0" bIns="0" rtlCol="0" anchor="ctr"/>
-          <a:lstStyle/>
-          <a:p>
-            <a:pPr indent="0" marL="0">
-              <a:buNone/>
-            </a:pPr>
-            <a:r>
-              <a:rPr lang="en-US" sz="1200" b="1" dirty="0">
-                <a:solidFill>
-                  <a:srgbClr val="FFFFFF"/>
-                </a:solidFill>
-                <a:latin typeface="Calibri" pitchFamily="34" charset="0"/>
-                <a:ea typeface="Calibri" pitchFamily="34" charset="-122"/>
-                <a:cs typeface="Calibri" pitchFamily="34" charset="-120"/>
-              </a:rPr>
-              <a:t>22 Sep</a:t>
-            </a:r>
-            <a:endParaRPr lang="en-US" sz="1200" dirty="0"/>
-          </a:p>
-        </p:txBody>
-      </p:sp>
-      <p:sp>
-        <p:nvSpPr>
-          <p:cNvPr id="38" name="Text 36"/>
-          <p:cNvSpPr txBox="1"/>
-          <p:nvPr/>
-        </p:nvSpPr>
-        <p:spPr>
-          <a:xfrm>
-            <a:off x="566928" y="5779008"/>
-            <a:ext cx="7498080" cy="292608"/>
-          </a:xfrm>
-          <a:prstGeom prst="rect">
-            <a:avLst/>
-          </a:prstGeom>
-          <a:noFill/>
-          <a:ln/>
-        </p:spPr>
-        <p:txBody>
-          <a:bodyPr wrap="square" lIns="0" tIns="0" rIns="0" bIns="0" rtlCol="0" anchor="ctr"/>
-          <a:lstStyle/>
-          <a:p>
-            <a:pPr indent="0" marL="0">
-              <a:buNone/>
-            </a:pPr>
-            <a:r>
-              <a:rPr lang="en-US" sz="1300" b="1" dirty="0">
-                <a:solidFill>
-                  <a:srgbClr val="E08A3C"/>
-                </a:solidFill>
-                <a:latin typeface="Cambria" pitchFamily="34" charset="0"/>
-                <a:ea typeface="Cambria" pitchFamily="34" charset="-122"/>
-                <a:cs typeface="Cambria" pitchFamily="34" charset="-120"/>
-              </a:rPr>
-              <a:t>Clearing items 1 and 2 alone returns the register to plan.</a:t>
-            </a:r>
-            <a:endParaRPr lang="en-US" sz="1300" dirty="0"/>
-          </a:p>
-        </p:txBody>
-      </p:sp>
-      <p:sp>
-        <p:nvSpPr>
-          <p:cNvPr id="39" name="Text 37"/>
-          <p:cNvSpPr txBox="1"/>
-          <p:nvPr/>
-        </p:nvSpPr>
-        <p:spPr>
-          <a:xfrm>
-            <a:off x="566928" y="6327648"/>
-            <a:ext cx="11057839" cy="256032"/>
-          </a:xfrm>
-          <a:prstGeom prst="rect">
-            <a:avLst/>
-          </a:prstGeom>
-          <a:noFill/>
-          <a:ln/>
-        </p:spPr>
-        <p:txBody>
-          <a:bodyPr wrap="square" lIns="0" tIns="0" rIns="0" bIns="0" rtlCol="0" anchor="ctr"/>
-          <a:lstStyle/>
-          <a:p>
-            <a:pPr indent="0" marL="0">
-              <a:buNone/>
-            </a:pPr>
-            <a:r>
-              <a:rPr lang="en-US" sz="850" dirty="0">
-                <a:solidFill>
-                  <a:srgbClr val="7E8FA6"/>
-                </a:solidFill>
-                <a:latin typeface="Calibri" pitchFamily="34" charset="0"/>
-                <a:ea typeface="Calibri" pitchFamily="34" charset="-122"/>
-                <a:cs typeface="Calibri" pitchFamily="34" charset="-120"/>
-              </a:rPr>
-              <a:t>Source: Commercial Department deliverables register (22 rows), 18 September 2026. Dates read as day/month/year. Deliverable names lightly corrected for spelling.</a:t>
-            </a:r>
-            <a:endParaRPr lang="en-US" sz="850" dirty="0"/>
           </a:p>
         </p:txBody>
       </p:sp>
@@ -5258,7 +3709,7 @@
                 <a:ea typeface="Cambria" pitchFamily="34" charset="-122"/>
                 <a:cs typeface="Cambria" pitchFamily="34" charset="-120"/>
               </a:rPr>
-              <a:t>17</a:t>
+              <a:t>18</a:t>
             </a:r>
             <a:endParaRPr lang="en-US" sz="4000" dirty="0"/>
           </a:p>
@@ -5336,7 +3787,7 @@
                 <a:ea typeface="Calibri" pitchFamily="34" charset="-122"/>
                 <a:cs typeface="Calibri" pitchFamily="34" charset="-120"/>
               </a:rPr>
-              <a:t>77% of the register</a:t>
+              <a:t>82% of the register</a:t>
             </a:r>
             <a:endParaRPr lang="en-US" sz="950" dirty="0"/>
           </a:p>
@@ -5429,7 +3880,7 @@
                 <a:ea typeface="Cambria" pitchFamily="34" charset="-122"/>
                 <a:cs typeface="Cambria" pitchFamily="34" charset="-120"/>
               </a:rPr>
-              <a:t>5</a:t>
+              <a:t>4</a:t>
             </a:r>
             <a:endParaRPr lang="en-US" sz="4000" dirty="0"/>
           </a:p>
@@ -5507,7 +3958,7 @@
                 <a:ea typeface="Calibri" pitchFamily="34" charset="-122"/>
                 <a:cs typeface="Calibri" pitchFamily="34" charset="-120"/>
               </a:rPr>
-              <a:t>4 in progress, 1 not started</a:t>
+              <a:t>3 in progress, 1 not started</a:t>
             </a:r>
             <a:endParaRPr lang="en-US" sz="950" dirty="0"/>
           </a:p>
@@ -5810,7 +4261,7 @@
                 <a:ea typeface="Calibri" pitchFamily="34" charset="-122"/>
                 <a:cs typeface="Calibri" pitchFamily="34" charset="-120"/>
               </a:rPr>
-              <a:t>The register is 84% complete against a 93% plan</a:t>
+              <a:t>The register is 86% complete against a 93% plan</a:t>
             </a:r>
             <a:endParaRPr lang="en-US" sz="1300" dirty="0"/>
           </a:p>
@@ -5849,7 +4300,7 @@
                 <a:ea typeface="Calibri" pitchFamily="34" charset="-122"/>
                 <a:cs typeface="Calibri" pitchFamily="34" charset="-120"/>
               </a:rPr>
-              <a:t>A shortfall of 9 percentage points, equivalent to two full deliverables. All of it sits in three items: Kinbu, Stanbic and Ecole.</a:t>
+              <a:t>A shortfall of 6.8 percentage points, equal to one and a half deliverables. All of it sits in three items: Kinbu, Stanbic and the Priority Insurance BoQ.</a:t>
             </a:r>
             <a:endParaRPr lang="en-US" sz="1050" dirty="0"/>
           </a:p>
@@ -6637,7 +5088,7 @@
                 <a:ea typeface="Cambria" pitchFamily="34" charset="-122"/>
                 <a:cs typeface="Cambria" pitchFamily="34" charset="-120"/>
               </a:rPr>
-              <a:t>17</a:t>
+              <a:t>18</a:t>
             </a:r>
             <a:endParaRPr lang="en-US" sz="2400" dirty="0"/>
           </a:p>
@@ -6676,7 +5127,7 @@
                 <a:ea typeface="Calibri" pitchFamily="34" charset="-122"/>
                 <a:cs typeface="Calibri" pitchFamily="34" charset="-120"/>
               </a:rPr>
-              <a:t>77%</a:t>
+              <a:t>82%</a:t>
             </a:r>
             <a:endParaRPr lang="en-US" sz="1200" dirty="0"/>
           </a:p>
@@ -6847,7 +5298,7 @@
                 <a:ea typeface="Cambria" pitchFamily="34" charset="-122"/>
                 <a:cs typeface="Cambria" pitchFamily="34" charset="-120"/>
               </a:rPr>
-              <a:t>4</a:t>
+              <a:t>3</a:t>
             </a:r>
             <a:endParaRPr lang="en-US" sz="2400" dirty="0"/>
           </a:p>
@@ -6886,7 +5337,7 @@
                 <a:ea typeface="Calibri" pitchFamily="34" charset="-122"/>
                 <a:cs typeface="Calibri" pitchFamily="34" charset="-120"/>
               </a:rPr>
-              <a:t>18%</a:t>
+              <a:t>14%</a:t>
             </a:r>
             <a:endParaRPr lang="en-US" sz="1200" dirty="0"/>
           </a:p>
@@ -7367,7 +5818,7 @@
         <p:spPr>
           <a:xfrm>
             <a:off x="6986016" y="5184648"/>
-            <a:ext cx="2383932" cy="155448"/>
+            <a:ext cx="2449129" cy="155448"/>
           </a:xfrm>
           <a:prstGeom prst="roundRect">
             <a:avLst>
@@ -7413,7 +5864,7 @@
                 <a:ea typeface="Calibri" pitchFamily="34" charset="-122"/>
                 <a:cs typeface="Calibri" pitchFamily="34" charset="-120"/>
               </a:rPr>
-              <a:t>84.1%</a:t>
+              <a:t>86.4%</a:t>
             </a:r>
             <a:endParaRPr lang="en-US" sz="1150" dirty="0"/>
           </a:p>
@@ -7452,7 +5903,7 @@
                 <a:ea typeface="Calibri" pitchFamily="34" charset="-122"/>
                 <a:cs typeface="Calibri" pitchFamily="34" charset="-120"/>
               </a:rPr>
-              <a:t>9.1 points behind plan — a shortfall of two deliverables</a:t>
+              <a:t>6.8 points behind plan — a shortfall of 1.5 deliverables</a:t>
             </a:r>
             <a:endParaRPr lang="en-US" sz="1050" dirty="0"/>
           </a:p>
@@ -7672,7 +6123,7 @@
                 <a:ea typeface="Calibri" pitchFamily="34" charset="-122"/>
                 <a:cs typeface="Calibri" pitchFamily="34" charset="-120"/>
               </a:rPr>
-              <a:t>The four projects carrying variance. Planned versus actual completion, averaged across each project’s deliverables.</a:t>
+              <a:t>The three projects still carrying variance. Planned versus actual completion, averaged across each project’s deliverables.</a:t>
             </a:r>
             <a:endParaRPr lang="en-US" sz="1250" dirty="0"/>
           </a:p>
@@ -7820,7 +6271,7 @@
                 <a:ea typeface="Cambria" pitchFamily="34" charset="-122"/>
                 <a:cs typeface="Cambria" pitchFamily="34" charset="-120"/>
               </a:rPr>
-              <a:t>9</a:t>
+              <a:t>10</a:t>
             </a:r>
             <a:endParaRPr lang="en-US" sz="4600" dirty="0"/>
           </a:p>
@@ -7898,7 +6349,7 @@
                 <a:ea typeface="Calibri" pitchFamily="34" charset="-122"/>
                 <a:cs typeface="Calibri" pitchFamily="34" charset="-120"/>
               </a:rPr>
-              <a:t>Seventeen deliverables closed, every one of them at 100% of plan. The detail follows on the next slide.</a:t>
+              <a:t>Eighteen deliverables closed, every one of them at 100% of plan. The detail follows on the next slide.</a:t>
             </a:r>
             <a:endParaRPr lang="en-US" sz="1000" dirty="0"/>
           </a:p>
@@ -7991,7 +6442,7 @@
                 <a:ea typeface="Cambria" pitchFamily="34" charset="-122"/>
                 <a:cs typeface="Cambria" pitchFamily="34" charset="-120"/>
               </a:rPr>
-              <a:t>4</a:t>
+              <a:t>3</a:t>
             </a:r>
             <a:endParaRPr lang="en-US" sz="4600" dirty="0"/>
           </a:p>
@@ -8069,7 +6520,7 @@
                 <a:ea typeface="Calibri" pitchFamily="34" charset="-122"/>
                 <a:cs typeface="Calibri" pitchFamily="34" charset="-120"/>
               </a:rPr>
-              <a:t>Between them they account for the entire shortfall of two deliverables against the September plan.</a:t>
+              <a:t>Between them they account for the whole shortfall of one and a half deliverables against the September plan.</a:t>
             </a:r>
             <a:endParaRPr lang="en-US" sz="1000" dirty="0"/>
           </a:p>
@@ -8250,7 +6701,7 @@
                 <a:ea typeface="Cambria" pitchFamily="34" charset="-122"/>
                 <a:cs typeface="Cambria" pitchFamily="34" charset="-120"/>
               </a:rPr>
-              <a:t>17 Deliverables Signed Off Across 9 Projects</a:t>
+              <a:t>18 Deliverables Signed Off Across 10 Projects</a:t>
             </a:r>
             <a:endParaRPr lang="en-US" sz="3100" dirty="0"/>
           </a:p>
@@ -8265,7 +6716,7 @@
         <p:spPr>
           <a:xfrm>
             <a:off x="566928" y="1408176"/>
-            <a:ext cx="3515258" cy="1414272"/>
+            <a:ext cx="2599868" cy="1414272"/>
           </a:xfrm>
           <a:prstGeom prst="roundRect">
             <a:avLst>
@@ -8298,8 +6749,8 @@
         </p:nvSpPr>
         <p:spPr>
           <a:xfrm>
-            <a:off x="3515258" y="1554480"/>
-            <a:ext cx="402336" cy="402336"/>
+            <a:off x="2654732" y="1536192"/>
+            <a:ext cx="365760" cy="365760"/>
           </a:xfrm>
           <a:prstGeom prst="ellipse">
             <a:avLst/>
@@ -8318,8 +6769,8 @@
         </p:nvSpPr>
         <p:spPr>
           <a:xfrm>
-            <a:off x="3515258" y="1554480"/>
-            <a:ext cx="402336" cy="402336"/>
+            <a:off x="2654732" y="1536192"/>
+            <a:ext cx="365760" cy="365760"/>
           </a:xfrm>
           <a:prstGeom prst="rect">
             <a:avLst/>
@@ -8335,7 +6786,7 @@
               <a:buNone/>
             </a:pPr>
             <a:r>
-              <a:rPr lang="en-US" sz="1300" b="1" dirty="0">
+              <a:rPr lang="en-US" sz="1000" b="1" dirty="0">
                 <a:solidFill>
                   <a:srgbClr val="FFFFFF"/>
                 </a:solidFill>
@@ -8345,7 +6796,7 @@
               </a:rPr>
               <a:t>3</a:t>
             </a:r>
-            <a:endParaRPr lang="en-US" sz="1300" dirty="0"/>
+            <a:endParaRPr lang="en-US" sz="1000" dirty="0"/>
           </a:p>
         </p:txBody>
       </p:sp>
@@ -8357,24 +6808,24 @@
         </p:nvSpPr>
         <p:spPr>
           <a:xfrm>
-            <a:off x="786384" y="1554480"/>
-            <a:ext cx="2765450" cy="402336"/>
-          </a:xfrm>
-          <a:prstGeom prst="rect">
-            <a:avLst/>
-          </a:prstGeom>
-          <a:noFill/>
-          <a:ln/>
-        </p:spPr>
-        <p:txBody>
-          <a:bodyPr wrap="square" lIns="0" tIns="0" rIns="0" bIns="0" rtlCol="0" anchor="ctr"/>
-          <a:lstStyle/>
-          <a:p>
-            <a:pPr indent="0" marL="0">
-              <a:buNone/>
-            </a:pPr>
-            <a:r>
-              <a:rPr lang="en-US" sz="1300" b="1" dirty="0">
+            <a:off x="768096" y="1545336"/>
+            <a:ext cx="1904924" cy="420624"/>
+          </a:xfrm>
+          <a:prstGeom prst="rect">
+            <a:avLst/>
+          </a:prstGeom>
+          <a:noFill/>
+          <a:ln/>
+        </p:spPr>
+        <p:txBody>
+          <a:bodyPr wrap="square" lIns="0" tIns="0" rIns="0" bIns="0" rtlCol="0" anchor="t"/>
+          <a:lstStyle/>
+          <a:p>
+            <a:pPr indent="0" marL="0">
+              <a:buNone/>
+            </a:pPr>
+            <a:r>
+              <a:rPr lang="en-US" sz="1150" b="1" dirty="0">
                 <a:solidFill>
                   <a:srgbClr val="1B2A41"/>
                 </a:solidFill>
@@ -8384,7 +6835,7 @@
               </a:rPr>
               <a:t>Anglogold Ashanti</a:t>
             </a:r>
-            <a:endParaRPr lang="en-US" sz="1300" dirty="0"/>
+            <a:endParaRPr lang="en-US" sz="1150" dirty="0"/>
           </a:p>
         </p:txBody>
       </p:sp>
@@ -8396,8 +6847,8 @@
         </p:nvSpPr>
         <p:spPr>
           <a:xfrm>
-            <a:off x="859536" y="1993392"/>
-            <a:ext cx="2984906" cy="499872"/>
+            <a:off x="841248" y="1993392"/>
+            <a:ext cx="2087804" cy="445008"/>
           </a:xfrm>
           <a:prstGeom prst="rect">
             <a:avLst/>
@@ -8411,13 +6862,13 @@
           <a:p>
             <a:pPr marL="165100" indent="-165100">
               <a:spcAft>
-                <a:spcPts val="300"/>
+                <a:spcPts val="200"/>
               </a:spcAft>
               <a:buSzPct val="100000"/>
               <a:buChar char="•"/>
             </a:pPr>
             <a:r>
-              <a:rPr lang="en-US" sz="900" dirty="0">
+              <a:rPr lang="en-US" sz="850" dirty="0">
                 <a:solidFill>
                   <a:srgbClr val="52514E"/>
                 </a:solidFill>
@@ -8427,18 +6878,18 @@
               </a:rPr>
               <a:t>Budget</a:t>
             </a:r>
-            <a:endParaRPr lang="en-US" sz="900" dirty="0"/>
+            <a:endParaRPr lang="en-US" sz="850" dirty="0"/>
           </a:p>
           <a:p>
             <a:pPr marL="165100" indent="-165100">
               <a:spcAft>
-                <a:spcPts val="300"/>
+                <a:spcPts val="200"/>
               </a:spcAft>
               <a:buSzPct val="100000"/>
               <a:buChar char="•"/>
             </a:pPr>
             <a:r>
-              <a:rPr lang="en-US" sz="900" dirty="0">
+              <a:rPr lang="en-US" sz="850" dirty="0">
                 <a:solidFill>
                   <a:srgbClr val="52514E"/>
                 </a:solidFill>
@@ -8448,18 +6899,18 @@
               </a:rPr>
               <a:t>Revised BoQ</a:t>
             </a:r>
-            <a:endParaRPr lang="en-US" sz="900" dirty="0"/>
+            <a:endParaRPr lang="en-US" sz="850" dirty="0"/>
           </a:p>
           <a:p>
             <a:pPr marL="165100" indent="-165100">
               <a:spcAft>
-                <a:spcPts val="300"/>
+                <a:spcPts val="200"/>
               </a:spcAft>
               <a:buSzPct val="100000"/>
               <a:buChar char="•"/>
             </a:pPr>
             <a:r>
-              <a:rPr lang="en-US" sz="900" dirty="0">
+              <a:rPr lang="en-US" sz="850" dirty="0">
                 <a:solidFill>
                   <a:srgbClr val="52514E"/>
                 </a:solidFill>
@@ -8469,7 +6920,7 @@
               </a:rPr>
               <a:t>Valuation report</a:t>
             </a:r>
-            <a:endParaRPr lang="en-US" sz="900" dirty="0"/>
+            <a:endParaRPr lang="en-US" sz="850" dirty="0"/>
           </a:p>
         </p:txBody>
       </p:sp>
@@ -8481,24 +6932,24 @@
         </p:nvSpPr>
         <p:spPr>
           <a:xfrm>
-            <a:off x="786384" y="2493264"/>
-            <a:ext cx="3076346" cy="237744"/>
-          </a:xfrm>
-          <a:prstGeom prst="rect">
-            <a:avLst/>
-          </a:prstGeom>
-          <a:noFill/>
-          <a:ln/>
-        </p:spPr>
-        <p:txBody>
-          <a:bodyPr wrap="square" lIns="0" tIns="0" rIns="0" bIns="0" rtlCol="0" anchor="ctr"/>
-          <a:lstStyle/>
-          <a:p>
-            <a:pPr indent="0" marL="0">
-              <a:buNone/>
-            </a:pPr>
-            <a:r>
-              <a:rPr lang="en-US" sz="900" b="1" dirty="0">
+            <a:off x="768096" y="2511552"/>
+            <a:ext cx="2197532" cy="237744"/>
+          </a:xfrm>
+          <a:prstGeom prst="rect">
+            <a:avLst/>
+          </a:prstGeom>
+          <a:noFill/>
+          <a:ln/>
+        </p:spPr>
+        <p:txBody>
+          <a:bodyPr wrap="square" lIns="0" tIns="0" rIns="0" bIns="0" rtlCol="0" anchor="ctr"/>
+          <a:lstStyle/>
+          <a:p>
+            <a:pPr indent="0" marL="0">
+              <a:buNone/>
+            </a:pPr>
+            <a:r>
+              <a:rPr lang="en-US" sz="850" b="1" dirty="0">
                 <a:solidFill>
                   <a:srgbClr val="898781"/>
                 </a:solidFill>
@@ -8508,7 +6959,7 @@
               </a:rPr>
               <a:t>Gilbert, Sedem</a:t>
             </a:r>
-            <a:endParaRPr lang="en-US" sz="900" dirty="0"/>
+            <a:endParaRPr lang="en-US" sz="850" dirty="0"/>
           </a:p>
         </p:txBody>
       </p:sp>
@@ -8520,8 +6971,8 @@
         </p:nvSpPr>
         <p:spPr>
           <a:xfrm>
-            <a:off x="4338218" y="1408176"/>
-            <a:ext cx="3515258" cy="1414272"/>
+            <a:off x="3386252" y="1408176"/>
+            <a:ext cx="2599868" cy="1414272"/>
           </a:xfrm>
           <a:prstGeom prst="roundRect">
             <a:avLst>
@@ -8554,8 +7005,8 @@
         </p:nvSpPr>
         <p:spPr>
           <a:xfrm>
-            <a:off x="7286549" y="1554480"/>
-            <a:ext cx="402336" cy="402336"/>
+            <a:off x="5474056" y="1536192"/>
+            <a:ext cx="365760" cy="365760"/>
           </a:xfrm>
           <a:prstGeom prst="ellipse">
             <a:avLst/>
@@ -8574,8 +7025,8 @@
         </p:nvSpPr>
         <p:spPr>
           <a:xfrm>
-            <a:off x="7286549" y="1554480"/>
-            <a:ext cx="402336" cy="402336"/>
+            <a:off x="5474056" y="1536192"/>
+            <a:ext cx="365760" cy="365760"/>
           </a:xfrm>
           <a:prstGeom prst="rect">
             <a:avLst/>
@@ -8591,7 +7042,7 @@
               <a:buNone/>
             </a:pPr>
             <a:r>
-              <a:rPr lang="en-US" sz="1300" b="1" dirty="0">
+              <a:rPr lang="en-US" sz="1000" b="1" dirty="0">
                 <a:solidFill>
                   <a:srgbClr val="FFFFFF"/>
                 </a:solidFill>
@@ -8601,7 +7052,7 @@
               </a:rPr>
               <a:t>3</a:t>
             </a:r>
-            <a:endParaRPr lang="en-US" sz="1300" dirty="0"/>
+            <a:endParaRPr lang="en-US" sz="1000" dirty="0"/>
           </a:p>
         </p:txBody>
       </p:sp>
@@ -8613,24 +7064,24 @@
         </p:nvSpPr>
         <p:spPr>
           <a:xfrm>
-            <a:off x="4557674" y="1554480"/>
-            <a:ext cx="2765450" cy="402336"/>
-          </a:xfrm>
-          <a:prstGeom prst="rect">
-            <a:avLst/>
-          </a:prstGeom>
-          <a:noFill/>
-          <a:ln/>
-        </p:spPr>
-        <p:txBody>
-          <a:bodyPr wrap="square" lIns="0" tIns="0" rIns="0" bIns="0" rtlCol="0" anchor="ctr"/>
-          <a:lstStyle/>
-          <a:p>
-            <a:pPr indent="0" marL="0">
-              <a:buNone/>
-            </a:pPr>
-            <a:r>
-              <a:rPr lang="en-US" sz="1300" b="1" dirty="0">
+            <a:off x="3587420" y="1545336"/>
+            <a:ext cx="1904924" cy="420624"/>
+          </a:xfrm>
+          <a:prstGeom prst="rect">
+            <a:avLst/>
+          </a:prstGeom>
+          <a:noFill/>
+          <a:ln/>
+        </p:spPr>
+        <p:txBody>
+          <a:bodyPr wrap="square" lIns="0" tIns="0" rIns="0" bIns="0" rtlCol="0" anchor="t"/>
+          <a:lstStyle/>
+          <a:p>
+            <a:pPr indent="0" marL="0">
+              <a:buNone/>
+            </a:pPr>
+            <a:r>
+              <a:rPr lang="en-US" sz="1150" b="1" dirty="0">
                 <a:solidFill>
                   <a:srgbClr val="1B2A41"/>
                 </a:solidFill>
@@ -8640,7 +7091,7 @@
               </a:rPr>
               <a:t>Warehouse</a:t>
             </a:r>
-            <a:endParaRPr lang="en-US" sz="1300" dirty="0"/>
+            <a:endParaRPr lang="en-US" sz="1150" dirty="0"/>
           </a:p>
         </p:txBody>
       </p:sp>
@@ -8652,8 +7103,8 @@
         </p:nvSpPr>
         <p:spPr>
           <a:xfrm>
-            <a:off x="4630826" y="1993392"/>
-            <a:ext cx="2984906" cy="499872"/>
+            <a:off x="3660572" y="1993392"/>
+            <a:ext cx="2087804" cy="445008"/>
           </a:xfrm>
           <a:prstGeom prst="rect">
             <a:avLst/>
@@ -8667,13 +7118,13 @@
           <a:p>
             <a:pPr marL="165100" indent="-165100">
               <a:spcAft>
-                <a:spcPts val="300"/>
+                <a:spcPts val="200"/>
               </a:spcAft>
               <a:buSzPct val="100000"/>
               <a:buChar char="•"/>
             </a:pPr>
             <a:r>
-              <a:rPr lang="en-US" sz="900" dirty="0">
+              <a:rPr lang="en-US" sz="850" dirty="0">
                 <a:solidFill>
                   <a:srgbClr val="52514E"/>
                 </a:solidFill>
@@ -8683,18 +7134,18 @@
               </a:rPr>
               <a:t>Cost analysis — electrical works</a:t>
             </a:r>
-            <a:endParaRPr lang="en-US" sz="900" dirty="0"/>
+            <a:endParaRPr lang="en-US" sz="850" dirty="0"/>
           </a:p>
           <a:p>
             <a:pPr marL="165100" indent="-165100">
               <a:spcAft>
-                <a:spcPts val="300"/>
+                <a:spcPts val="200"/>
               </a:spcAft>
               <a:buSzPct val="100000"/>
               <a:buChar char="•"/>
             </a:pPr>
             <a:r>
-              <a:rPr lang="en-US" sz="900" dirty="0">
+              <a:rPr lang="en-US" sz="850" dirty="0">
                 <a:solidFill>
                   <a:srgbClr val="52514E"/>
                 </a:solidFill>
@@ -8704,18 +7155,18 @@
               </a:rPr>
               <a:t>Cashflow forecast</a:t>
             </a:r>
-            <a:endParaRPr lang="en-US" sz="900" dirty="0"/>
+            <a:endParaRPr lang="en-US" sz="850" dirty="0"/>
           </a:p>
           <a:p>
             <a:pPr marL="165100" indent="-165100">
               <a:spcAft>
-                <a:spcPts val="300"/>
+                <a:spcPts val="200"/>
               </a:spcAft>
               <a:buSzPct val="100000"/>
               <a:buChar char="•"/>
             </a:pPr>
             <a:r>
-              <a:rPr lang="en-US" sz="900" dirty="0">
+              <a:rPr lang="en-US" sz="850" dirty="0">
                 <a:solidFill>
                   <a:srgbClr val="52514E"/>
                 </a:solidFill>
@@ -8723,9 +7174,9 @@
                 <a:ea typeface="Calibri" pitchFamily="34" charset="-122"/>
                 <a:cs typeface="Calibri" pitchFamily="34" charset="-120"/>
               </a:rPr>
-              <a:t>Subcontractor selection — roller shutter</a:t>
-            </a:r>
-            <a:endParaRPr lang="en-US" sz="900" dirty="0"/>
+              <a:t>Roller shutter subcontractor</a:t>
+            </a:r>
+            <a:endParaRPr lang="en-US" sz="850" dirty="0"/>
           </a:p>
         </p:txBody>
       </p:sp>
@@ -8737,24 +7188,24 @@
         </p:nvSpPr>
         <p:spPr>
           <a:xfrm>
-            <a:off x="4557674" y="2493264"/>
-            <a:ext cx="3076346" cy="237744"/>
-          </a:xfrm>
-          <a:prstGeom prst="rect">
-            <a:avLst/>
-          </a:prstGeom>
-          <a:noFill/>
-          <a:ln/>
-        </p:spPr>
-        <p:txBody>
-          <a:bodyPr wrap="square" lIns="0" tIns="0" rIns="0" bIns="0" rtlCol="0" anchor="ctr"/>
-          <a:lstStyle/>
-          <a:p>
-            <a:pPr indent="0" marL="0">
-              <a:buNone/>
-            </a:pPr>
-            <a:r>
-              <a:rPr lang="en-US" sz="900" b="1" dirty="0">
+            <a:off x="3587420" y="2511552"/>
+            <a:ext cx="2197532" cy="237744"/>
+          </a:xfrm>
+          <a:prstGeom prst="rect">
+            <a:avLst/>
+          </a:prstGeom>
+          <a:noFill/>
+          <a:ln/>
+        </p:spPr>
+        <p:txBody>
+          <a:bodyPr wrap="square" lIns="0" tIns="0" rIns="0" bIns="0" rtlCol="0" anchor="ctr"/>
+          <a:lstStyle/>
+          <a:p>
+            <a:pPr indent="0" marL="0">
+              <a:buNone/>
+            </a:pPr>
+            <a:r>
+              <a:rPr lang="en-US" sz="850" b="1" dirty="0">
                 <a:solidFill>
                   <a:srgbClr val="898781"/>
                 </a:solidFill>
@@ -8764,7 +7215,7 @@
               </a:rPr>
               <a:t>Eunice</a:t>
             </a:r>
-            <a:endParaRPr lang="en-US" sz="900" dirty="0"/>
+            <a:endParaRPr lang="en-US" sz="850" dirty="0"/>
           </a:p>
         </p:txBody>
       </p:sp>
@@ -8776,8 +7227,8 @@
         </p:nvSpPr>
         <p:spPr>
           <a:xfrm>
-            <a:off x="8109509" y="1408176"/>
-            <a:ext cx="3515258" cy="1414272"/>
+            <a:off x="6205576" y="1408176"/>
+            <a:ext cx="2599868" cy="1414272"/>
           </a:xfrm>
           <a:prstGeom prst="roundRect">
             <a:avLst>
@@ -8810,8 +7261,8 @@
         </p:nvSpPr>
         <p:spPr>
           <a:xfrm>
-            <a:off x="11057839" y="1554480"/>
-            <a:ext cx="402336" cy="402336"/>
+            <a:off x="8293379" y="1536192"/>
+            <a:ext cx="365760" cy="365760"/>
           </a:xfrm>
           <a:prstGeom prst="ellipse">
             <a:avLst/>
@@ -8830,8 +7281,8 @@
         </p:nvSpPr>
         <p:spPr>
           <a:xfrm>
-            <a:off x="11057839" y="1554480"/>
-            <a:ext cx="402336" cy="402336"/>
+            <a:off x="8293379" y="1536192"/>
+            <a:ext cx="365760" cy="365760"/>
           </a:xfrm>
           <a:prstGeom prst="rect">
             <a:avLst/>
@@ -8847,7 +7298,7 @@
               <a:buNone/>
             </a:pPr>
             <a:r>
-              <a:rPr lang="en-US" sz="1300" b="1" dirty="0">
+              <a:rPr lang="en-US" sz="1000" b="1" dirty="0">
                 <a:solidFill>
                   <a:srgbClr val="FFFFFF"/>
                 </a:solidFill>
@@ -8857,7 +7308,7 @@
               </a:rPr>
               <a:t>3</a:t>
             </a:r>
-            <a:endParaRPr lang="en-US" sz="1300" dirty="0"/>
+            <a:endParaRPr lang="en-US" sz="1000" dirty="0"/>
           </a:p>
         </p:txBody>
       </p:sp>
@@ -8869,24 +7320,24 @@
         </p:nvSpPr>
         <p:spPr>
           <a:xfrm>
-            <a:off x="8328965" y="1554480"/>
-            <a:ext cx="2765450" cy="402336"/>
-          </a:xfrm>
-          <a:prstGeom prst="rect">
-            <a:avLst/>
-          </a:prstGeom>
-          <a:noFill/>
-          <a:ln/>
-        </p:spPr>
-        <p:txBody>
-          <a:bodyPr wrap="square" lIns="0" tIns="0" rIns="0" bIns="0" rtlCol="0" anchor="ctr"/>
-          <a:lstStyle/>
-          <a:p>
-            <a:pPr indent="0" marL="0">
-              <a:buNone/>
-            </a:pPr>
-            <a:r>
-              <a:rPr lang="en-US" sz="1300" b="1" dirty="0">
+            <a:off x="6406744" y="1545336"/>
+            <a:ext cx="1904924" cy="420624"/>
+          </a:xfrm>
+          <a:prstGeom prst="rect">
+            <a:avLst/>
+          </a:prstGeom>
+          <a:noFill/>
+          <a:ln/>
+        </p:spPr>
+        <p:txBody>
+          <a:bodyPr wrap="square" lIns="0" tIns="0" rIns="0" bIns="0" rtlCol="0" anchor="t"/>
+          <a:lstStyle/>
+          <a:p>
+            <a:pPr indent="0" marL="0">
+              <a:buNone/>
+            </a:pPr>
+            <a:r>
+              <a:rPr lang="en-US" sz="1150" b="1" dirty="0">
                 <a:solidFill>
                   <a:srgbClr val="1B2A41"/>
                 </a:solidFill>
@@ -8896,7 +7347,7 @@
               </a:rPr>
               <a:t>RE Villa</a:t>
             </a:r>
-            <a:endParaRPr lang="en-US" sz="1300" dirty="0"/>
+            <a:endParaRPr lang="en-US" sz="1150" dirty="0"/>
           </a:p>
         </p:txBody>
       </p:sp>
@@ -8908,8 +7359,8 @@
         </p:nvSpPr>
         <p:spPr>
           <a:xfrm>
-            <a:off x="8402117" y="1993392"/>
-            <a:ext cx="2984906" cy="499872"/>
+            <a:off x="6479896" y="1993392"/>
+            <a:ext cx="2087804" cy="445008"/>
           </a:xfrm>
           <a:prstGeom prst="rect">
             <a:avLst/>
@@ -8923,13 +7374,13 @@
           <a:p>
             <a:pPr marL="165100" indent="-165100">
               <a:spcAft>
-                <a:spcPts val="300"/>
+                <a:spcPts val="200"/>
               </a:spcAft>
               <a:buSzPct val="100000"/>
               <a:buChar char="•"/>
             </a:pPr>
             <a:r>
-              <a:rPr lang="en-US" sz="900" dirty="0">
+              <a:rPr lang="en-US" sz="850" dirty="0">
                 <a:solidFill>
                   <a:srgbClr val="52514E"/>
                 </a:solidFill>
@@ -8939,18 +7390,18 @@
               </a:rPr>
               <a:t>Budgetary report</a:t>
             </a:r>
-            <a:endParaRPr lang="en-US" sz="900" dirty="0"/>
+            <a:endParaRPr lang="en-US" sz="850" dirty="0"/>
           </a:p>
           <a:p>
             <a:pPr marL="165100" indent="-165100">
               <a:spcAft>
-                <a:spcPts val="300"/>
+                <a:spcPts val="200"/>
               </a:spcAft>
               <a:buSzPct val="100000"/>
               <a:buChar char="•"/>
             </a:pPr>
             <a:r>
-              <a:rPr lang="en-US" sz="900" dirty="0">
+              <a:rPr lang="en-US" sz="850" dirty="0">
                 <a:solidFill>
                   <a:srgbClr val="52514E"/>
                 </a:solidFill>
@@ -8960,18 +7411,18 @@
               </a:rPr>
               <a:t>Remeasurement of hardcore filling</a:t>
             </a:r>
-            <a:endParaRPr lang="en-US" sz="900" dirty="0"/>
+            <a:endParaRPr lang="en-US" sz="850" dirty="0"/>
           </a:p>
           <a:p>
             <a:pPr marL="165100" indent="-165100">
               <a:spcAft>
-                <a:spcPts val="300"/>
+                <a:spcPts val="200"/>
               </a:spcAft>
               <a:buSzPct val="100000"/>
               <a:buChar char="•"/>
             </a:pPr>
             <a:r>
-              <a:rPr lang="en-US" sz="900" dirty="0">
+              <a:rPr lang="en-US" sz="850" dirty="0">
                 <a:solidFill>
                   <a:srgbClr val="52514E"/>
                 </a:solidFill>
@@ -8981,7 +7432,7 @@
               </a:rPr>
               <a:t>Cashflow forecast</a:t>
             </a:r>
-            <a:endParaRPr lang="en-US" sz="900" dirty="0"/>
+            <a:endParaRPr lang="en-US" sz="850" dirty="0"/>
           </a:p>
         </p:txBody>
       </p:sp>
@@ -8993,24 +7444,24 @@
         </p:nvSpPr>
         <p:spPr>
           <a:xfrm>
-            <a:off x="8328965" y="2493264"/>
-            <a:ext cx="3076346" cy="237744"/>
-          </a:xfrm>
-          <a:prstGeom prst="rect">
-            <a:avLst/>
-          </a:prstGeom>
-          <a:noFill/>
-          <a:ln/>
-        </p:spPr>
-        <p:txBody>
-          <a:bodyPr wrap="square" lIns="0" tIns="0" rIns="0" bIns="0" rtlCol="0" anchor="ctr"/>
-          <a:lstStyle/>
-          <a:p>
-            <a:pPr indent="0" marL="0">
-              <a:buNone/>
-            </a:pPr>
-            <a:r>
-              <a:rPr lang="en-US" sz="900" b="1" dirty="0">
+            <a:off x="6406744" y="2511552"/>
+            <a:ext cx="2197532" cy="237744"/>
+          </a:xfrm>
+          <a:prstGeom prst="rect">
+            <a:avLst/>
+          </a:prstGeom>
+          <a:noFill/>
+          <a:ln/>
+        </p:spPr>
+        <p:txBody>
+          <a:bodyPr wrap="square" lIns="0" tIns="0" rIns="0" bIns="0" rtlCol="0" anchor="ctr"/>
+          <a:lstStyle/>
+          <a:p>
+            <a:pPr indent="0" marL="0">
+              <a:buNone/>
+            </a:pPr>
+            <a:r>
+              <a:rPr lang="en-US" sz="850" b="1" dirty="0">
                 <a:solidFill>
                   <a:srgbClr val="898781"/>
                 </a:solidFill>
@@ -9020,7 +7471,7 @@
               </a:rPr>
               <a:t>Eunice</a:t>
             </a:r>
-            <a:endParaRPr lang="en-US" sz="900" dirty="0"/>
+            <a:endParaRPr lang="en-US" sz="850" dirty="0"/>
           </a:p>
         </p:txBody>
       </p:sp>
@@ -9032,8 +7483,8 @@
         </p:nvSpPr>
         <p:spPr>
           <a:xfrm>
-            <a:off x="566928" y="3005328"/>
-            <a:ext cx="3515258" cy="1414272"/>
+            <a:off x="9024899" y="1408176"/>
+            <a:ext cx="2599868" cy="1414272"/>
           </a:xfrm>
           <a:prstGeom prst="roundRect">
             <a:avLst>
@@ -9066,8 +7517,8 @@
         </p:nvSpPr>
         <p:spPr>
           <a:xfrm>
-            <a:off x="3515258" y="3151632"/>
-            <a:ext cx="402336" cy="402336"/>
+            <a:off x="11112703" y="1536192"/>
+            <a:ext cx="365760" cy="365760"/>
           </a:xfrm>
           <a:prstGeom prst="ellipse">
             <a:avLst/>
@@ -9086,8 +7537,8 @@
         </p:nvSpPr>
         <p:spPr>
           <a:xfrm>
-            <a:off x="3515258" y="3151632"/>
-            <a:ext cx="402336" cy="402336"/>
+            <a:off x="11112703" y="1536192"/>
+            <a:ext cx="365760" cy="365760"/>
           </a:xfrm>
           <a:prstGeom prst="rect">
             <a:avLst/>
@@ -9103,7 +7554,7 @@
               <a:buNone/>
             </a:pPr>
             <a:r>
-              <a:rPr lang="en-US" sz="1300" b="1" dirty="0">
+              <a:rPr lang="en-US" sz="1000" b="1" dirty="0">
                 <a:solidFill>
                   <a:srgbClr val="FFFFFF"/>
                 </a:solidFill>
@@ -9113,7 +7564,7 @@
               </a:rPr>
               <a:t>2</a:t>
             </a:r>
-            <a:endParaRPr lang="en-US" sz="1300" dirty="0"/>
+            <a:endParaRPr lang="en-US" sz="1000" dirty="0"/>
           </a:p>
         </p:txBody>
       </p:sp>
@@ -9125,24 +7576,24 @@
         </p:nvSpPr>
         <p:spPr>
           <a:xfrm>
-            <a:off x="786384" y="3151632"/>
-            <a:ext cx="2765450" cy="402336"/>
-          </a:xfrm>
-          <a:prstGeom prst="rect">
-            <a:avLst/>
-          </a:prstGeom>
-          <a:noFill/>
-          <a:ln/>
-        </p:spPr>
-        <p:txBody>
-          <a:bodyPr wrap="square" lIns="0" tIns="0" rIns="0" bIns="0" rtlCol="0" anchor="ctr"/>
-          <a:lstStyle/>
-          <a:p>
-            <a:pPr indent="0" marL="0">
-              <a:buNone/>
-            </a:pPr>
-            <a:r>
-              <a:rPr lang="en-US" sz="1300" b="1" dirty="0">
+            <a:off x="9226067" y="1545336"/>
+            <a:ext cx="1904924" cy="420624"/>
+          </a:xfrm>
+          <a:prstGeom prst="rect">
+            <a:avLst/>
+          </a:prstGeom>
+          <a:noFill/>
+          <a:ln/>
+        </p:spPr>
+        <p:txBody>
+          <a:bodyPr wrap="square" lIns="0" tIns="0" rIns="0" bIns="0" rtlCol="0" anchor="t"/>
+          <a:lstStyle/>
+          <a:p>
+            <a:pPr indent="0" marL="0">
+              <a:buNone/>
+            </a:pPr>
+            <a:r>
+              <a:rPr lang="en-US" sz="1150" b="1" dirty="0">
                 <a:solidFill>
                   <a:srgbClr val="1B2A41"/>
                 </a:solidFill>
@@ -9152,7 +7603,7 @@
               </a:rPr>
               <a:t>Vanguard Assurance Spintex</a:t>
             </a:r>
-            <a:endParaRPr lang="en-US" sz="1300" dirty="0"/>
+            <a:endParaRPr lang="en-US" sz="1150" dirty="0"/>
           </a:p>
         </p:txBody>
       </p:sp>
@@ -9164,8 +7615,8 @@
         </p:nvSpPr>
         <p:spPr>
           <a:xfrm>
-            <a:off x="859536" y="3590544"/>
-            <a:ext cx="2984906" cy="499872"/>
+            <a:off x="9299219" y="1993392"/>
+            <a:ext cx="2087804" cy="445008"/>
           </a:xfrm>
           <a:prstGeom prst="rect">
             <a:avLst/>
@@ -9179,13 +7630,13 @@
           <a:p>
             <a:pPr marL="165100" indent="-165100">
               <a:spcAft>
-                <a:spcPts val="300"/>
+                <a:spcPts val="200"/>
               </a:spcAft>
               <a:buSzPct val="100000"/>
               <a:buChar char="•"/>
             </a:pPr>
             <a:r>
-              <a:rPr lang="en-US" sz="900" dirty="0">
+              <a:rPr lang="en-US" sz="850" dirty="0">
                 <a:solidFill>
                   <a:srgbClr val="52514E"/>
                 </a:solidFill>
@@ -9195,18 +7646,18 @@
               </a:rPr>
               <a:t>Monthly valuation</a:t>
             </a:r>
-            <a:endParaRPr lang="en-US" sz="900" dirty="0"/>
+            <a:endParaRPr lang="en-US" sz="850" dirty="0"/>
           </a:p>
           <a:p>
             <a:pPr marL="165100" indent="-165100">
               <a:spcAft>
-                <a:spcPts val="300"/>
+                <a:spcPts val="200"/>
               </a:spcAft>
               <a:buSzPct val="100000"/>
               <a:buChar char="•"/>
             </a:pPr>
             <a:r>
-              <a:rPr lang="en-US" sz="900" dirty="0">
+              <a:rPr lang="en-US" sz="850" dirty="0">
                 <a:solidFill>
                   <a:srgbClr val="52514E"/>
                 </a:solidFill>
@@ -9216,7 +7667,7 @@
               </a:rPr>
               <a:t>Budgetary report</a:t>
             </a:r>
-            <a:endParaRPr lang="en-US" sz="900" dirty="0"/>
+            <a:endParaRPr lang="en-US" sz="850" dirty="0"/>
           </a:p>
         </p:txBody>
       </p:sp>
@@ -9228,24 +7679,24 @@
         </p:nvSpPr>
         <p:spPr>
           <a:xfrm>
-            <a:off x="786384" y="4090416"/>
-            <a:ext cx="3076346" cy="237744"/>
-          </a:xfrm>
-          <a:prstGeom prst="rect">
-            <a:avLst/>
-          </a:prstGeom>
-          <a:noFill/>
-          <a:ln/>
-        </p:spPr>
-        <p:txBody>
-          <a:bodyPr wrap="square" lIns="0" tIns="0" rIns="0" bIns="0" rtlCol="0" anchor="ctr"/>
-          <a:lstStyle/>
-          <a:p>
-            <a:pPr indent="0" marL="0">
-              <a:buNone/>
-            </a:pPr>
-            <a:r>
-              <a:rPr lang="en-US" sz="900" b="1" dirty="0">
+            <a:off x="9226067" y="2511552"/>
+            <a:ext cx="2197532" cy="237744"/>
+          </a:xfrm>
+          <a:prstGeom prst="rect">
+            <a:avLst/>
+          </a:prstGeom>
+          <a:noFill/>
+          <a:ln/>
+        </p:spPr>
+        <p:txBody>
+          <a:bodyPr wrap="square" lIns="0" tIns="0" rIns="0" bIns="0" rtlCol="0" anchor="ctr"/>
+          <a:lstStyle/>
+          <a:p>
+            <a:pPr indent="0" marL="0">
+              <a:buNone/>
+            </a:pPr>
+            <a:r>
+              <a:rPr lang="en-US" sz="850" b="1" dirty="0">
                 <a:solidFill>
                   <a:srgbClr val="898781"/>
                 </a:solidFill>
@@ -9255,7 +7706,7 @@
               </a:rPr>
               <a:t>Gilbert</a:t>
             </a:r>
-            <a:endParaRPr lang="en-US" sz="900" dirty="0"/>
+            <a:endParaRPr lang="en-US" sz="850" dirty="0"/>
           </a:p>
         </p:txBody>
       </p:sp>
@@ -9267,8 +7718,8 @@
         </p:nvSpPr>
         <p:spPr>
           <a:xfrm>
-            <a:off x="4338218" y="3005328"/>
-            <a:ext cx="3515258" cy="1414272"/>
+            <a:off x="566928" y="3005328"/>
+            <a:ext cx="2599868" cy="1414272"/>
           </a:xfrm>
           <a:prstGeom prst="roundRect">
             <a:avLst>
@@ -9301,8 +7752,8 @@
         </p:nvSpPr>
         <p:spPr>
           <a:xfrm>
-            <a:off x="7286549" y="3151632"/>
-            <a:ext cx="402336" cy="402336"/>
+            <a:off x="2654732" y="3133344"/>
+            <a:ext cx="365760" cy="365760"/>
           </a:xfrm>
           <a:prstGeom prst="ellipse">
             <a:avLst/>
@@ -9321,8 +7772,8 @@
         </p:nvSpPr>
         <p:spPr>
           <a:xfrm>
-            <a:off x="7286549" y="3151632"/>
-            <a:ext cx="402336" cy="402336"/>
+            <a:off x="2654732" y="3133344"/>
+            <a:ext cx="365760" cy="365760"/>
           </a:xfrm>
           <a:prstGeom prst="rect">
             <a:avLst/>
@@ -9338,7 +7789,7 @@
               <a:buNone/>
             </a:pPr>
             <a:r>
-              <a:rPr lang="en-US" sz="1300" b="1" dirty="0">
+              <a:rPr lang="en-US" sz="1000" b="1" dirty="0">
                 <a:solidFill>
                   <a:srgbClr val="FFFFFF"/>
                 </a:solidFill>
@@ -9348,7 +7799,7 @@
               </a:rPr>
               <a:t>2</a:t>
             </a:r>
-            <a:endParaRPr lang="en-US" sz="1300" dirty="0"/>
+            <a:endParaRPr lang="en-US" sz="1000" dirty="0"/>
           </a:p>
         </p:txBody>
       </p:sp>
@@ -9360,24 +7811,24 @@
         </p:nvSpPr>
         <p:spPr>
           <a:xfrm>
-            <a:off x="4557674" y="3151632"/>
-            <a:ext cx="2765450" cy="402336"/>
-          </a:xfrm>
-          <a:prstGeom prst="rect">
-            <a:avLst/>
-          </a:prstGeom>
-          <a:noFill/>
-          <a:ln/>
-        </p:spPr>
-        <p:txBody>
-          <a:bodyPr wrap="square" lIns="0" tIns="0" rIns="0" bIns="0" rtlCol="0" anchor="ctr"/>
-          <a:lstStyle/>
-          <a:p>
-            <a:pPr indent="0" marL="0">
-              <a:buNone/>
-            </a:pPr>
-            <a:r>
-              <a:rPr lang="en-US" sz="1300" b="1" dirty="0">
+            <a:off x="768096" y="3142488"/>
+            <a:ext cx="1904924" cy="420624"/>
+          </a:xfrm>
+          <a:prstGeom prst="rect">
+            <a:avLst/>
+          </a:prstGeom>
+          <a:noFill/>
+          <a:ln/>
+        </p:spPr>
+        <p:txBody>
+          <a:bodyPr wrap="square" lIns="0" tIns="0" rIns="0" bIns="0" rtlCol="0" anchor="t"/>
+          <a:lstStyle/>
+          <a:p>
+            <a:pPr indent="0" marL="0">
+              <a:buNone/>
+            </a:pPr>
+            <a:r>
+              <a:rPr lang="en-US" sz="1150" b="1" dirty="0">
                 <a:solidFill>
                   <a:srgbClr val="1B2A41"/>
                 </a:solidFill>
@@ -9387,7 +7838,7 @@
               </a:rPr>
               <a:t>Advans Savings &amp; Loans</a:t>
             </a:r>
-            <a:endParaRPr lang="en-US" sz="1300" dirty="0"/>
+            <a:endParaRPr lang="en-US" sz="1150" dirty="0"/>
           </a:p>
         </p:txBody>
       </p:sp>
@@ -9399,8 +7850,8 @@
         </p:nvSpPr>
         <p:spPr>
           <a:xfrm>
-            <a:off x="4630826" y="3590544"/>
-            <a:ext cx="2984906" cy="499872"/>
+            <a:off x="841248" y="3590544"/>
+            <a:ext cx="2087804" cy="445008"/>
           </a:xfrm>
           <a:prstGeom prst="rect">
             <a:avLst/>
@@ -9414,13 +7865,13 @@
           <a:p>
             <a:pPr marL="165100" indent="-165100">
               <a:spcAft>
-                <a:spcPts val="300"/>
+                <a:spcPts val="200"/>
               </a:spcAft>
               <a:buSzPct val="100000"/>
               <a:buChar char="•"/>
             </a:pPr>
             <a:r>
-              <a:rPr lang="en-US" sz="900" dirty="0">
+              <a:rPr lang="en-US" sz="850" dirty="0">
                 <a:solidFill>
                   <a:srgbClr val="52514E"/>
                 </a:solidFill>
@@ -9430,18 +7881,18 @@
               </a:rPr>
               <a:t>Final account</a:t>
             </a:r>
-            <a:endParaRPr lang="en-US" sz="900" dirty="0"/>
+            <a:endParaRPr lang="en-US" sz="850" dirty="0"/>
           </a:p>
           <a:p>
             <a:pPr marL="165100" indent="-165100">
               <a:spcAft>
-                <a:spcPts val="300"/>
+                <a:spcPts val="200"/>
               </a:spcAft>
               <a:buSzPct val="100000"/>
               <a:buChar char="•"/>
             </a:pPr>
             <a:r>
-              <a:rPr lang="en-US" sz="900" dirty="0">
+              <a:rPr lang="en-US" sz="850" dirty="0">
                 <a:solidFill>
                   <a:srgbClr val="52514E"/>
                 </a:solidFill>
@@ -9451,7 +7902,7 @@
               </a:rPr>
               <a:t>Budgetary report</a:t>
             </a:r>
-            <a:endParaRPr lang="en-US" sz="900" dirty="0"/>
+            <a:endParaRPr lang="en-US" sz="850" dirty="0"/>
           </a:p>
         </p:txBody>
       </p:sp>
@@ -9463,24 +7914,24 @@
         </p:nvSpPr>
         <p:spPr>
           <a:xfrm>
-            <a:off x="4557674" y="4090416"/>
-            <a:ext cx="3076346" cy="237744"/>
-          </a:xfrm>
-          <a:prstGeom prst="rect">
-            <a:avLst/>
-          </a:prstGeom>
-          <a:noFill/>
-          <a:ln/>
-        </p:spPr>
-        <p:txBody>
-          <a:bodyPr wrap="square" lIns="0" tIns="0" rIns="0" bIns="0" rtlCol="0" anchor="ctr"/>
-          <a:lstStyle/>
-          <a:p>
-            <a:pPr indent="0" marL="0">
-              <a:buNone/>
-            </a:pPr>
-            <a:r>
-              <a:rPr lang="en-US" sz="900" b="1" dirty="0">
+            <a:off x="768096" y="4108704"/>
+            <a:ext cx="2197532" cy="237744"/>
+          </a:xfrm>
+          <a:prstGeom prst="rect">
+            <a:avLst/>
+          </a:prstGeom>
+          <a:noFill/>
+          <a:ln/>
+        </p:spPr>
+        <p:txBody>
+          <a:bodyPr wrap="square" lIns="0" tIns="0" rIns="0" bIns="0" rtlCol="0" anchor="ctr"/>
+          <a:lstStyle/>
+          <a:p>
+            <a:pPr indent="0" marL="0">
+              <a:buNone/>
+            </a:pPr>
+            <a:r>
+              <a:rPr lang="en-US" sz="850" b="1" dirty="0">
                 <a:solidFill>
                   <a:srgbClr val="898781"/>
                 </a:solidFill>
@@ -9490,7 +7941,7 @@
               </a:rPr>
               <a:t>Tracy</a:t>
             </a:r>
-            <a:endParaRPr lang="en-US" sz="900" dirty="0"/>
+            <a:endParaRPr lang="en-US" sz="850" dirty="0"/>
           </a:p>
         </p:txBody>
       </p:sp>
@@ -9502,8 +7953,8 @@
         </p:nvSpPr>
         <p:spPr>
           <a:xfrm>
-            <a:off x="8109509" y="3005328"/>
-            <a:ext cx="3515258" cy="1414272"/>
+            <a:off x="3386252" y="3005328"/>
+            <a:ext cx="2599868" cy="1414272"/>
           </a:xfrm>
           <a:prstGeom prst="roundRect">
             <a:avLst>
@@ -9536,8 +7987,8 @@
         </p:nvSpPr>
         <p:spPr>
           <a:xfrm>
-            <a:off x="11057839" y="3151632"/>
-            <a:ext cx="402336" cy="402336"/>
+            <a:off x="5474056" y="3133344"/>
+            <a:ext cx="365760" cy="365760"/>
           </a:xfrm>
           <a:prstGeom prst="ellipse">
             <a:avLst/>
@@ -9556,8 +8007,8 @@
         </p:nvSpPr>
         <p:spPr>
           <a:xfrm>
-            <a:off x="11057839" y="3151632"/>
-            <a:ext cx="402336" cy="402336"/>
+            <a:off x="5474056" y="3133344"/>
+            <a:ext cx="365760" cy="365760"/>
           </a:xfrm>
           <a:prstGeom prst="rect">
             <a:avLst/>
@@ -9573,7 +8024,7 @@
               <a:buNone/>
             </a:pPr>
             <a:r>
-              <a:rPr lang="en-US" sz="1300" b="1" dirty="0">
+              <a:rPr lang="en-US" sz="1000" b="1" dirty="0">
                 <a:solidFill>
                   <a:srgbClr val="FFFFFF"/>
                 </a:solidFill>
@@ -9583,7 +8034,7 @@
               </a:rPr>
               <a:t>1</a:t>
             </a:r>
-            <a:endParaRPr lang="en-US" sz="1300" dirty="0"/>
+            <a:endParaRPr lang="en-US" sz="1000" dirty="0"/>
           </a:p>
         </p:txBody>
       </p:sp>
@@ -9595,24 +8046,24 @@
         </p:nvSpPr>
         <p:spPr>
           <a:xfrm>
-            <a:off x="8328965" y="3151632"/>
-            <a:ext cx="2765450" cy="402336"/>
-          </a:xfrm>
-          <a:prstGeom prst="rect">
-            <a:avLst/>
-          </a:prstGeom>
-          <a:noFill/>
-          <a:ln/>
-        </p:spPr>
-        <p:txBody>
-          <a:bodyPr wrap="square" lIns="0" tIns="0" rIns="0" bIns="0" rtlCol="0" anchor="ctr"/>
-          <a:lstStyle/>
-          <a:p>
-            <a:pPr indent="0" marL="0">
-              <a:buNone/>
-            </a:pPr>
-            <a:r>
-              <a:rPr lang="en-US" sz="1300" b="1" dirty="0">
+            <a:off x="3587420" y="3142488"/>
+            <a:ext cx="1904924" cy="420624"/>
+          </a:xfrm>
+          <a:prstGeom prst="rect">
+            <a:avLst/>
+          </a:prstGeom>
+          <a:noFill/>
+          <a:ln/>
+        </p:spPr>
+        <p:txBody>
+          <a:bodyPr wrap="square" lIns="0" tIns="0" rIns="0" bIns="0" rtlCol="0" anchor="t"/>
+          <a:lstStyle/>
+          <a:p>
+            <a:pPr indent="0" marL="0">
+              <a:buNone/>
+            </a:pPr>
+            <a:r>
+              <a:rPr lang="en-US" sz="1150" b="1" dirty="0">
                 <a:solidFill>
                   <a:srgbClr val="1B2A41"/>
                 </a:solidFill>
@@ -9620,9 +8071,9 @@
                 <a:ea typeface="Cambria" pitchFamily="34" charset="-122"/>
                 <a:cs typeface="Cambria" pitchFamily="34" charset="-120"/>
               </a:rPr>
-              <a:t>Thoroughbred Place</a:t>
-            </a:r>
-            <a:endParaRPr lang="en-US" sz="1300" dirty="0"/>
+              <a:t>Ecole International School</a:t>
+            </a:r>
+            <a:endParaRPr lang="en-US" sz="1150" dirty="0"/>
           </a:p>
         </p:txBody>
       </p:sp>
@@ -9634,8 +8085,8 @@
         </p:nvSpPr>
         <p:spPr>
           <a:xfrm>
-            <a:off x="8402117" y="3590544"/>
-            <a:ext cx="2984906" cy="499872"/>
+            <a:off x="3660572" y="3590544"/>
+            <a:ext cx="2087804" cy="445008"/>
           </a:xfrm>
           <a:prstGeom prst="rect">
             <a:avLst/>
@@ -9649,13 +8100,13 @@
           <a:p>
             <a:pPr marL="165100" indent="-165100">
               <a:spcAft>
-                <a:spcPts val="300"/>
+                <a:spcPts val="200"/>
               </a:spcAft>
               <a:buSzPct val="100000"/>
               <a:buChar char="•"/>
             </a:pPr>
             <a:r>
-              <a:rPr lang="en-US" sz="900" dirty="0">
+              <a:rPr lang="en-US" sz="850" dirty="0">
                 <a:solidFill>
                   <a:srgbClr val="52514E"/>
                 </a:solidFill>
@@ -9663,9 +8114,9 @@
                 <a:ea typeface="Calibri" pitchFamily="34" charset="-122"/>
                 <a:cs typeface="Calibri" pitchFamily="34" charset="-120"/>
               </a:rPr>
-              <a:t>Financial report (internal)</a:t>
-            </a:r>
-            <a:endParaRPr lang="en-US" sz="900" dirty="0"/>
+              <a:t>BoQ and Budget</a:t>
+            </a:r>
+            <a:endParaRPr lang="en-US" sz="850" dirty="0"/>
           </a:p>
         </p:txBody>
       </p:sp>
@@ -9677,24 +8128,24 @@
         </p:nvSpPr>
         <p:spPr>
           <a:xfrm>
-            <a:off x="8328965" y="4090416"/>
-            <a:ext cx="3076346" cy="237744"/>
-          </a:xfrm>
-          <a:prstGeom prst="rect">
-            <a:avLst/>
-          </a:prstGeom>
-          <a:noFill/>
-          <a:ln/>
-        </p:spPr>
-        <p:txBody>
-          <a:bodyPr wrap="square" lIns="0" tIns="0" rIns="0" bIns="0" rtlCol="0" anchor="ctr"/>
-          <a:lstStyle/>
-          <a:p>
-            <a:pPr indent="0" marL="0">
-              <a:buNone/>
-            </a:pPr>
-            <a:r>
-              <a:rPr lang="en-US" sz="900" b="1" dirty="0">
+            <a:off x="3587420" y="4108704"/>
+            <a:ext cx="2197532" cy="237744"/>
+          </a:xfrm>
+          <a:prstGeom prst="rect">
+            <a:avLst/>
+          </a:prstGeom>
+          <a:noFill/>
+          <a:ln/>
+        </p:spPr>
+        <p:txBody>
+          <a:bodyPr wrap="square" lIns="0" tIns="0" rIns="0" bIns="0" rtlCol="0" anchor="ctr"/>
+          <a:lstStyle/>
+          <a:p>
+            <a:pPr indent="0" marL="0">
+              <a:buNone/>
+            </a:pPr>
+            <a:r>
+              <a:rPr lang="en-US" sz="850" b="1" dirty="0">
                 <a:solidFill>
                   <a:srgbClr val="898781"/>
                 </a:solidFill>
@@ -9702,9 +8153,9 @@
                 <a:ea typeface="Calibri" pitchFamily="34" charset="-122"/>
                 <a:cs typeface="Calibri" pitchFamily="34" charset="-120"/>
               </a:rPr>
-              <a:t>Sedem</a:t>
-            </a:r>
-            <a:endParaRPr lang="en-US" sz="900" dirty="0"/>
+              <a:t>Tracy, Obed, Eunice</a:t>
+            </a:r>
+            <a:endParaRPr lang="en-US" sz="850" dirty="0"/>
           </a:p>
         </p:txBody>
       </p:sp>
@@ -9716,8 +8167,8 @@
         </p:nvSpPr>
         <p:spPr>
           <a:xfrm>
-            <a:off x="566928" y="4602480"/>
-            <a:ext cx="3515258" cy="1414272"/>
+            <a:off x="6205576" y="3005328"/>
+            <a:ext cx="2599868" cy="1414272"/>
           </a:xfrm>
           <a:prstGeom prst="roundRect">
             <a:avLst>
@@ -9750,8 +8201,8 @@
         </p:nvSpPr>
         <p:spPr>
           <a:xfrm>
-            <a:off x="3515258" y="4748784"/>
-            <a:ext cx="402336" cy="402336"/>
+            <a:off x="8293379" y="3133344"/>
+            <a:ext cx="365760" cy="365760"/>
           </a:xfrm>
           <a:prstGeom prst="ellipse">
             <a:avLst/>
@@ -9770,8 +8221,8 @@
         </p:nvSpPr>
         <p:spPr>
           <a:xfrm>
-            <a:off x="3515258" y="4748784"/>
-            <a:ext cx="402336" cy="402336"/>
+            <a:off x="8293379" y="3133344"/>
+            <a:ext cx="365760" cy="365760"/>
           </a:xfrm>
           <a:prstGeom prst="rect">
             <a:avLst/>
@@ -9787,7 +8238,7 @@
               <a:buNone/>
             </a:pPr>
             <a:r>
-              <a:rPr lang="en-US" sz="1300" b="1" dirty="0">
+              <a:rPr lang="en-US" sz="1000" b="1" dirty="0">
                 <a:solidFill>
                   <a:srgbClr val="FFFFFF"/>
                 </a:solidFill>
@@ -9797,7 +8248,7 @@
               </a:rPr>
               <a:t>1</a:t>
             </a:r>
-            <a:endParaRPr lang="en-US" sz="1300" dirty="0"/>
+            <a:endParaRPr lang="en-US" sz="1000" dirty="0"/>
           </a:p>
         </p:txBody>
       </p:sp>
@@ -9809,24 +8260,24 @@
         </p:nvSpPr>
         <p:spPr>
           <a:xfrm>
-            <a:off x="786384" y="4748784"/>
-            <a:ext cx="2765450" cy="402336"/>
-          </a:xfrm>
-          <a:prstGeom prst="rect">
-            <a:avLst/>
-          </a:prstGeom>
-          <a:noFill/>
-          <a:ln/>
-        </p:spPr>
-        <p:txBody>
-          <a:bodyPr wrap="square" lIns="0" tIns="0" rIns="0" bIns="0" rtlCol="0" anchor="ctr"/>
-          <a:lstStyle/>
-          <a:p>
-            <a:pPr indent="0" marL="0">
-              <a:buNone/>
-            </a:pPr>
-            <a:r>
-              <a:rPr lang="en-US" sz="1300" b="1" dirty="0">
+            <a:off x="6406744" y="3142488"/>
+            <a:ext cx="1904924" cy="420624"/>
+          </a:xfrm>
+          <a:prstGeom prst="rect">
+            <a:avLst/>
+          </a:prstGeom>
+          <a:noFill/>
+          <a:ln/>
+        </p:spPr>
+        <p:txBody>
+          <a:bodyPr wrap="square" lIns="0" tIns="0" rIns="0" bIns="0" rtlCol="0" anchor="t"/>
+          <a:lstStyle/>
+          <a:p>
+            <a:pPr indent="0" marL="0">
+              <a:buNone/>
+            </a:pPr>
+            <a:r>
+              <a:rPr lang="en-US" sz="1150" b="1" dirty="0">
                 <a:solidFill>
                   <a:srgbClr val="1B2A41"/>
                 </a:solidFill>
@@ -9834,9 +8285,9 @@
                 <a:ea typeface="Cambria" pitchFamily="34" charset="-122"/>
                 <a:cs typeface="Cambria" pitchFamily="34" charset="-120"/>
               </a:rPr>
-              <a:t>Barry Callebaut</a:t>
-            </a:r>
-            <a:endParaRPr lang="en-US" sz="1300" dirty="0"/>
+              <a:t>Thoroughbred Place</a:t>
+            </a:r>
+            <a:endParaRPr lang="en-US" sz="1150" dirty="0"/>
           </a:p>
         </p:txBody>
       </p:sp>
@@ -9848,8 +8299,8 @@
         </p:nvSpPr>
         <p:spPr>
           <a:xfrm>
-            <a:off x="859536" y="5187696"/>
-            <a:ext cx="2984906" cy="499872"/>
+            <a:off x="6479896" y="3590544"/>
+            <a:ext cx="2087804" cy="445008"/>
           </a:xfrm>
           <a:prstGeom prst="rect">
             <a:avLst/>
@@ -9863,13 +8314,13 @@
           <a:p>
             <a:pPr marL="165100" indent="-165100">
               <a:spcAft>
-                <a:spcPts val="300"/>
+                <a:spcPts val="200"/>
               </a:spcAft>
               <a:buSzPct val="100000"/>
               <a:buChar char="•"/>
             </a:pPr>
             <a:r>
-              <a:rPr lang="en-US" sz="900" dirty="0">
+              <a:rPr lang="en-US" sz="850" dirty="0">
                 <a:solidFill>
                   <a:srgbClr val="52514E"/>
                 </a:solidFill>
@@ -9877,9 +8328,9 @@
                 <a:ea typeface="Calibri" pitchFamily="34" charset="-122"/>
                 <a:cs typeface="Calibri" pitchFamily="34" charset="-120"/>
               </a:rPr>
-              <a:t>Budgetary report</a:t>
-            </a:r>
-            <a:endParaRPr lang="en-US" sz="900" dirty="0"/>
+              <a:t>Financial report (internal)</a:t>
+            </a:r>
+            <a:endParaRPr lang="en-US" sz="850" dirty="0"/>
           </a:p>
         </p:txBody>
       </p:sp>
@@ -9891,24 +8342,24 @@
         </p:nvSpPr>
         <p:spPr>
           <a:xfrm>
-            <a:off x="786384" y="5687568"/>
-            <a:ext cx="3076346" cy="237744"/>
-          </a:xfrm>
-          <a:prstGeom prst="rect">
-            <a:avLst/>
-          </a:prstGeom>
-          <a:noFill/>
-          <a:ln/>
-        </p:spPr>
-        <p:txBody>
-          <a:bodyPr wrap="square" lIns="0" tIns="0" rIns="0" bIns="0" rtlCol="0" anchor="ctr"/>
-          <a:lstStyle/>
-          <a:p>
-            <a:pPr indent="0" marL="0">
-              <a:buNone/>
-            </a:pPr>
-            <a:r>
-              <a:rPr lang="en-US" sz="900" b="1" dirty="0">
+            <a:off x="6406744" y="4108704"/>
+            <a:ext cx="2197532" cy="237744"/>
+          </a:xfrm>
+          <a:prstGeom prst="rect">
+            <a:avLst/>
+          </a:prstGeom>
+          <a:noFill/>
+          <a:ln/>
+        </p:spPr>
+        <p:txBody>
+          <a:bodyPr wrap="square" lIns="0" tIns="0" rIns="0" bIns="0" rtlCol="0" anchor="ctr"/>
+          <a:lstStyle/>
+          <a:p>
+            <a:pPr indent="0" marL="0">
+              <a:buNone/>
+            </a:pPr>
+            <a:r>
+              <a:rPr lang="en-US" sz="850" b="1" dirty="0">
                 <a:solidFill>
                   <a:srgbClr val="898781"/>
                 </a:solidFill>
@@ -9916,9 +8367,9 @@
                 <a:ea typeface="Calibri" pitchFamily="34" charset="-122"/>
                 <a:cs typeface="Calibri" pitchFamily="34" charset="-120"/>
               </a:rPr>
-              <a:t>Gilbert</a:t>
-            </a:r>
-            <a:endParaRPr lang="en-US" sz="900" dirty="0"/>
+              <a:t>Sedem</a:t>
+            </a:r>
+            <a:endParaRPr lang="en-US" sz="850" dirty="0"/>
           </a:p>
         </p:txBody>
       </p:sp>
@@ -9930,8 +8381,8 @@
         </p:nvSpPr>
         <p:spPr>
           <a:xfrm>
-            <a:off x="4338218" y="4602480"/>
-            <a:ext cx="3515258" cy="1414272"/>
+            <a:off x="9024899" y="3005328"/>
+            <a:ext cx="2599868" cy="1414272"/>
           </a:xfrm>
           <a:prstGeom prst="roundRect">
             <a:avLst>
@@ -9964,8 +8415,8 @@
         </p:nvSpPr>
         <p:spPr>
           <a:xfrm>
-            <a:off x="7286549" y="4748784"/>
-            <a:ext cx="402336" cy="402336"/>
+            <a:off x="11112703" y="3133344"/>
+            <a:ext cx="365760" cy="365760"/>
           </a:xfrm>
           <a:prstGeom prst="ellipse">
             <a:avLst/>
@@ -9984,8 +8435,8 @@
         </p:nvSpPr>
         <p:spPr>
           <a:xfrm>
-            <a:off x="7286549" y="4748784"/>
-            <a:ext cx="402336" cy="402336"/>
+            <a:off x="11112703" y="3133344"/>
+            <a:ext cx="365760" cy="365760"/>
           </a:xfrm>
           <a:prstGeom prst="rect">
             <a:avLst/>
@@ -10001,7 +8452,7 @@
               <a:buNone/>
             </a:pPr>
             <a:r>
-              <a:rPr lang="en-US" sz="1300" b="1" dirty="0">
+              <a:rPr lang="en-US" sz="1000" b="1" dirty="0">
                 <a:solidFill>
                   <a:srgbClr val="FFFFFF"/>
                 </a:solidFill>
@@ -10011,7 +8462,7 @@
               </a:rPr>
               <a:t>1</a:t>
             </a:r>
-            <a:endParaRPr lang="en-US" sz="1300" dirty="0"/>
+            <a:endParaRPr lang="en-US" sz="1000" dirty="0"/>
           </a:p>
         </p:txBody>
       </p:sp>
@@ -10023,24 +8474,24 @@
         </p:nvSpPr>
         <p:spPr>
           <a:xfrm>
-            <a:off x="4557674" y="4748784"/>
-            <a:ext cx="2765450" cy="402336"/>
-          </a:xfrm>
-          <a:prstGeom prst="rect">
-            <a:avLst/>
-          </a:prstGeom>
-          <a:noFill/>
-          <a:ln/>
-        </p:spPr>
-        <p:txBody>
-          <a:bodyPr wrap="square" lIns="0" tIns="0" rIns="0" bIns="0" rtlCol="0" anchor="ctr"/>
-          <a:lstStyle/>
-          <a:p>
-            <a:pPr indent="0" marL="0">
-              <a:buNone/>
-            </a:pPr>
-            <a:r>
-              <a:rPr lang="en-US" sz="1300" b="1" dirty="0">
+            <a:off x="9226067" y="3142488"/>
+            <a:ext cx="1904924" cy="420624"/>
+          </a:xfrm>
+          <a:prstGeom prst="rect">
+            <a:avLst/>
+          </a:prstGeom>
+          <a:noFill/>
+          <a:ln/>
+        </p:spPr>
+        <p:txBody>
+          <a:bodyPr wrap="square" lIns="0" tIns="0" rIns="0" bIns="0" rtlCol="0" anchor="t"/>
+          <a:lstStyle/>
+          <a:p>
+            <a:pPr indent="0" marL="0">
+              <a:buNone/>
+            </a:pPr>
+            <a:r>
+              <a:rPr lang="en-US" sz="1150" b="1" dirty="0">
                 <a:solidFill>
                   <a:srgbClr val="1B2A41"/>
                 </a:solidFill>
@@ -10048,9 +8499,9 @@
                 <a:ea typeface="Cambria" pitchFamily="34" charset="-122"/>
                 <a:cs typeface="Cambria" pitchFamily="34" charset="-120"/>
               </a:rPr>
-              <a:t>Brimmo Gardens Tender</a:t>
-            </a:r>
-            <a:endParaRPr lang="en-US" sz="1300" dirty="0"/>
+              <a:t>Barry Callebaut</a:t>
+            </a:r>
+            <a:endParaRPr lang="en-US" sz="1150" dirty="0"/>
           </a:p>
         </p:txBody>
       </p:sp>
@@ -10062,8 +8513,8 @@
         </p:nvSpPr>
         <p:spPr>
           <a:xfrm>
-            <a:off x="4630826" y="5187696"/>
-            <a:ext cx="2984906" cy="499872"/>
+            <a:off x="9299219" y="3590544"/>
+            <a:ext cx="2087804" cy="445008"/>
           </a:xfrm>
           <a:prstGeom prst="rect">
             <a:avLst/>
@@ -10077,13 +8528,13 @@
           <a:p>
             <a:pPr marL="165100" indent="-165100">
               <a:spcAft>
-                <a:spcPts val="300"/>
+                <a:spcPts val="200"/>
               </a:spcAft>
               <a:buSzPct val="100000"/>
               <a:buChar char="•"/>
             </a:pPr>
             <a:r>
-              <a:rPr lang="en-US" sz="900" dirty="0">
+              <a:rPr lang="en-US" sz="850" dirty="0">
                 <a:solidFill>
                   <a:srgbClr val="52514E"/>
                 </a:solidFill>
@@ -10091,9 +8542,9 @@
                 <a:ea typeface="Calibri" pitchFamily="34" charset="-122"/>
                 <a:cs typeface="Calibri" pitchFamily="34" charset="-120"/>
               </a:rPr>
-              <a:t>RFP submission</a:t>
-            </a:r>
-            <a:endParaRPr lang="en-US" sz="900" dirty="0"/>
+              <a:t>Budgetary report</a:t>
+            </a:r>
+            <a:endParaRPr lang="en-US" sz="850" dirty="0"/>
           </a:p>
         </p:txBody>
       </p:sp>
@@ -10105,24 +8556,24 @@
         </p:nvSpPr>
         <p:spPr>
           <a:xfrm>
-            <a:off x="4557674" y="5687568"/>
-            <a:ext cx="3076346" cy="237744"/>
-          </a:xfrm>
-          <a:prstGeom prst="rect">
-            <a:avLst/>
-          </a:prstGeom>
-          <a:noFill/>
-          <a:ln/>
-        </p:spPr>
-        <p:txBody>
-          <a:bodyPr wrap="square" lIns="0" tIns="0" rIns="0" bIns="0" rtlCol="0" anchor="ctr"/>
-          <a:lstStyle/>
-          <a:p>
-            <a:pPr indent="0" marL="0">
-              <a:buNone/>
-            </a:pPr>
-            <a:r>
-              <a:rPr lang="en-US" sz="900" b="1" dirty="0">
+            <a:off x="9226067" y="4108704"/>
+            <a:ext cx="2197532" cy="237744"/>
+          </a:xfrm>
+          <a:prstGeom prst="rect">
+            <a:avLst/>
+          </a:prstGeom>
+          <a:noFill/>
+          <a:ln/>
+        </p:spPr>
+        <p:txBody>
+          <a:bodyPr wrap="square" lIns="0" tIns="0" rIns="0" bIns="0" rtlCol="0" anchor="ctr"/>
+          <a:lstStyle/>
+          <a:p>
+            <a:pPr indent="0" marL="0">
+              <a:buNone/>
+            </a:pPr>
+            <a:r>
+              <a:rPr lang="en-US" sz="850" b="1" dirty="0">
                 <a:solidFill>
                   <a:srgbClr val="898781"/>
                 </a:solidFill>
@@ -10130,9 +8581,9 @@
                 <a:ea typeface="Calibri" pitchFamily="34" charset="-122"/>
                 <a:cs typeface="Calibri" pitchFamily="34" charset="-120"/>
               </a:rPr>
-              <a:t>Eunice</a:t>
-            </a:r>
-            <a:endParaRPr lang="en-US" sz="900" dirty="0"/>
+              <a:t>Gilbert</a:t>
+            </a:r>
+            <a:endParaRPr lang="en-US" sz="850" dirty="0"/>
           </a:p>
         </p:txBody>
       </p:sp>
@@ -10144,8 +8595,8 @@
         </p:nvSpPr>
         <p:spPr>
           <a:xfrm>
-            <a:off x="8109509" y="4602480"/>
-            <a:ext cx="3515258" cy="1414272"/>
+            <a:off x="566928" y="4602480"/>
+            <a:ext cx="2599868" cy="1414272"/>
           </a:xfrm>
           <a:prstGeom prst="roundRect">
             <a:avLst>
@@ -10178,8 +8629,8 @@
         </p:nvSpPr>
         <p:spPr>
           <a:xfrm>
-            <a:off x="11057839" y="4748784"/>
-            <a:ext cx="402336" cy="402336"/>
+            <a:off x="2654732" y="4730496"/>
+            <a:ext cx="365760" cy="365760"/>
           </a:xfrm>
           <a:prstGeom prst="ellipse">
             <a:avLst/>
@@ -10198,8 +8649,8 @@
         </p:nvSpPr>
         <p:spPr>
           <a:xfrm>
-            <a:off x="11057839" y="4748784"/>
-            <a:ext cx="402336" cy="402336"/>
+            <a:off x="2654732" y="4730496"/>
+            <a:ext cx="365760" cy="365760"/>
           </a:xfrm>
           <a:prstGeom prst="rect">
             <a:avLst/>
@@ -10215,7 +8666,7 @@
               <a:buNone/>
             </a:pPr>
             <a:r>
-              <a:rPr lang="en-US" sz="1300" b="1" dirty="0">
+              <a:rPr lang="en-US" sz="1000" b="1" dirty="0">
                 <a:solidFill>
                   <a:srgbClr val="FFFFFF"/>
                 </a:solidFill>
@@ -10225,7 +8676,7 @@
               </a:rPr>
               <a:t>1</a:t>
             </a:r>
-            <a:endParaRPr lang="en-US" sz="1300" dirty="0"/>
+            <a:endParaRPr lang="en-US" sz="1000" dirty="0"/>
           </a:p>
         </p:txBody>
       </p:sp>
@@ -10237,24 +8688,24 @@
         </p:nvSpPr>
         <p:spPr>
           <a:xfrm>
-            <a:off x="8328965" y="4748784"/>
-            <a:ext cx="2765450" cy="402336"/>
-          </a:xfrm>
-          <a:prstGeom prst="rect">
-            <a:avLst/>
-          </a:prstGeom>
-          <a:noFill/>
-          <a:ln/>
-        </p:spPr>
-        <p:txBody>
-          <a:bodyPr wrap="square" lIns="0" tIns="0" rIns="0" bIns="0" rtlCol="0" anchor="ctr"/>
-          <a:lstStyle/>
-          <a:p>
-            <a:pPr indent="0" marL="0">
-              <a:buNone/>
-            </a:pPr>
-            <a:r>
-              <a:rPr lang="en-US" sz="1300" b="1" dirty="0">
+            <a:off x="768096" y="4739640"/>
+            <a:ext cx="1904924" cy="420624"/>
+          </a:xfrm>
+          <a:prstGeom prst="rect">
+            <a:avLst/>
+          </a:prstGeom>
+          <a:noFill/>
+          <a:ln/>
+        </p:spPr>
+        <p:txBody>
+          <a:bodyPr wrap="square" lIns="0" tIns="0" rIns="0" bIns="0" rtlCol="0" anchor="t"/>
+          <a:lstStyle/>
+          <a:p>
+            <a:pPr indent="0" marL="0">
+              <a:buNone/>
+            </a:pPr>
+            <a:r>
+              <a:rPr lang="en-US" sz="1150" b="1" dirty="0">
                 <a:solidFill>
                   <a:srgbClr val="1B2A41"/>
                 </a:solidFill>
@@ -10262,9 +8713,9 @@
                 <a:ea typeface="Cambria" pitchFamily="34" charset="-122"/>
                 <a:cs typeface="Cambria" pitchFamily="34" charset="-120"/>
               </a:rPr>
-              <a:t>Enterprise COO's Office</a:t>
-            </a:r>
-            <a:endParaRPr lang="en-US" sz="1300" dirty="0"/>
+              <a:t>Brimmo Gardens Tender</a:t>
+            </a:r>
+            <a:endParaRPr lang="en-US" sz="1150" dirty="0"/>
           </a:p>
         </p:txBody>
       </p:sp>
@@ -10276,8 +8727,8 @@
         </p:nvSpPr>
         <p:spPr>
           <a:xfrm>
-            <a:off x="8402117" y="5187696"/>
-            <a:ext cx="2984906" cy="499872"/>
+            <a:off x="841248" y="5187696"/>
+            <a:ext cx="2087804" cy="445008"/>
           </a:xfrm>
           <a:prstGeom prst="rect">
             <a:avLst/>
@@ -10291,13 +8742,13 @@
           <a:p>
             <a:pPr marL="165100" indent="-165100">
               <a:spcAft>
-                <a:spcPts val="300"/>
+                <a:spcPts val="200"/>
               </a:spcAft>
               <a:buSzPct val="100000"/>
               <a:buChar char="•"/>
             </a:pPr>
             <a:r>
-              <a:rPr lang="en-US" sz="900" dirty="0">
+              <a:rPr lang="en-US" sz="850" dirty="0">
                 <a:solidFill>
                   <a:srgbClr val="52514E"/>
                 </a:solidFill>
@@ -10305,38 +8756,252 @@
                 <a:ea typeface="Calibri" pitchFamily="34" charset="-122"/>
                 <a:cs typeface="Calibri" pitchFamily="34" charset="-120"/>
               </a:rPr>
+              <a:t>RFP submission</a:t>
+            </a:r>
+            <a:endParaRPr lang="en-US" sz="850" dirty="0"/>
+          </a:p>
+        </p:txBody>
+      </p:sp>
+      <p:sp>
+        <p:nvSpPr>
+          <p:cNvPr id="57" name="Text 55"/>
+          <p:cNvSpPr txBox="1"/>
+          <p:nvPr/>
+        </p:nvSpPr>
+        <p:spPr>
+          <a:xfrm>
+            <a:off x="768096" y="5705856"/>
+            <a:ext cx="2197532" cy="237744"/>
+          </a:xfrm>
+          <a:prstGeom prst="rect">
+            <a:avLst/>
+          </a:prstGeom>
+          <a:noFill/>
+          <a:ln/>
+        </p:spPr>
+        <p:txBody>
+          <a:bodyPr wrap="square" lIns="0" tIns="0" rIns="0" bIns="0" rtlCol="0" anchor="ctr"/>
+          <a:lstStyle/>
+          <a:p>
+            <a:pPr indent="0" marL="0">
+              <a:buNone/>
+            </a:pPr>
+            <a:r>
+              <a:rPr lang="en-US" sz="850" b="1" dirty="0">
+                <a:solidFill>
+                  <a:srgbClr val="898781"/>
+                </a:solidFill>
+                <a:latin typeface="Calibri" pitchFamily="34" charset="0"/>
+                <a:ea typeface="Calibri" pitchFamily="34" charset="-122"/>
+                <a:cs typeface="Calibri" pitchFamily="34" charset="-120"/>
+              </a:rPr>
+              <a:t>Eunice</a:t>
+            </a:r>
+            <a:endParaRPr lang="en-US" sz="850" dirty="0"/>
+          </a:p>
+        </p:txBody>
+      </p:sp>
+      <p:sp>
+        <p:nvSpPr>
+          <p:cNvPr id="58" name="Shape 56"/>
+          <p:cNvSpPr/>
+          <p:nvPr/>
+        </p:nvSpPr>
+        <p:spPr>
+          <a:xfrm>
+            <a:off x="3386252" y="4602480"/>
+            <a:ext cx="2599868" cy="1414272"/>
+          </a:xfrm>
+          <a:prstGeom prst="roundRect">
+            <a:avLst>
+              <a:gd name="adj" fmla="val 6466"/>
+            </a:avLst>
+          </a:prstGeom>
+          <a:solidFill>
+            <a:srgbClr val="FFFFFF"/>
+          </a:solidFill>
+          <a:ln w="12700">
+            <a:solidFill>
+              <a:srgbClr val="E1E0D9"/>
+            </a:solidFill>
+            <a:prstDash val="solid"/>
+          </a:ln>
+          <a:effectLst>
+            <a:outerShdw sx="100000" sy="100000" kx="0" ky="0" algn="bl" rotWithShape="0" blurRad="152400" dist="25400" dir="5400000">
+              <a:srgbClr val="1B2A41">
+                <a:alpha val="10000"/>
+              </a:srgbClr>
+            </a:outerShdw>
+          </a:effectLst>
+        </p:spPr>
+      </p:sp>
+      <p:sp>
+        <p:nvSpPr>
+          <p:cNvPr id="59" name="Shape 57"/>
+          <p:cNvSpPr/>
+          <p:nvPr/>
+        </p:nvSpPr>
+        <p:spPr>
+          <a:xfrm>
+            <a:off x="5474056" y="4730496"/>
+            <a:ext cx="365760" cy="365760"/>
+          </a:xfrm>
+          <a:prstGeom prst="ellipse">
+            <a:avLst/>
+          </a:prstGeom>
+          <a:solidFill>
+            <a:srgbClr val="0CA30C"/>
+          </a:solidFill>
+          <a:ln/>
+        </p:spPr>
+      </p:sp>
+      <p:sp>
+        <p:nvSpPr>
+          <p:cNvPr id="60" name="Text 58"/>
+          <p:cNvSpPr txBox="1"/>
+          <p:nvPr/>
+        </p:nvSpPr>
+        <p:spPr>
+          <a:xfrm>
+            <a:off x="5474056" y="4730496"/>
+            <a:ext cx="365760" cy="365760"/>
+          </a:xfrm>
+          <a:prstGeom prst="rect">
+            <a:avLst/>
+          </a:prstGeom>
+          <a:noFill/>
+          <a:ln/>
+        </p:spPr>
+        <p:txBody>
+          <a:bodyPr wrap="square" lIns="0" tIns="0" rIns="0" bIns="0" rtlCol="0" anchor="ctr"/>
+          <a:lstStyle/>
+          <a:p>
+            <a:pPr algn="ctr" indent="0" marL="0">
+              <a:buNone/>
+            </a:pPr>
+            <a:r>
+              <a:rPr lang="en-US" sz="1000" b="1" dirty="0">
+                <a:solidFill>
+                  <a:srgbClr val="FFFFFF"/>
+                </a:solidFill>
+                <a:latin typeface="Calibri" pitchFamily="34" charset="0"/>
+                <a:ea typeface="Calibri" pitchFamily="34" charset="-122"/>
+                <a:cs typeface="Calibri" pitchFamily="34" charset="-120"/>
+              </a:rPr>
+              <a:t>1</a:t>
+            </a:r>
+            <a:endParaRPr lang="en-US" sz="1000" dirty="0"/>
+          </a:p>
+        </p:txBody>
+      </p:sp>
+      <p:sp>
+        <p:nvSpPr>
+          <p:cNvPr id="61" name="Text 59"/>
+          <p:cNvSpPr txBox="1"/>
+          <p:nvPr/>
+        </p:nvSpPr>
+        <p:spPr>
+          <a:xfrm>
+            <a:off x="3587420" y="4739640"/>
+            <a:ext cx="1904924" cy="420624"/>
+          </a:xfrm>
+          <a:prstGeom prst="rect">
+            <a:avLst/>
+          </a:prstGeom>
+          <a:noFill/>
+          <a:ln/>
+        </p:spPr>
+        <p:txBody>
+          <a:bodyPr wrap="square" lIns="0" tIns="0" rIns="0" bIns="0" rtlCol="0" anchor="t"/>
+          <a:lstStyle/>
+          <a:p>
+            <a:pPr indent="0" marL="0">
+              <a:buNone/>
+            </a:pPr>
+            <a:r>
+              <a:rPr lang="en-US" sz="1150" b="1" dirty="0">
+                <a:solidFill>
+                  <a:srgbClr val="1B2A41"/>
+                </a:solidFill>
+                <a:latin typeface="Cambria" pitchFamily="34" charset="0"/>
+                <a:ea typeface="Cambria" pitchFamily="34" charset="-122"/>
+                <a:cs typeface="Cambria" pitchFamily="34" charset="-120"/>
+              </a:rPr>
+              <a:t>Enterprise COO's Office</a:t>
+            </a:r>
+            <a:endParaRPr lang="en-US" sz="1150" dirty="0"/>
+          </a:p>
+        </p:txBody>
+      </p:sp>
+      <p:sp>
+        <p:nvSpPr>
+          <p:cNvPr id="62" name="Text 60"/>
+          <p:cNvSpPr txBox="1"/>
+          <p:nvPr/>
+        </p:nvSpPr>
+        <p:spPr>
+          <a:xfrm>
+            <a:off x="3660572" y="5187696"/>
+            <a:ext cx="2087804" cy="445008"/>
+          </a:xfrm>
+          <a:prstGeom prst="rect">
+            <a:avLst/>
+          </a:prstGeom>
+          <a:noFill/>
+          <a:ln/>
+        </p:spPr>
+        <p:txBody>
+          <a:bodyPr wrap="square" lIns="0" tIns="0" rIns="0" bIns="0" rtlCol="0" anchor="t"/>
+          <a:lstStyle/>
+          <a:p>
+            <a:pPr marL="165100" indent="-165100">
+              <a:spcAft>
+                <a:spcPts val="200"/>
+              </a:spcAft>
+              <a:buSzPct val="100000"/>
+              <a:buChar char="•"/>
+            </a:pPr>
+            <a:r>
+              <a:rPr lang="en-US" sz="850" dirty="0">
+                <a:solidFill>
+                  <a:srgbClr val="52514E"/>
+                </a:solidFill>
+                <a:latin typeface="Calibri" pitchFamily="34" charset="0"/>
+                <a:ea typeface="Calibri" pitchFamily="34" charset="-122"/>
+                <a:cs typeface="Calibri" pitchFamily="34" charset="-120"/>
+              </a:rPr>
               <a:t>Cashflow forecast</a:t>
             </a:r>
-            <a:endParaRPr lang="en-US" sz="900" dirty="0"/>
-          </a:p>
-        </p:txBody>
-      </p:sp>
-      <p:sp>
-        <p:nvSpPr>
-          <p:cNvPr id="57" name="Text 55"/>
-          <p:cNvSpPr txBox="1"/>
-          <p:nvPr/>
-        </p:nvSpPr>
-        <p:spPr>
-          <a:xfrm>
-            <a:off x="8328965" y="5687568"/>
-            <a:ext cx="3076346" cy="237744"/>
-          </a:xfrm>
-          <a:prstGeom prst="rect">
-            <a:avLst/>
-          </a:prstGeom>
-          <a:noFill/>
-          <a:ln/>
-        </p:spPr>
-        <p:txBody>
-          <a:bodyPr wrap="square" lIns="0" tIns="0" rIns="0" bIns="0" rtlCol="0" anchor="ctr"/>
-          <a:lstStyle/>
-          <a:p>
-            <a:pPr indent="0" marL="0">
-              <a:buNone/>
-            </a:pPr>
-            <a:r>
-              <a:rPr lang="en-US" sz="900" b="1" dirty="0">
+            <a:endParaRPr lang="en-US" sz="850" dirty="0"/>
+          </a:p>
+        </p:txBody>
+      </p:sp>
+      <p:sp>
+        <p:nvSpPr>
+          <p:cNvPr id="63" name="Text 61"/>
+          <p:cNvSpPr txBox="1"/>
+          <p:nvPr/>
+        </p:nvSpPr>
+        <p:spPr>
+          <a:xfrm>
+            <a:off x="3587420" y="5705856"/>
+            <a:ext cx="2197532" cy="237744"/>
+          </a:xfrm>
+          <a:prstGeom prst="rect">
+            <a:avLst/>
+          </a:prstGeom>
+          <a:noFill/>
+          <a:ln/>
+        </p:spPr>
+        <p:txBody>
+          <a:bodyPr wrap="square" lIns="0" tIns="0" rIns="0" bIns="0" rtlCol="0" anchor="ctr"/>
+          <a:lstStyle/>
+          <a:p>
+            <a:pPr indent="0" marL="0">
+              <a:buNone/>
+            </a:pPr>
+            <a:r>
+              <a:rPr lang="en-US" sz="850" b="1" dirty="0">
                 <a:solidFill>
                   <a:srgbClr val="898781"/>
                 </a:solidFill>
@@ -10346,13 +9011,13 @@
               </a:rPr>
               <a:t>Eunice</a:t>
             </a:r>
-            <a:endParaRPr lang="en-US" sz="900" dirty="0"/>
-          </a:p>
-        </p:txBody>
-      </p:sp>
-      <p:sp>
-        <p:nvSpPr>
-          <p:cNvPr id="58" name="Text 56"/>
+            <a:endParaRPr lang="en-US" sz="850" dirty="0"/>
+          </a:p>
+        </p:txBody>
+      </p:sp>
+      <p:sp>
+        <p:nvSpPr>
+          <p:cNvPr id="64" name="Text 62"/>
           <p:cNvSpPr txBox="1"/>
           <p:nvPr/>
         </p:nvSpPr>
@@ -10391,7 +9056,7 @@
       </p:sp>
       <p:sp>
         <p:nvSpPr>
-          <p:cNvPr id="59" name="Text 57"/>
+          <p:cNvPr id="65" name="Text 63"/>
           <p:cNvSpPr txBox="1"/>
           <p:nvPr/>
         </p:nvSpPr>
@@ -10525,7 +9190,7 @@
                 <a:ea typeface="Cambria" pitchFamily="34" charset="-122"/>
                 <a:cs typeface="Cambria" pitchFamily="34" charset="-120"/>
               </a:rPr>
-              <a:t>5 Outstanding Deliverables</a:t>
+              <a:t>4 Outstanding Deliverables</a:t>
             </a:r>
             <a:endParaRPr lang="en-US" sz="3100" dirty="0"/>
           </a:p>
@@ -10579,11 +9244,11 @@
         <p:spPr>
           <a:xfrm>
             <a:off x="566928" y="1700784"/>
-            <a:ext cx="11057839" cy="768096"/>
+            <a:ext cx="11057839" cy="932688"/>
           </a:xfrm>
           <a:prstGeom prst="roundRect">
             <a:avLst>
-              <a:gd name="adj" fmla="val 11905"/>
+              <a:gd name="adj" fmla="val 9804"/>
             </a:avLst>
           </a:prstGeom>
           <a:solidFill>
@@ -10612,7 +9277,7 @@
         </p:nvSpPr>
         <p:spPr>
           <a:xfrm>
-            <a:off x="731520" y="1975104"/>
+            <a:off x="731520" y="2057400"/>
             <a:ext cx="219456" cy="219456"/>
           </a:xfrm>
           <a:prstGeom prst="ellipse">
@@ -10632,7 +9297,7 @@
         </p:nvSpPr>
         <p:spPr>
           <a:xfrm>
-            <a:off x="1097280" y="1819656"/>
+            <a:off x="1097280" y="1929384"/>
             <a:ext cx="2560320" cy="237744"/>
           </a:xfrm>
           <a:prstGeom prst="rect">
@@ -10671,7 +9336,7 @@
         </p:nvSpPr>
         <p:spPr>
           <a:xfrm>
-            <a:off x="1097280" y="2066544"/>
+            <a:off x="1097280" y="2176272"/>
             <a:ext cx="2560320" cy="237744"/>
           </a:xfrm>
           <a:prstGeom prst="rect">
@@ -10710,7 +9375,7 @@
         </p:nvSpPr>
         <p:spPr>
           <a:xfrm>
-            <a:off x="3877056" y="1810512"/>
+            <a:off x="3877056" y="1920240"/>
             <a:ext cx="1097280" cy="219456"/>
           </a:xfrm>
           <a:prstGeom prst="rect">
@@ -10749,7 +9414,7 @@
         </p:nvSpPr>
         <p:spPr>
           <a:xfrm>
-            <a:off x="4974336" y="1810512"/>
+            <a:off x="4974336" y="1920240"/>
             <a:ext cx="1280160" cy="219456"/>
           </a:xfrm>
           <a:prstGeom prst="rect">
@@ -10788,7 +9453,7 @@
         </p:nvSpPr>
         <p:spPr>
           <a:xfrm>
-            <a:off x="3877056" y="2112264"/>
+            <a:off x="3877056" y="2221992"/>
             <a:ext cx="2377440" cy="155448"/>
           </a:xfrm>
           <a:prstGeom prst="roundRect">
@@ -10810,7 +9475,7 @@
         </p:nvSpPr>
         <p:spPr>
           <a:xfrm>
-            <a:off x="3877056" y="2112264"/>
+            <a:off x="3877056" y="2221992"/>
             <a:ext cx="237744" cy="155448"/>
           </a:xfrm>
           <a:prstGeom prst="roundRect">
@@ -10832,7 +9497,7 @@
         </p:nvSpPr>
         <p:spPr>
           <a:xfrm>
-            <a:off x="6222492" y="2043684"/>
+            <a:off x="6222492" y="2153412"/>
             <a:ext cx="32004" cy="292608"/>
           </a:xfrm>
           <a:prstGeom prst="rect">
@@ -10852,7 +9517,7 @@
         </p:nvSpPr>
         <p:spPr>
           <a:xfrm>
-            <a:off x="6739128" y="1837944"/>
+            <a:off x="6739128" y="1947672"/>
             <a:ext cx="1325880" cy="201168"/>
           </a:xfrm>
           <a:prstGeom prst="rect">
@@ -10891,7 +9556,7 @@
         </p:nvSpPr>
         <p:spPr>
           <a:xfrm>
-            <a:off x="6739128" y="2048256"/>
+            <a:off x="6739128" y="2157984"/>
             <a:ext cx="1325880" cy="256032"/>
           </a:xfrm>
           <a:prstGeom prst="rect">
@@ -10930,7 +9595,7 @@
         </p:nvSpPr>
         <p:spPr>
           <a:xfrm>
-            <a:off x="8266176" y="1837944"/>
+            <a:off x="8266176" y="1947672"/>
             <a:ext cx="1691640" cy="201168"/>
           </a:xfrm>
           <a:prstGeom prst="rect">
@@ -10969,7 +9634,7 @@
         </p:nvSpPr>
         <p:spPr>
           <a:xfrm>
-            <a:off x="8266176" y="2048256"/>
+            <a:off x="8266176" y="2157984"/>
             <a:ext cx="1691640" cy="256032"/>
           </a:xfrm>
           <a:prstGeom prst="rect">
@@ -11008,7 +9673,7 @@
         </p:nvSpPr>
         <p:spPr>
           <a:xfrm>
-            <a:off x="10186416" y="1929384"/>
+            <a:off x="10186416" y="2011680"/>
             <a:ext cx="1170432" cy="310896"/>
           </a:xfrm>
           <a:prstGeom prst="roundRect">
@@ -11030,7 +9695,7 @@
         </p:nvSpPr>
         <p:spPr>
           <a:xfrm>
-            <a:off x="10186416" y="1929384"/>
+            <a:off x="10186416" y="2011680"/>
             <a:ext cx="1170432" cy="310896"/>
           </a:xfrm>
           <a:prstGeom prst="rect">
@@ -11069,12 +9734,12 @@
         </p:nvSpPr>
         <p:spPr>
           <a:xfrm>
-            <a:off x="566928" y="2587752"/>
-            <a:ext cx="11057839" cy="768096"/>
+            <a:off x="566928" y="2828544"/>
+            <a:ext cx="11057839" cy="932688"/>
           </a:xfrm>
           <a:prstGeom prst="roundRect">
             <a:avLst>
-              <a:gd name="adj" fmla="val 11905"/>
+              <a:gd name="adj" fmla="val 9804"/>
             </a:avLst>
           </a:prstGeom>
           <a:solidFill>
@@ -11103,7 +9768,7 @@
         </p:nvSpPr>
         <p:spPr>
           <a:xfrm>
-            <a:off x="731520" y="2862072"/>
+            <a:off x="731520" y="3185160"/>
             <a:ext cx="219456" cy="219456"/>
           </a:xfrm>
           <a:prstGeom prst="ellipse">
@@ -11123,7 +9788,7 @@
         </p:nvSpPr>
         <p:spPr>
           <a:xfrm>
-            <a:off x="1097280" y="2706624"/>
+            <a:off x="1097280" y="3057144"/>
             <a:ext cx="2560320" cy="237744"/>
           </a:xfrm>
           <a:prstGeom prst="rect">
@@ -11162,7 +9827,7 @@
         </p:nvSpPr>
         <p:spPr>
           <a:xfrm>
-            <a:off x="1097280" y="2953512"/>
+            <a:off x="1097280" y="3304032"/>
             <a:ext cx="2560320" cy="237744"/>
           </a:xfrm>
           <a:prstGeom prst="rect">
@@ -11201,7 +9866,7 @@
         </p:nvSpPr>
         <p:spPr>
           <a:xfrm>
-            <a:off x="3877056" y="2697480"/>
+            <a:off x="3877056" y="3048000"/>
             <a:ext cx="1097280" cy="219456"/>
           </a:xfrm>
           <a:prstGeom prst="rect">
@@ -11240,7 +9905,7 @@
         </p:nvSpPr>
         <p:spPr>
           <a:xfrm>
-            <a:off x="4974336" y="2697480"/>
+            <a:off x="4974336" y="3048000"/>
             <a:ext cx="1280160" cy="219456"/>
           </a:xfrm>
           <a:prstGeom prst="rect">
@@ -11279,7 +9944,7 @@
         </p:nvSpPr>
         <p:spPr>
           <a:xfrm>
-            <a:off x="3877056" y="2999232"/>
+            <a:off x="3877056" y="3349752"/>
             <a:ext cx="2377440" cy="155448"/>
           </a:xfrm>
           <a:prstGeom prst="roundRect">
@@ -11301,7 +9966,7 @@
         </p:nvSpPr>
         <p:spPr>
           <a:xfrm>
-            <a:off x="3877056" y="2999232"/>
+            <a:off x="3877056" y="3349752"/>
             <a:ext cx="1188720" cy="155448"/>
           </a:xfrm>
           <a:prstGeom prst="roundRect">
@@ -11323,7 +9988,7 @@
         </p:nvSpPr>
         <p:spPr>
           <a:xfrm>
-            <a:off x="6222492" y="2930652"/>
+            <a:off x="6222492" y="3281172"/>
             <a:ext cx="32004" cy="292608"/>
           </a:xfrm>
           <a:prstGeom prst="rect">
@@ -11343,7 +10008,7 @@
         </p:nvSpPr>
         <p:spPr>
           <a:xfrm>
-            <a:off x="6739128" y="2724912"/>
+            <a:off x="6739128" y="3075432"/>
             <a:ext cx="1325880" cy="201168"/>
           </a:xfrm>
           <a:prstGeom prst="rect">
@@ -11382,7 +10047,7 @@
         </p:nvSpPr>
         <p:spPr>
           <a:xfrm>
-            <a:off x="6739128" y="2935224"/>
+            <a:off x="6739128" y="3285744"/>
             <a:ext cx="1325880" cy="256032"/>
           </a:xfrm>
           <a:prstGeom prst="rect">
@@ -11421,7 +10086,7 @@
         </p:nvSpPr>
         <p:spPr>
           <a:xfrm>
-            <a:off x="8266176" y="2724912"/>
+            <a:off x="8266176" y="3075432"/>
             <a:ext cx="1691640" cy="201168"/>
           </a:xfrm>
           <a:prstGeom prst="rect">
@@ -11460,7 +10125,7 @@
         </p:nvSpPr>
         <p:spPr>
           <a:xfrm>
-            <a:off x="8266176" y="2935224"/>
+            <a:off x="8266176" y="3285744"/>
             <a:ext cx="1691640" cy="256032"/>
           </a:xfrm>
           <a:prstGeom prst="rect">
@@ -11499,7 +10164,7 @@
         </p:nvSpPr>
         <p:spPr>
           <a:xfrm>
-            <a:off x="10186416" y="2816352"/>
+            <a:off x="10186416" y="3139440"/>
             <a:ext cx="1170432" cy="310896"/>
           </a:xfrm>
           <a:prstGeom prst="roundRect">
@@ -11521,7 +10186,7 @@
         </p:nvSpPr>
         <p:spPr>
           <a:xfrm>
-            <a:off x="10186416" y="2816352"/>
+            <a:off x="10186416" y="3139440"/>
             <a:ext cx="1170432" cy="310896"/>
           </a:xfrm>
           <a:prstGeom prst="rect">
@@ -11560,12 +10225,12 @@
         </p:nvSpPr>
         <p:spPr>
           <a:xfrm>
-            <a:off x="566928" y="3474720"/>
-            <a:ext cx="11057839" cy="768096"/>
+            <a:off x="566928" y="3956304"/>
+            <a:ext cx="11057839" cy="932688"/>
           </a:xfrm>
           <a:prstGeom prst="roundRect">
             <a:avLst>
-              <a:gd name="adj" fmla="val 11905"/>
+              <a:gd name="adj" fmla="val 9804"/>
             </a:avLst>
           </a:prstGeom>
           <a:solidFill>
@@ -11594,14 +10259,14 @@
         </p:nvSpPr>
         <p:spPr>
           <a:xfrm>
-            <a:off x="731520" y="3749040"/>
+            <a:off x="731520" y="4312920"/>
             <a:ext cx="219456" cy="219456"/>
           </a:xfrm>
           <a:prstGeom prst="ellipse">
             <a:avLst/>
           </a:prstGeom>
           <a:solidFill>
-            <a:srgbClr val="D03B3B"/>
+            <a:srgbClr val="FAB219"/>
           </a:solidFill>
           <a:ln/>
         </p:spPr>
@@ -11614,7 +10279,7 @@
         </p:nvSpPr>
         <p:spPr>
           <a:xfrm>
-            <a:off x="1097280" y="3593592"/>
+            <a:off x="1097280" y="4184904"/>
             <a:ext cx="2560320" cy="237744"/>
           </a:xfrm>
           <a:prstGeom prst="rect">
@@ -11639,7 +10304,7 @@
                 <a:ea typeface="Calibri" pitchFamily="34" charset="-122"/>
                 <a:cs typeface="Calibri" pitchFamily="34" charset="-120"/>
               </a:rPr>
-              <a:t>Ecole International School</a:t>
+              <a:t>Priority Insurance</a:t>
             </a:r>
             <a:endParaRPr lang="en-US" sz="1150" dirty="0"/>
           </a:p>
@@ -11653,7 +10318,7 @@
         </p:nvSpPr>
         <p:spPr>
           <a:xfrm>
-            <a:off x="1097280" y="3840480"/>
+            <a:off x="1097280" y="4431792"/>
             <a:ext cx="2560320" cy="237744"/>
           </a:xfrm>
           <a:prstGeom prst="rect">
@@ -11678,7 +10343,7 @@
                 <a:ea typeface="Calibri" pitchFamily="34" charset="-122"/>
                 <a:cs typeface="Calibri" pitchFamily="34" charset="-120"/>
               </a:rPr>
-              <a:t>BoQ and Budget</a:t>
+              <a:t>Complete BoQ</a:t>
             </a:r>
             <a:endParaRPr lang="en-US" sz="1000" dirty="0"/>
           </a:p>
@@ -11692,7 +10357,7 @@
         </p:nvSpPr>
         <p:spPr>
           <a:xfrm>
-            <a:off x="3877056" y="3584448"/>
+            <a:off x="3877056" y="4175760"/>
             <a:ext cx="1097280" cy="219456"/>
           </a:xfrm>
           <a:prstGeom prst="rect">
@@ -11717,7 +10382,7 @@
                 <a:ea typeface="Calibri" pitchFamily="34" charset="-122"/>
                 <a:cs typeface="Calibri" pitchFamily="34" charset="-120"/>
               </a:rPr>
-              <a:t>Actual 50%</a:t>
+              <a:t>Actual 40%</a:t>
             </a:r>
             <a:endParaRPr lang="en-US" sz="950" dirty="0"/>
           </a:p>
@@ -11731,7 +10396,7 @@
         </p:nvSpPr>
         <p:spPr>
           <a:xfrm>
-            <a:off x="4974336" y="3584448"/>
+            <a:off x="4974336" y="4175760"/>
             <a:ext cx="1280160" cy="219456"/>
           </a:xfrm>
           <a:prstGeom prst="rect">
@@ -11756,7 +10421,7 @@
                 <a:ea typeface="Calibri" pitchFamily="34" charset="-122"/>
                 <a:cs typeface="Calibri" pitchFamily="34" charset="-120"/>
               </a:rPr>
-              <a:t>Planned 100%</a:t>
+              <a:t>Planned 50%</a:t>
             </a:r>
             <a:endParaRPr lang="en-US" sz="950" dirty="0"/>
           </a:p>
@@ -11770,7 +10435,7 @@
         </p:nvSpPr>
         <p:spPr>
           <a:xfrm>
-            <a:off x="3877056" y="3886200"/>
+            <a:off x="3877056" y="4477512"/>
             <a:ext cx="2377440" cy="155448"/>
           </a:xfrm>
           <a:prstGeom prst="roundRect">
@@ -11792,8 +10457,8 @@
         </p:nvSpPr>
         <p:spPr>
           <a:xfrm>
-            <a:off x="3877056" y="3886200"/>
-            <a:ext cx="1188720" cy="155448"/>
+            <a:off x="3877056" y="4477512"/>
+            <a:ext cx="950976" cy="155448"/>
           </a:xfrm>
           <a:prstGeom prst="roundRect">
             <a:avLst>
@@ -11801,7 +10466,7 @@
             </a:avLst>
           </a:prstGeom>
           <a:solidFill>
-            <a:srgbClr val="D03B3B"/>
+            <a:srgbClr val="FAB219"/>
           </a:solidFill>
           <a:ln/>
         </p:spPr>
@@ -11814,7 +10479,7 @@
         </p:nvSpPr>
         <p:spPr>
           <a:xfrm>
-            <a:off x="6222492" y="3817620"/>
+            <a:off x="5065776" y="4408932"/>
             <a:ext cx="32004" cy="292608"/>
           </a:xfrm>
           <a:prstGeom prst="rect">
@@ -11834,7 +10499,7 @@
         </p:nvSpPr>
         <p:spPr>
           <a:xfrm>
-            <a:off x="6739128" y="3611880"/>
+            <a:off x="6739128" y="4203192"/>
             <a:ext cx="1325880" cy="201168"/>
           </a:xfrm>
           <a:prstGeom prst="rect">
@@ -11873,7 +10538,7 @@
         </p:nvSpPr>
         <p:spPr>
           <a:xfrm>
-            <a:off x="6739128" y="3822192"/>
+            <a:off x="6739128" y="4413504"/>
             <a:ext cx="1325880" cy="256032"/>
           </a:xfrm>
           <a:prstGeom prst="rect">
@@ -11898,7 +10563,7 @@
                 <a:ea typeface="Calibri" pitchFamily="34" charset="-122"/>
                 <a:cs typeface="Calibri" pitchFamily="34" charset="-120"/>
               </a:rPr>
-              <a:t>18 Sep 2026</a:t>
+              <a:t>30 Sep 2026</a:t>
             </a:r>
             <a:endParaRPr lang="en-US" sz="1100" dirty="0"/>
           </a:p>
@@ -11912,7 +10577,7 @@
         </p:nvSpPr>
         <p:spPr>
           <a:xfrm>
-            <a:off x="8266176" y="3611880"/>
+            <a:off x="8266176" y="4203192"/>
             <a:ext cx="1691640" cy="201168"/>
           </a:xfrm>
           <a:prstGeom prst="rect">
@@ -11951,7 +10616,7 @@
         </p:nvSpPr>
         <p:spPr>
           <a:xfrm>
-            <a:off x="8266176" y="3822192"/>
+            <a:off x="8266176" y="4413504"/>
             <a:ext cx="1691640" cy="256032"/>
           </a:xfrm>
           <a:prstGeom prst="rect">
@@ -11976,7 +10641,7 @@
                 <a:ea typeface="Calibri" pitchFamily="34" charset="-122"/>
                 <a:cs typeface="Calibri" pitchFamily="34" charset="-120"/>
               </a:rPr>
-              <a:t>Tracy, Obed, Eunice</a:t>
+              <a:t>Obed, Sedem, Gilbert</a:t>
             </a:r>
             <a:endParaRPr lang="en-US" sz="1000" dirty="0"/>
           </a:p>
@@ -11990,7 +10655,7 @@
         </p:nvSpPr>
         <p:spPr>
           <a:xfrm>
-            <a:off x="10186416" y="3703320"/>
+            <a:off x="10186416" y="4267200"/>
             <a:ext cx="1170432" cy="310896"/>
           </a:xfrm>
           <a:prstGeom prst="roundRect">
@@ -11999,7 +10664,7 @@
             </a:avLst>
           </a:prstGeom>
           <a:solidFill>
-            <a:srgbClr val="D03B3B"/>
+            <a:srgbClr val="FAB219"/>
           </a:solidFill>
           <a:ln/>
         </p:spPr>
@@ -12012,7 +10677,7 @@
         </p:nvSpPr>
         <p:spPr>
           <a:xfrm>
-            <a:off x="10186416" y="3703320"/>
+            <a:off x="10186416" y="4267200"/>
             <a:ext cx="1170432" cy="310896"/>
           </a:xfrm>
           <a:prstGeom prst="rect">
@@ -12031,13 +10696,13 @@
             <a:r>
               <a:rPr lang="en-US" sz="900" b="1" spc="40" kern="0" dirty="0">
                 <a:solidFill>
-                  <a:srgbClr val="FFFFFF"/>
-                </a:solidFill>
-                <a:latin typeface="Calibri" pitchFamily="34" charset="0"/>
-                <a:ea typeface="Calibri" pitchFamily="34" charset="-122"/>
-                <a:cs typeface="Calibri" pitchFamily="34" charset="-120"/>
-              </a:rPr>
-              <a:t>DUE TODAY</a:t>
+                  <a:srgbClr val="1B2A41"/>
+                </a:solidFill>
+                <a:latin typeface="Calibri" pitchFamily="34" charset="0"/>
+                <a:ea typeface="Calibri" pitchFamily="34" charset="-122"/>
+                <a:cs typeface="Calibri" pitchFamily="34" charset="-120"/>
+              </a:rPr>
+              <a:t>BLOCKED</a:t>
             </a:r>
             <a:endParaRPr lang="en-US" sz="900" dirty="0"/>
           </a:p>
@@ -12051,12 +10716,12 @@
         </p:nvSpPr>
         <p:spPr>
           <a:xfrm>
-            <a:off x="566928" y="4361688"/>
-            <a:ext cx="11057839" cy="768096"/>
+            <a:off x="566928" y="5084064"/>
+            <a:ext cx="11057839" cy="932688"/>
           </a:xfrm>
           <a:prstGeom prst="roundRect">
             <a:avLst>
-              <a:gd name="adj" fmla="val 11905"/>
+              <a:gd name="adj" fmla="val 9804"/>
             </a:avLst>
           </a:prstGeom>
           <a:solidFill>
@@ -12085,14 +10750,14 @@
         </p:nvSpPr>
         <p:spPr>
           <a:xfrm>
-            <a:off x="731520" y="4636008"/>
+            <a:off x="731520" y="5440680"/>
             <a:ext cx="219456" cy="219456"/>
           </a:xfrm>
           <a:prstGeom prst="ellipse">
             <a:avLst/>
           </a:prstGeom>
           <a:solidFill>
-            <a:srgbClr val="FAB219"/>
+            <a:srgbClr val="898781"/>
           </a:solidFill>
           <a:ln/>
         </p:spPr>
@@ -12105,7 +10770,7 @@
         </p:nvSpPr>
         <p:spPr>
           <a:xfrm>
-            <a:off x="1097280" y="4480560"/>
+            <a:off x="1097280" y="5312664"/>
             <a:ext cx="2560320" cy="237744"/>
           </a:xfrm>
           <a:prstGeom prst="rect">
@@ -12144,7 +10809,7 @@
         </p:nvSpPr>
         <p:spPr>
           <a:xfrm>
-            <a:off x="1097280" y="4727448"/>
+            <a:off x="1097280" y="5559552"/>
             <a:ext cx="2560320" cy="237744"/>
           </a:xfrm>
           <a:prstGeom prst="rect">
@@ -12169,7 +10834,7 @@
                 <a:ea typeface="Calibri" pitchFamily="34" charset="-122"/>
                 <a:cs typeface="Calibri" pitchFamily="34" charset="-120"/>
               </a:rPr>
-              <a:t>Complete BoQ</a:t>
+              <a:t>Complete Budget</a:t>
             </a:r>
             <a:endParaRPr lang="en-US" sz="1000" dirty="0"/>
           </a:p>
@@ -12183,7 +10848,7 @@
         </p:nvSpPr>
         <p:spPr>
           <a:xfrm>
-            <a:off x="3877056" y="4471416"/>
+            <a:off x="3877056" y="5303520"/>
             <a:ext cx="1097280" cy="219456"/>
           </a:xfrm>
           <a:prstGeom prst="rect">
@@ -12208,7 +10873,7 @@
                 <a:ea typeface="Calibri" pitchFamily="34" charset="-122"/>
                 <a:cs typeface="Calibri" pitchFamily="34" charset="-120"/>
               </a:rPr>
-              <a:t>Actual 40%</a:t>
+              <a:t>Actual 0%</a:t>
             </a:r>
             <a:endParaRPr lang="en-US" sz="950" dirty="0"/>
           </a:p>
@@ -12222,7 +10887,7 @@
         </p:nvSpPr>
         <p:spPr>
           <a:xfrm>
-            <a:off x="4974336" y="4471416"/>
+            <a:off x="4974336" y="5303520"/>
             <a:ext cx="1280160" cy="219456"/>
           </a:xfrm>
           <a:prstGeom prst="rect">
@@ -12247,7 +10912,7 @@
                 <a:ea typeface="Calibri" pitchFamily="34" charset="-122"/>
                 <a:cs typeface="Calibri" pitchFamily="34" charset="-120"/>
               </a:rPr>
-              <a:t>Planned 50%</a:t>
+              <a:t>Planned 0%</a:t>
             </a:r>
             <a:endParaRPr lang="en-US" sz="950" dirty="0"/>
           </a:p>
@@ -12261,7 +10926,7 @@
         </p:nvSpPr>
         <p:spPr>
           <a:xfrm>
-            <a:off x="3877056" y="4773168"/>
+            <a:off x="3877056" y="5605272"/>
             <a:ext cx="2377440" cy="155448"/>
           </a:xfrm>
           <a:prstGeom prst="roundRect">
@@ -12277,14 +10942,170 @@
       </p:sp>
       <p:sp>
         <p:nvSpPr>
-          <p:cNvPr id="57" name="Shape 55"/>
+          <p:cNvPr id="57" name="Text 55"/>
+          <p:cNvSpPr txBox="1"/>
+          <p:nvPr/>
+        </p:nvSpPr>
+        <p:spPr>
+          <a:xfrm>
+            <a:off x="6739128" y="5330952"/>
+            <a:ext cx="1325880" cy="201168"/>
+          </a:xfrm>
+          <a:prstGeom prst="rect">
+            <a:avLst/>
+          </a:prstGeom>
+          <a:noFill/>
+          <a:ln/>
+        </p:spPr>
+        <p:txBody>
+          <a:bodyPr wrap="square" lIns="0" tIns="0" rIns="0" bIns="0" rtlCol="0" anchor="ctr"/>
+          <a:lstStyle/>
+          <a:p>
+            <a:pPr indent="0" marL="0">
+              <a:buNone/>
+            </a:pPr>
+            <a:r>
+              <a:rPr lang="en-US" sz="800" b="1" spc="110" kern="0" dirty="0">
+                <a:solidFill>
+                  <a:srgbClr val="898781"/>
+                </a:solidFill>
+                <a:latin typeface="Calibri" pitchFamily="34" charset="0"/>
+                <a:ea typeface="Calibri" pitchFamily="34" charset="-122"/>
+                <a:cs typeface="Calibri" pitchFamily="34" charset="-120"/>
+              </a:rPr>
+              <a:t>DUE</a:t>
+            </a:r>
+            <a:endParaRPr lang="en-US" sz="800" dirty="0"/>
+          </a:p>
+        </p:txBody>
+      </p:sp>
+      <p:sp>
+        <p:nvSpPr>
+          <p:cNvPr id="58" name="Text 56"/>
+          <p:cNvSpPr txBox="1"/>
+          <p:nvPr/>
+        </p:nvSpPr>
+        <p:spPr>
+          <a:xfrm>
+            <a:off x="6739128" y="5541264"/>
+            <a:ext cx="1325880" cy="256032"/>
+          </a:xfrm>
+          <a:prstGeom prst="rect">
+            <a:avLst/>
+          </a:prstGeom>
+          <a:noFill/>
+          <a:ln/>
+        </p:spPr>
+        <p:txBody>
+          <a:bodyPr wrap="square" lIns="0" tIns="0" rIns="0" bIns="0" rtlCol="0" anchor="ctr"/>
+          <a:lstStyle/>
+          <a:p>
+            <a:pPr indent="0" marL="0">
+              <a:buNone/>
+            </a:pPr>
+            <a:r>
+              <a:rPr lang="en-US" sz="1100" b="1" dirty="0">
+                <a:solidFill>
+                  <a:srgbClr val="1B2A41"/>
+                </a:solidFill>
+                <a:latin typeface="Calibri" pitchFamily="34" charset="0"/>
+                <a:ea typeface="Calibri" pitchFamily="34" charset="-122"/>
+                <a:cs typeface="Calibri" pitchFamily="34" charset="-120"/>
+              </a:rPr>
+              <a:t>09 Oct 2026</a:t>
+            </a:r>
+            <a:endParaRPr lang="en-US" sz="1100" dirty="0"/>
+          </a:p>
+        </p:txBody>
+      </p:sp>
+      <p:sp>
+        <p:nvSpPr>
+          <p:cNvPr id="59" name="Text 57"/>
+          <p:cNvSpPr txBox="1"/>
+          <p:nvPr/>
+        </p:nvSpPr>
+        <p:spPr>
+          <a:xfrm>
+            <a:off x="8266176" y="5330952"/>
+            <a:ext cx="1691640" cy="201168"/>
+          </a:xfrm>
+          <a:prstGeom prst="rect">
+            <a:avLst/>
+          </a:prstGeom>
+          <a:noFill/>
+          <a:ln/>
+        </p:spPr>
+        <p:txBody>
+          <a:bodyPr wrap="square" lIns="0" tIns="0" rIns="0" bIns="0" rtlCol="0" anchor="ctr"/>
+          <a:lstStyle/>
+          <a:p>
+            <a:pPr indent="0" marL="0">
+              <a:buNone/>
+            </a:pPr>
+            <a:r>
+              <a:rPr lang="en-US" sz="800" b="1" spc="110" kern="0" dirty="0">
+                <a:solidFill>
+                  <a:srgbClr val="898781"/>
+                </a:solidFill>
+                <a:latin typeface="Calibri" pitchFamily="34" charset="0"/>
+                <a:ea typeface="Calibri" pitchFamily="34" charset="-122"/>
+                <a:cs typeface="Calibri" pitchFamily="34" charset="-120"/>
+              </a:rPr>
+              <a:t>OWNER</a:t>
+            </a:r>
+            <a:endParaRPr lang="en-US" sz="800" dirty="0"/>
+          </a:p>
+        </p:txBody>
+      </p:sp>
+      <p:sp>
+        <p:nvSpPr>
+          <p:cNvPr id="60" name="Text 58"/>
+          <p:cNvSpPr txBox="1"/>
+          <p:nvPr/>
+        </p:nvSpPr>
+        <p:spPr>
+          <a:xfrm>
+            <a:off x="8266176" y="5541264"/>
+            <a:ext cx="1691640" cy="256032"/>
+          </a:xfrm>
+          <a:prstGeom prst="rect">
+            <a:avLst/>
+          </a:prstGeom>
+          <a:noFill/>
+          <a:ln/>
+        </p:spPr>
+        <p:txBody>
+          <a:bodyPr wrap="square" lIns="0" tIns="0" rIns="0" bIns="0" rtlCol="0" anchor="ctr"/>
+          <a:lstStyle/>
+          <a:p>
+            <a:pPr indent="0" marL="0">
+              <a:buNone/>
+            </a:pPr>
+            <a:r>
+              <a:rPr lang="en-US" sz="1000" dirty="0">
+                <a:solidFill>
+                  <a:srgbClr val="52514E"/>
+                </a:solidFill>
+                <a:latin typeface="Calibri" pitchFamily="34" charset="0"/>
+                <a:ea typeface="Calibri" pitchFamily="34" charset="-122"/>
+                <a:cs typeface="Calibri" pitchFamily="34" charset="-120"/>
+              </a:rPr>
+              <a:t>Obed, Sedem, Gilbert</a:t>
+            </a:r>
+            <a:endParaRPr lang="en-US" sz="1000" dirty="0"/>
+          </a:p>
+        </p:txBody>
+      </p:sp>
+      <p:sp>
+        <p:nvSpPr>
+          <p:cNvPr id="61" name="Shape 59"/>
           <p:cNvSpPr/>
           <p:nvPr/>
         </p:nvSpPr>
         <p:spPr>
           <a:xfrm>
-            <a:off x="3877056" y="4773168"/>
-            <a:ext cx="950976" cy="155448"/>
+            <a:off x="10186416" y="5394960"/>
+            <a:ext cx="1170432" cy="310896"/>
           </a:xfrm>
           <a:prstGeom prst="roundRect">
             <a:avLst>
@@ -12292,297 +11113,6 @@
             </a:avLst>
           </a:prstGeom>
           <a:solidFill>
-            <a:srgbClr val="FAB219"/>
-          </a:solidFill>
-          <a:ln/>
-        </p:spPr>
-      </p:sp>
-      <p:sp>
-        <p:nvSpPr>
-          <p:cNvPr id="58" name="Shape 56"/>
-          <p:cNvSpPr/>
-          <p:nvPr/>
-        </p:nvSpPr>
-        <p:spPr>
-          <a:xfrm>
-            <a:off x="5065776" y="4704588"/>
-            <a:ext cx="32004" cy="292608"/>
-          </a:xfrm>
-          <a:prstGeom prst="rect">
-            <a:avLst/>
-          </a:prstGeom>
-          <a:solidFill>
-            <a:srgbClr val="1B2A41"/>
-          </a:solidFill>
-          <a:ln/>
-        </p:spPr>
-      </p:sp>
-      <p:sp>
-        <p:nvSpPr>
-          <p:cNvPr id="59" name="Text 57"/>
-          <p:cNvSpPr txBox="1"/>
-          <p:nvPr/>
-        </p:nvSpPr>
-        <p:spPr>
-          <a:xfrm>
-            <a:off x="6739128" y="4498848"/>
-            <a:ext cx="1325880" cy="201168"/>
-          </a:xfrm>
-          <a:prstGeom prst="rect">
-            <a:avLst/>
-          </a:prstGeom>
-          <a:noFill/>
-          <a:ln/>
-        </p:spPr>
-        <p:txBody>
-          <a:bodyPr wrap="square" lIns="0" tIns="0" rIns="0" bIns="0" rtlCol="0" anchor="ctr"/>
-          <a:lstStyle/>
-          <a:p>
-            <a:pPr indent="0" marL="0">
-              <a:buNone/>
-            </a:pPr>
-            <a:r>
-              <a:rPr lang="en-US" sz="800" b="1" spc="110" kern="0" dirty="0">
-                <a:solidFill>
-                  <a:srgbClr val="898781"/>
-                </a:solidFill>
-                <a:latin typeface="Calibri" pitchFamily="34" charset="0"/>
-                <a:ea typeface="Calibri" pitchFamily="34" charset="-122"/>
-                <a:cs typeface="Calibri" pitchFamily="34" charset="-120"/>
-              </a:rPr>
-              <a:t>DUE</a:t>
-            </a:r>
-            <a:endParaRPr lang="en-US" sz="800" dirty="0"/>
-          </a:p>
-        </p:txBody>
-      </p:sp>
-      <p:sp>
-        <p:nvSpPr>
-          <p:cNvPr id="60" name="Text 58"/>
-          <p:cNvSpPr txBox="1"/>
-          <p:nvPr/>
-        </p:nvSpPr>
-        <p:spPr>
-          <a:xfrm>
-            <a:off x="6739128" y="4709160"/>
-            <a:ext cx="1325880" cy="256032"/>
-          </a:xfrm>
-          <a:prstGeom prst="rect">
-            <a:avLst/>
-          </a:prstGeom>
-          <a:noFill/>
-          <a:ln/>
-        </p:spPr>
-        <p:txBody>
-          <a:bodyPr wrap="square" lIns="0" tIns="0" rIns="0" bIns="0" rtlCol="0" anchor="ctr"/>
-          <a:lstStyle/>
-          <a:p>
-            <a:pPr indent="0" marL="0">
-              <a:buNone/>
-            </a:pPr>
-            <a:r>
-              <a:rPr lang="en-US" sz="1100" b="1" dirty="0">
-                <a:solidFill>
-                  <a:srgbClr val="1B2A41"/>
-                </a:solidFill>
-                <a:latin typeface="Calibri" pitchFamily="34" charset="0"/>
-                <a:ea typeface="Calibri" pitchFamily="34" charset="-122"/>
-                <a:cs typeface="Calibri" pitchFamily="34" charset="-120"/>
-              </a:rPr>
-              <a:t>30 Sep 2026</a:t>
-            </a:r>
-            <a:endParaRPr lang="en-US" sz="1100" dirty="0"/>
-          </a:p>
-        </p:txBody>
-      </p:sp>
-      <p:sp>
-        <p:nvSpPr>
-          <p:cNvPr id="61" name="Text 59"/>
-          <p:cNvSpPr txBox="1"/>
-          <p:nvPr/>
-        </p:nvSpPr>
-        <p:spPr>
-          <a:xfrm>
-            <a:off x="8266176" y="4498848"/>
-            <a:ext cx="1691640" cy="201168"/>
-          </a:xfrm>
-          <a:prstGeom prst="rect">
-            <a:avLst/>
-          </a:prstGeom>
-          <a:noFill/>
-          <a:ln/>
-        </p:spPr>
-        <p:txBody>
-          <a:bodyPr wrap="square" lIns="0" tIns="0" rIns="0" bIns="0" rtlCol="0" anchor="ctr"/>
-          <a:lstStyle/>
-          <a:p>
-            <a:pPr indent="0" marL="0">
-              <a:buNone/>
-            </a:pPr>
-            <a:r>
-              <a:rPr lang="en-US" sz="800" b="1" spc="110" kern="0" dirty="0">
-                <a:solidFill>
-                  <a:srgbClr val="898781"/>
-                </a:solidFill>
-                <a:latin typeface="Calibri" pitchFamily="34" charset="0"/>
-                <a:ea typeface="Calibri" pitchFamily="34" charset="-122"/>
-                <a:cs typeface="Calibri" pitchFamily="34" charset="-120"/>
-              </a:rPr>
-              <a:t>OWNER</a:t>
-            </a:r>
-            <a:endParaRPr lang="en-US" sz="800" dirty="0"/>
-          </a:p>
-        </p:txBody>
-      </p:sp>
-      <p:sp>
-        <p:nvSpPr>
-          <p:cNvPr id="62" name="Text 60"/>
-          <p:cNvSpPr txBox="1"/>
-          <p:nvPr/>
-        </p:nvSpPr>
-        <p:spPr>
-          <a:xfrm>
-            <a:off x="8266176" y="4709160"/>
-            <a:ext cx="1691640" cy="256032"/>
-          </a:xfrm>
-          <a:prstGeom prst="rect">
-            <a:avLst/>
-          </a:prstGeom>
-          <a:noFill/>
-          <a:ln/>
-        </p:spPr>
-        <p:txBody>
-          <a:bodyPr wrap="square" lIns="0" tIns="0" rIns="0" bIns="0" rtlCol="0" anchor="ctr"/>
-          <a:lstStyle/>
-          <a:p>
-            <a:pPr indent="0" marL="0">
-              <a:buNone/>
-            </a:pPr>
-            <a:r>
-              <a:rPr lang="en-US" sz="1000" dirty="0">
-                <a:solidFill>
-                  <a:srgbClr val="52514E"/>
-                </a:solidFill>
-                <a:latin typeface="Calibri" pitchFamily="34" charset="0"/>
-                <a:ea typeface="Calibri" pitchFamily="34" charset="-122"/>
-                <a:cs typeface="Calibri" pitchFamily="34" charset="-120"/>
-              </a:rPr>
-              <a:t>Obed, Sedem, Gilbert</a:t>
-            </a:r>
-            <a:endParaRPr lang="en-US" sz="1000" dirty="0"/>
-          </a:p>
-        </p:txBody>
-      </p:sp>
-      <p:sp>
-        <p:nvSpPr>
-          <p:cNvPr id="63" name="Shape 61"/>
-          <p:cNvSpPr/>
-          <p:nvPr/>
-        </p:nvSpPr>
-        <p:spPr>
-          <a:xfrm>
-            <a:off x="10186416" y="4590288"/>
-            <a:ext cx="1170432" cy="310896"/>
-          </a:xfrm>
-          <a:prstGeom prst="roundRect">
-            <a:avLst>
-              <a:gd name="adj" fmla="val 50000"/>
-            </a:avLst>
-          </a:prstGeom>
-          <a:solidFill>
-            <a:srgbClr val="FAB219"/>
-          </a:solidFill>
-          <a:ln/>
-        </p:spPr>
-      </p:sp>
-      <p:sp>
-        <p:nvSpPr>
-          <p:cNvPr id="64" name="Text 62"/>
-          <p:cNvSpPr txBox="1"/>
-          <p:nvPr/>
-        </p:nvSpPr>
-        <p:spPr>
-          <a:xfrm>
-            <a:off x="10186416" y="4590288"/>
-            <a:ext cx="1170432" cy="310896"/>
-          </a:xfrm>
-          <a:prstGeom prst="rect">
-            <a:avLst/>
-          </a:prstGeom>
-          <a:noFill/>
-          <a:ln/>
-        </p:spPr>
-        <p:txBody>
-          <a:bodyPr wrap="square" lIns="0" tIns="0" rIns="0" bIns="0" rtlCol="0" anchor="ctr"/>
-          <a:lstStyle/>
-          <a:p>
-            <a:pPr algn="ctr" indent="0" marL="0">
-              <a:buNone/>
-            </a:pPr>
-            <a:r>
-              <a:rPr lang="en-US" sz="900" b="1" spc="40" kern="0" dirty="0">
-                <a:solidFill>
-                  <a:srgbClr val="1B2A41"/>
-                </a:solidFill>
-                <a:latin typeface="Calibri" pitchFamily="34" charset="0"/>
-                <a:ea typeface="Calibri" pitchFamily="34" charset="-122"/>
-                <a:cs typeface="Calibri" pitchFamily="34" charset="-120"/>
-              </a:rPr>
-              <a:t>BLOCKED</a:t>
-            </a:r>
-            <a:endParaRPr lang="en-US" sz="900" dirty="0"/>
-          </a:p>
-        </p:txBody>
-      </p:sp>
-      <p:sp>
-        <p:nvSpPr>
-          <p:cNvPr id="65" name="Shape 63"/>
-          <p:cNvSpPr/>
-          <p:nvPr/>
-        </p:nvSpPr>
-        <p:spPr>
-          <a:xfrm>
-            <a:off x="566928" y="5248656"/>
-            <a:ext cx="11057839" cy="768096"/>
-          </a:xfrm>
-          <a:prstGeom prst="roundRect">
-            <a:avLst>
-              <a:gd name="adj" fmla="val 11905"/>
-            </a:avLst>
-          </a:prstGeom>
-          <a:solidFill>
-            <a:srgbClr val="FFFFFF"/>
-          </a:solidFill>
-          <a:ln w="12700">
-            <a:solidFill>
-              <a:srgbClr val="E1E0D9"/>
-            </a:solidFill>
-            <a:prstDash val="solid"/>
-          </a:ln>
-          <a:effectLst>
-            <a:outerShdw sx="100000" sy="100000" kx="0" ky="0" algn="bl" rotWithShape="0" blurRad="152400" dist="25400" dir="5400000">
-              <a:srgbClr val="1B2A41">
-                <a:alpha val="10000"/>
-              </a:srgbClr>
-            </a:outerShdw>
-          </a:effectLst>
-        </p:spPr>
-      </p:sp>
-      <p:sp>
-        <p:nvSpPr>
-          <p:cNvPr id="66" name="Shape 64"/>
-          <p:cNvSpPr/>
-          <p:nvPr/>
-        </p:nvSpPr>
-        <p:spPr>
-          <a:xfrm>
-            <a:off x="731520" y="5522976"/>
-            <a:ext cx="219456" cy="219456"/>
-          </a:xfrm>
-          <a:prstGeom prst="ellipse">
-            <a:avLst/>
-          </a:prstGeom>
-          <a:solidFill>
             <a:srgbClr val="898781"/>
           </a:solidFill>
           <a:ln/>
@@ -12590,371 +11120,15 @@
       </p:sp>
       <p:sp>
         <p:nvSpPr>
-          <p:cNvPr id="67" name="Text 65"/>
-          <p:cNvSpPr txBox="1"/>
-          <p:nvPr/>
-        </p:nvSpPr>
-        <p:spPr>
-          <a:xfrm>
-            <a:off x="1097280" y="5367528"/>
-            <a:ext cx="2560320" cy="237744"/>
-          </a:xfrm>
-          <a:prstGeom prst="rect">
-            <a:avLst/>
-          </a:prstGeom>
-          <a:noFill/>
-          <a:ln/>
-        </p:spPr>
-        <p:txBody>
-          <a:bodyPr wrap="square" lIns="0" tIns="0" rIns="0" bIns="0" rtlCol="0" anchor="ctr"/>
-          <a:lstStyle/>
-          <a:p>
-            <a:pPr indent="0" marL="0">
-              <a:buNone/>
-            </a:pPr>
-            <a:r>
-              <a:rPr lang="en-US" sz="1150" b="1" dirty="0">
-                <a:solidFill>
-                  <a:srgbClr val="1B2A41"/>
-                </a:solidFill>
-                <a:latin typeface="Calibri" pitchFamily="34" charset="0"/>
-                <a:ea typeface="Calibri" pitchFamily="34" charset="-122"/>
-                <a:cs typeface="Calibri" pitchFamily="34" charset="-120"/>
-              </a:rPr>
-              <a:t>Priority Insurance</a:t>
-            </a:r>
-            <a:endParaRPr lang="en-US" sz="1150" dirty="0"/>
-          </a:p>
-        </p:txBody>
-      </p:sp>
-      <p:sp>
-        <p:nvSpPr>
-          <p:cNvPr id="68" name="Text 66"/>
-          <p:cNvSpPr txBox="1"/>
-          <p:nvPr/>
-        </p:nvSpPr>
-        <p:spPr>
-          <a:xfrm>
-            <a:off x="1097280" y="5614416"/>
-            <a:ext cx="2560320" cy="237744"/>
-          </a:xfrm>
-          <a:prstGeom prst="rect">
-            <a:avLst/>
-          </a:prstGeom>
-          <a:noFill/>
-          <a:ln/>
-        </p:spPr>
-        <p:txBody>
-          <a:bodyPr wrap="square" lIns="0" tIns="0" rIns="0" bIns="0" rtlCol="0" anchor="ctr"/>
-          <a:lstStyle/>
-          <a:p>
-            <a:pPr indent="0" marL="0">
-              <a:buNone/>
-            </a:pPr>
-            <a:r>
-              <a:rPr lang="en-US" sz="1000" dirty="0">
-                <a:solidFill>
-                  <a:srgbClr val="52514E"/>
-                </a:solidFill>
-                <a:latin typeface="Calibri" pitchFamily="34" charset="0"/>
-                <a:ea typeface="Calibri" pitchFamily="34" charset="-122"/>
-                <a:cs typeface="Calibri" pitchFamily="34" charset="-120"/>
-              </a:rPr>
-              <a:t>Complete Budget</a:t>
-            </a:r>
-            <a:endParaRPr lang="en-US" sz="1000" dirty="0"/>
-          </a:p>
-        </p:txBody>
-      </p:sp>
-      <p:sp>
-        <p:nvSpPr>
-          <p:cNvPr id="69" name="Text 67"/>
-          <p:cNvSpPr txBox="1"/>
-          <p:nvPr/>
-        </p:nvSpPr>
-        <p:spPr>
-          <a:xfrm>
-            <a:off x="3877056" y="5358384"/>
-            <a:ext cx="1097280" cy="219456"/>
-          </a:xfrm>
-          <a:prstGeom prst="rect">
-            <a:avLst/>
-          </a:prstGeom>
-          <a:noFill/>
-          <a:ln/>
-        </p:spPr>
-        <p:txBody>
-          <a:bodyPr wrap="square" lIns="0" tIns="0" rIns="0" bIns="0" rtlCol="0" anchor="ctr"/>
-          <a:lstStyle/>
-          <a:p>
-            <a:pPr indent="0" marL="0">
-              <a:buNone/>
-            </a:pPr>
-            <a:r>
-              <a:rPr lang="en-US" sz="950" b="1" dirty="0">
-                <a:solidFill>
-                  <a:srgbClr val="1B2A41"/>
-                </a:solidFill>
-                <a:latin typeface="Calibri" pitchFamily="34" charset="0"/>
-                <a:ea typeface="Calibri" pitchFamily="34" charset="-122"/>
-                <a:cs typeface="Calibri" pitchFamily="34" charset="-120"/>
-              </a:rPr>
-              <a:t>Actual 0%</a:t>
-            </a:r>
-            <a:endParaRPr lang="en-US" sz="950" dirty="0"/>
-          </a:p>
-        </p:txBody>
-      </p:sp>
-      <p:sp>
-        <p:nvSpPr>
-          <p:cNvPr id="70" name="Text 68"/>
-          <p:cNvSpPr txBox="1"/>
-          <p:nvPr/>
-        </p:nvSpPr>
-        <p:spPr>
-          <a:xfrm>
-            <a:off x="4974336" y="5358384"/>
-            <a:ext cx="1280160" cy="219456"/>
-          </a:xfrm>
-          <a:prstGeom prst="rect">
-            <a:avLst/>
-          </a:prstGeom>
-          <a:noFill/>
-          <a:ln/>
-        </p:spPr>
-        <p:txBody>
-          <a:bodyPr wrap="square" lIns="0" tIns="0" rIns="0" bIns="0" rtlCol="0" anchor="ctr"/>
-          <a:lstStyle/>
-          <a:p>
-            <a:pPr algn="r" indent="0" marL="0">
-              <a:buNone/>
-            </a:pPr>
-            <a:r>
-              <a:rPr lang="en-US" sz="950" dirty="0">
-                <a:solidFill>
-                  <a:srgbClr val="898781"/>
-                </a:solidFill>
-                <a:latin typeface="Calibri" pitchFamily="34" charset="0"/>
-                <a:ea typeface="Calibri" pitchFamily="34" charset="-122"/>
-                <a:cs typeface="Calibri" pitchFamily="34" charset="-120"/>
-              </a:rPr>
-              <a:t>Planned 0%</a:t>
-            </a:r>
-            <a:endParaRPr lang="en-US" sz="950" dirty="0"/>
-          </a:p>
-        </p:txBody>
-      </p:sp>
-      <p:sp>
-        <p:nvSpPr>
-          <p:cNvPr id="71" name="Shape 69"/>
-          <p:cNvSpPr/>
-          <p:nvPr/>
-        </p:nvSpPr>
-        <p:spPr>
-          <a:xfrm>
-            <a:off x="3877056" y="5660136"/>
-            <a:ext cx="2377440" cy="155448"/>
-          </a:xfrm>
-          <a:prstGeom prst="roundRect">
-            <a:avLst>
-              <a:gd name="adj" fmla="val 50000"/>
-            </a:avLst>
-          </a:prstGeom>
-          <a:solidFill>
-            <a:srgbClr val="E3E9F0"/>
-          </a:solidFill>
-          <a:ln/>
-        </p:spPr>
-      </p:sp>
-      <p:sp>
-        <p:nvSpPr>
-          <p:cNvPr id="72" name="Text 70"/>
-          <p:cNvSpPr txBox="1"/>
-          <p:nvPr/>
-        </p:nvSpPr>
-        <p:spPr>
-          <a:xfrm>
-            <a:off x="6739128" y="5385816"/>
-            <a:ext cx="1325880" cy="201168"/>
-          </a:xfrm>
-          <a:prstGeom prst="rect">
-            <a:avLst/>
-          </a:prstGeom>
-          <a:noFill/>
-          <a:ln/>
-        </p:spPr>
-        <p:txBody>
-          <a:bodyPr wrap="square" lIns="0" tIns="0" rIns="0" bIns="0" rtlCol="0" anchor="ctr"/>
-          <a:lstStyle/>
-          <a:p>
-            <a:pPr indent="0" marL="0">
-              <a:buNone/>
-            </a:pPr>
-            <a:r>
-              <a:rPr lang="en-US" sz="800" b="1" spc="110" kern="0" dirty="0">
-                <a:solidFill>
-                  <a:srgbClr val="898781"/>
-                </a:solidFill>
-                <a:latin typeface="Calibri" pitchFamily="34" charset="0"/>
-                <a:ea typeface="Calibri" pitchFamily="34" charset="-122"/>
-                <a:cs typeface="Calibri" pitchFamily="34" charset="-120"/>
-              </a:rPr>
-              <a:t>DUE</a:t>
-            </a:r>
-            <a:endParaRPr lang="en-US" sz="800" dirty="0"/>
-          </a:p>
-        </p:txBody>
-      </p:sp>
-      <p:sp>
-        <p:nvSpPr>
-          <p:cNvPr id="73" name="Text 71"/>
-          <p:cNvSpPr txBox="1"/>
-          <p:nvPr/>
-        </p:nvSpPr>
-        <p:spPr>
-          <a:xfrm>
-            <a:off x="6739128" y="5596128"/>
-            <a:ext cx="1325880" cy="256032"/>
-          </a:xfrm>
-          <a:prstGeom prst="rect">
-            <a:avLst/>
-          </a:prstGeom>
-          <a:noFill/>
-          <a:ln/>
-        </p:spPr>
-        <p:txBody>
-          <a:bodyPr wrap="square" lIns="0" tIns="0" rIns="0" bIns="0" rtlCol="0" anchor="ctr"/>
-          <a:lstStyle/>
-          <a:p>
-            <a:pPr indent="0" marL="0">
-              <a:buNone/>
-            </a:pPr>
-            <a:r>
-              <a:rPr lang="en-US" sz="1100" b="1" dirty="0">
-                <a:solidFill>
-                  <a:srgbClr val="1B2A41"/>
-                </a:solidFill>
-                <a:latin typeface="Calibri" pitchFamily="34" charset="0"/>
-                <a:ea typeface="Calibri" pitchFamily="34" charset="-122"/>
-                <a:cs typeface="Calibri" pitchFamily="34" charset="-120"/>
-              </a:rPr>
-              <a:t>09 Oct 2026</a:t>
-            </a:r>
-            <a:endParaRPr lang="en-US" sz="1100" dirty="0"/>
-          </a:p>
-        </p:txBody>
-      </p:sp>
-      <p:sp>
-        <p:nvSpPr>
-          <p:cNvPr id="74" name="Text 72"/>
-          <p:cNvSpPr txBox="1"/>
-          <p:nvPr/>
-        </p:nvSpPr>
-        <p:spPr>
-          <a:xfrm>
-            <a:off x="8266176" y="5385816"/>
-            <a:ext cx="1691640" cy="201168"/>
-          </a:xfrm>
-          <a:prstGeom prst="rect">
-            <a:avLst/>
-          </a:prstGeom>
-          <a:noFill/>
-          <a:ln/>
-        </p:spPr>
-        <p:txBody>
-          <a:bodyPr wrap="square" lIns="0" tIns="0" rIns="0" bIns="0" rtlCol="0" anchor="ctr"/>
-          <a:lstStyle/>
-          <a:p>
-            <a:pPr indent="0" marL="0">
-              <a:buNone/>
-            </a:pPr>
-            <a:r>
-              <a:rPr lang="en-US" sz="800" b="1" spc="110" kern="0" dirty="0">
-                <a:solidFill>
-                  <a:srgbClr val="898781"/>
-                </a:solidFill>
-                <a:latin typeface="Calibri" pitchFamily="34" charset="0"/>
-                <a:ea typeface="Calibri" pitchFamily="34" charset="-122"/>
-                <a:cs typeface="Calibri" pitchFamily="34" charset="-120"/>
-              </a:rPr>
-              <a:t>OWNER</a:t>
-            </a:r>
-            <a:endParaRPr lang="en-US" sz="800" dirty="0"/>
-          </a:p>
-        </p:txBody>
-      </p:sp>
-      <p:sp>
-        <p:nvSpPr>
-          <p:cNvPr id="75" name="Text 73"/>
-          <p:cNvSpPr txBox="1"/>
-          <p:nvPr/>
-        </p:nvSpPr>
-        <p:spPr>
-          <a:xfrm>
-            <a:off x="8266176" y="5596128"/>
-            <a:ext cx="1691640" cy="256032"/>
-          </a:xfrm>
-          <a:prstGeom prst="rect">
-            <a:avLst/>
-          </a:prstGeom>
-          <a:noFill/>
-          <a:ln/>
-        </p:spPr>
-        <p:txBody>
-          <a:bodyPr wrap="square" lIns="0" tIns="0" rIns="0" bIns="0" rtlCol="0" anchor="ctr"/>
-          <a:lstStyle/>
-          <a:p>
-            <a:pPr indent="0" marL="0">
-              <a:buNone/>
-            </a:pPr>
-            <a:r>
-              <a:rPr lang="en-US" sz="1000" dirty="0">
-                <a:solidFill>
-                  <a:srgbClr val="52514E"/>
-                </a:solidFill>
-                <a:latin typeface="Calibri" pitchFamily="34" charset="0"/>
-                <a:ea typeface="Calibri" pitchFamily="34" charset="-122"/>
-                <a:cs typeface="Calibri" pitchFamily="34" charset="-120"/>
-              </a:rPr>
-              <a:t>Obed, Sedem, Gilbert</a:t>
-            </a:r>
-            <a:endParaRPr lang="en-US" sz="1000" dirty="0"/>
-          </a:p>
-        </p:txBody>
-      </p:sp>
-      <p:sp>
-        <p:nvSpPr>
-          <p:cNvPr id="76" name="Shape 74"/>
-          <p:cNvSpPr/>
-          <p:nvPr/>
-        </p:nvSpPr>
-        <p:spPr>
-          <a:xfrm>
-            <a:off x="10186416" y="5477256"/>
+          <p:cNvPr id="62" name="Text 60"/>
+          <p:cNvSpPr txBox="1"/>
+          <p:nvPr/>
+        </p:nvSpPr>
+        <p:spPr>
+          <a:xfrm>
+            <a:off x="10186416" y="5394960"/>
             <a:ext cx="1170432" cy="310896"/>
           </a:xfrm>
-          <a:prstGeom prst="roundRect">
-            <a:avLst>
-              <a:gd name="adj" fmla="val 50000"/>
-            </a:avLst>
-          </a:prstGeom>
-          <a:solidFill>
-            <a:srgbClr val="898781"/>
-          </a:solidFill>
-          <a:ln/>
-        </p:spPr>
-      </p:sp>
-      <p:sp>
-        <p:nvSpPr>
-          <p:cNvPr id="77" name="Text 75"/>
-          <p:cNvSpPr txBox="1"/>
-          <p:nvPr/>
-        </p:nvSpPr>
-        <p:spPr>
-          <a:xfrm>
-            <a:off x="10186416" y="5477256"/>
-            <a:ext cx="1170432" cy="310896"/>
-          </a:xfrm>
           <a:prstGeom prst="rect">
             <a:avLst/>
           </a:prstGeom>
@@ -12985,7 +11159,7 @@
       </p:sp>
       <p:sp>
         <p:nvSpPr>
-          <p:cNvPr id="78" name="Text 76"/>
+          <p:cNvPr id="63" name="Text 61"/>
           <p:cNvSpPr txBox="1"/>
           <p:nvPr/>
         </p:nvSpPr>
@@ -13024,7 +11198,7 @@
       </p:sp>
       <p:sp>
         <p:nvSpPr>
-          <p:cNvPr id="79" name="Text 77"/>
+          <p:cNvPr id="64" name="Text 62"/>
           <p:cNvSpPr txBox="1"/>
           <p:nvPr/>
         </p:nvSpPr>
@@ -13197,7 +11371,7 @@
                 <a:ea typeface="Calibri" pitchFamily="34" charset="-122"/>
                 <a:cs typeface="Calibri" pitchFamily="34" charset="-120"/>
               </a:rPr>
-              <a:t>Every outstanding deliverable lands between today and 9 October.</a:t>
+              <a:t>With Ecole closed, the remaining work falls due between 24 September and 9 October.</a:t>
             </a:r>
             <a:endParaRPr lang="en-US" sz="1250" dirty="0"/>
           </a:p>
@@ -13231,12 +11405,115 @@
         </p:nvSpPr>
         <p:spPr>
           <a:xfrm>
-            <a:off x="722376" y="2322576"/>
-            <a:ext cx="2121408" cy="914400"/>
+            <a:off x="1691640" y="3438144"/>
+            <a:ext cx="182880" cy="182880"/>
+          </a:xfrm>
+          <a:prstGeom prst="ellipse">
+            <a:avLst/>
+          </a:prstGeom>
+          <a:solidFill>
+            <a:srgbClr val="898781"/>
+          </a:solidFill>
+          <a:ln w="31750">
+            <a:solidFill>
+              <a:srgbClr val="FFFFFF"/>
+            </a:solidFill>
+            <a:prstDash val="solid"/>
+          </a:ln>
+        </p:spPr>
+      </p:sp>
+      <p:sp>
+        <p:nvSpPr>
+          <p:cNvPr id="7" name="Text 5"/>
+          <p:cNvSpPr txBox="1"/>
+          <p:nvPr/>
+        </p:nvSpPr>
+        <p:spPr>
+          <a:xfrm>
+            <a:off x="685800" y="3767328"/>
+            <a:ext cx="2194560" cy="292608"/>
+          </a:xfrm>
+          <a:prstGeom prst="rect">
+            <a:avLst/>
+          </a:prstGeom>
+          <a:noFill/>
+          <a:ln/>
+        </p:spPr>
+        <p:txBody>
+          <a:bodyPr wrap="square" lIns="0" tIns="0" rIns="0" bIns="0" rtlCol="0" anchor="ctr"/>
+          <a:lstStyle/>
+          <a:p>
+            <a:pPr algn="ctr" indent="0" marL="0">
+              <a:buNone/>
+            </a:pPr>
+            <a:r>
+              <a:rPr lang="en-US" sz="1500" b="1" dirty="0">
+                <a:solidFill>
+                  <a:srgbClr val="898781"/>
+                </a:solidFill>
+                <a:latin typeface="Cambria" pitchFamily="34" charset="0"/>
+                <a:ea typeface="Cambria" pitchFamily="34" charset="-122"/>
+                <a:cs typeface="Cambria" pitchFamily="34" charset="-120"/>
+              </a:rPr>
+              <a:t>18 Sep</a:t>
+            </a:r>
+            <a:endParaRPr lang="en-US" sz="1500" dirty="0"/>
+          </a:p>
+        </p:txBody>
+      </p:sp>
+      <p:sp>
+        <p:nvSpPr>
+          <p:cNvPr id="8" name="Text 6"/>
+          <p:cNvSpPr txBox="1"/>
+          <p:nvPr/>
+        </p:nvSpPr>
+        <p:spPr>
+          <a:xfrm>
+            <a:off x="685800" y="4059936"/>
+            <a:ext cx="2194560" cy="237744"/>
+          </a:xfrm>
+          <a:prstGeom prst="rect">
+            <a:avLst/>
+          </a:prstGeom>
+          <a:noFill/>
+          <a:ln/>
+        </p:spPr>
+        <p:txBody>
+          <a:bodyPr wrap="square" lIns="0" tIns="0" rIns="0" bIns="0" rtlCol="0" anchor="ctr"/>
+          <a:lstStyle/>
+          <a:p>
+            <a:pPr algn="ctr" indent="0" marL="0">
+              <a:buNone/>
+            </a:pPr>
+            <a:r>
+              <a:rPr lang="en-US" sz="1000" dirty="0">
+                <a:solidFill>
+                  <a:srgbClr val="898781"/>
+                </a:solidFill>
+                <a:latin typeface="Calibri" pitchFamily="34" charset="0"/>
+                <a:ea typeface="Calibri" pitchFamily="34" charset="-122"/>
+                <a:cs typeface="Calibri" pitchFamily="34" charset="-120"/>
+              </a:rPr>
+              <a:t>Today</a:t>
+            </a:r>
+            <a:endParaRPr lang="en-US" sz="1000" dirty="0"/>
+          </a:p>
+        </p:txBody>
+      </p:sp>
+      <p:sp>
+        <p:nvSpPr>
+          <p:cNvPr id="9" name="Shape 7"/>
+          <p:cNvSpPr/>
+          <p:nvPr/>
+        </p:nvSpPr>
+        <p:spPr>
+          <a:xfrm>
+            <a:off x="3165130" y="1719072"/>
+            <a:ext cx="2121408" cy="1517904"/>
           </a:xfrm>
           <a:prstGeom prst="roundRect">
             <a:avLst>
-              <a:gd name="adj" fmla="val 10000"/>
+              <a:gd name="adj" fmla="val 6024"/>
             </a:avLst>
           </a:prstGeom>
           <a:solidFill>
@@ -13259,13 +11536,13 @@
       </p:sp>
       <p:sp>
         <p:nvSpPr>
-          <p:cNvPr id="7" name="Text 5"/>
-          <p:cNvSpPr txBox="1"/>
-          <p:nvPr/>
-        </p:nvSpPr>
-        <p:spPr>
-          <a:xfrm>
-            <a:off x="905256" y="2468880"/>
+          <p:cNvPr id="10" name="Text 8"/>
+          <p:cNvSpPr txBox="1"/>
+          <p:nvPr/>
+        </p:nvSpPr>
+        <p:spPr>
+          <a:xfrm>
+            <a:off x="3348010" y="1865376"/>
             <a:ext cx="1755648" cy="219456"/>
           </a:xfrm>
           <a:prstGeom prst="rect">
@@ -13290,7 +11567,7 @@
                 <a:ea typeface="Calibri" pitchFamily="34" charset="-122"/>
                 <a:cs typeface="Calibri" pitchFamily="34" charset="-120"/>
               </a:rPr>
-              <a:t>Ecole Int'l School</a:t>
+              <a:t>Kinbu Canteen Tender</a:t>
             </a:r>
             <a:endParaRPr lang="en-US" sz="1050" dirty="0"/>
           </a:p>
@@ -13298,13 +11575,13 @@
       </p:sp>
       <p:sp>
         <p:nvSpPr>
-          <p:cNvPr id="8" name="Text 6"/>
-          <p:cNvSpPr txBox="1"/>
-          <p:nvPr/>
-        </p:nvSpPr>
-        <p:spPr>
-          <a:xfrm>
-            <a:off x="905256" y="2679192"/>
+          <p:cNvPr id="11" name="Text 9"/>
+          <p:cNvSpPr txBox="1"/>
+          <p:nvPr/>
+        </p:nvSpPr>
+        <p:spPr>
+          <a:xfrm>
+            <a:off x="3348010" y="2075688"/>
             <a:ext cx="1755648" cy="201168"/>
           </a:xfrm>
           <a:prstGeom prst="rect">
@@ -13329,7 +11606,7 @@
                 <a:ea typeface="Calibri" pitchFamily="34" charset="-122"/>
                 <a:cs typeface="Calibri" pitchFamily="34" charset="-120"/>
               </a:rPr>
-              <a:t>BoQ and Budget</a:t>
+              <a:t>Priced BoQ</a:t>
             </a:r>
             <a:endParaRPr lang="en-US" sz="950" dirty="0"/>
           </a:p>
@@ -13337,13 +11614,13 @@
       </p:sp>
       <p:sp>
         <p:nvSpPr>
-          <p:cNvPr id="9" name="Text 7"/>
-          <p:cNvSpPr txBox="1"/>
-          <p:nvPr/>
-        </p:nvSpPr>
-        <p:spPr>
-          <a:xfrm>
-            <a:off x="905256" y="2871216"/>
+          <p:cNvPr id="12" name="Text 10"/>
+          <p:cNvSpPr txBox="1"/>
+          <p:nvPr/>
+        </p:nvSpPr>
+        <p:spPr>
+          <a:xfrm>
+            <a:off x="3348010" y="2267712"/>
             <a:ext cx="1755648" cy="182880"/>
           </a:xfrm>
           <a:prstGeom prst="rect">
@@ -13368,6 +11645,123 @@
                 <a:ea typeface="Calibri" pitchFamily="34" charset="-122"/>
                 <a:cs typeface="Calibri" pitchFamily="34" charset="-120"/>
               </a:rPr>
+              <a:t>10% complete</a:t>
+            </a:r>
+            <a:endParaRPr lang="en-US" sz="850" dirty="0"/>
+          </a:p>
+        </p:txBody>
+      </p:sp>
+      <p:sp>
+        <p:nvSpPr>
+          <p:cNvPr id="13" name="Text 11"/>
+          <p:cNvSpPr txBox="1"/>
+          <p:nvPr/>
+        </p:nvSpPr>
+        <p:spPr>
+          <a:xfrm>
+            <a:off x="3348010" y="2468880"/>
+            <a:ext cx="1755648" cy="219456"/>
+          </a:xfrm>
+          <a:prstGeom prst="rect">
+            <a:avLst/>
+          </a:prstGeom>
+          <a:noFill/>
+          <a:ln/>
+        </p:spPr>
+        <p:txBody>
+          <a:bodyPr wrap="square" lIns="0" tIns="0" rIns="0" bIns="0" rtlCol="0" anchor="ctr"/>
+          <a:lstStyle/>
+          <a:p>
+            <a:pPr indent="0" marL="0">
+              <a:buNone/>
+            </a:pPr>
+            <a:r>
+              <a:rPr lang="en-US" sz="1050" b="1" dirty="0">
+                <a:solidFill>
+                  <a:srgbClr val="1B2A41"/>
+                </a:solidFill>
+                <a:latin typeface="Calibri" pitchFamily="34" charset="0"/>
+                <a:ea typeface="Calibri" pitchFamily="34" charset="-122"/>
+                <a:cs typeface="Calibri" pitchFamily="34" charset="-120"/>
+              </a:rPr>
+              <a:t>Stanbic Bank</a:t>
+            </a:r>
+            <a:endParaRPr lang="en-US" sz="1050" dirty="0"/>
+          </a:p>
+        </p:txBody>
+      </p:sp>
+      <p:sp>
+        <p:nvSpPr>
+          <p:cNvPr id="14" name="Text 12"/>
+          <p:cNvSpPr txBox="1"/>
+          <p:nvPr/>
+        </p:nvSpPr>
+        <p:spPr>
+          <a:xfrm>
+            <a:off x="3348010" y="2679192"/>
+            <a:ext cx="1755648" cy="201168"/>
+          </a:xfrm>
+          <a:prstGeom prst="rect">
+            <a:avLst/>
+          </a:prstGeom>
+          <a:noFill/>
+          <a:ln/>
+        </p:spPr>
+        <p:txBody>
+          <a:bodyPr wrap="square" lIns="0" tIns="0" rIns="0" bIns="0" rtlCol="0" anchor="ctr"/>
+          <a:lstStyle/>
+          <a:p>
+            <a:pPr indent="0" marL="0">
+              <a:buNone/>
+            </a:pPr>
+            <a:r>
+              <a:rPr lang="en-US" sz="950" dirty="0">
+                <a:solidFill>
+                  <a:srgbClr val="52514E"/>
+                </a:solidFill>
+                <a:latin typeface="Calibri" pitchFamily="34" charset="0"/>
+                <a:ea typeface="Calibri" pitchFamily="34" charset="-122"/>
+                <a:cs typeface="Calibri" pitchFamily="34" charset="-120"/>
+              </a:rPr>
+              <a:t>Preliminary Estimate</a:t>
+            </a:r>
+            <a:endParaRPr lang="en-US" sz="950" dirty="0"/>
+          </a:p>
+        </p:txBody>
+      </p:sp>
+      <p:sp>
+        <p:nvSpPr>
+          <p:cNvPr id="15" name="Text 13"/>
+          <p:cNvSpPr txBox="1"/>
+          <p:nvPr/>
+        </p:nvSpPr>
+        <p:spPr>
+          <a:xfrm>
+            <a:off x="3348010" y="2871216"/>
+            <a:ext cx="1755648" cy="182880"/>
+          </a:xfrm>
+          <a:prstGeom prst="rect">
+            <a:avLst/>
+          </a:prstGeom>
+          <a:noFill/>
+          <a:ln/>
+        </p:spPr>
+        <p:txBody>
+          <a:bodyPr wrap="square" lIns="0" tIns="0" rIns="0" bIns="0" rtlCol="0" anchor="ctr"/>
+          <a:lstStyle/>
+          <a:p>
+            <a:pPr indent="0" marL="0">
+              <a:buNone/>
+            </a:pPr>
+            <a:r>
+              <a:rPr lang="en-US" sz="850" b="1" dirty="0">
+                <a:solidFill>
+                  <a:srgbClr val="D03B3B"/>
+                </a:solidFill>
+                <a:latin typeface="Calibri" pitchFamily="34" charset="0"/>
+                <a:ea typeface="Calibri" pitchFamily="34" charset="-122"/>
+                <a:cs typeface="Calibri" pitchFamily="34" charset="-120"/>
+              </a:rPr>
               <a:t>50% complete</a:t>
             </a:r>
             <a:endParaRPr lang="en-US" sz="850" dirty="0"/>
@@ -13376,13 +11770,13 @@
       </p:sp>
       <p:sp>
         <p:nvSpPr>
-          <p:cNvPr id="10" name="Shape 8"/>
+          <p:cNvPr id="16" name="Shape 14"/>
           <p:cNvSpPr/>
           <p:nvPr/>
         </p:nvSpPr>
         <p:spPr>
           <a:xfrm>
-            <a:off x="1769364" y="3236976"/>
+            <a:off x="4212118" y="3236976"/>
             <a:ext cx="27432" cy="155448"/>
           </a:xfrm>
           <a:prstGeom prst="rect">
@@ -13396,13 +11790,13 @@
       </p:sp>
       <p:sp>
         <p:nvSpPr>
-          <p:cNvPr id="11" name="Shape 9"/>
+          <p:cNvPr id="17" name="Shape 15"/>
           <p:cNvSpPr/>
           <p:nvPr/>
         </p:nvSpPr>
         <p:spPr>
           <a:xfrm>
-            <a:off x="1645920" y="3392424"/>
+            <a:off x="4088674" y="3392424"/>
             <a:ext cx="274320" cy="274320"/>
           </a:xfrm>
           <a:prstGeom prst="ellipse">
@@ -13421,13 +11815,13 @@
       </p:sp>
       <p:sp>
         <p:nvSpPr>
-          <p:cNvPr id="12" name="Text 10"/>
-          <p:cNvSpPr txBox="1"/>
-          <p:nvPr/>
-        </p:nvSpPr>
-        <p:spPr>
-          <a:xfrm>
-            <a:off x="685800" y="3767328"/>
+          <p:cNvPr id="18" name="Text 16"/>
+          <p:cNvSpPr txBox="1"/>
+          <p:nvPr/>
+        </p:nvSpPr>
+        <p:spPr>
+          <a:xfrm>
+            <a:off x="3128554" y="3767328"/>
             <a:ext cx="2194560" cy="292608"/>
           </a:xfrm>
           <a:prstGeom prst="rect">
@@ -13452,7 +11846,7 @@
                 <a:ea typeface="Cambria" pitchFamily="34" charset="-122"/>
                 <a:cs typeface="Cambria" pitchFamily="34" charset="-120"/>
               </a:rPr>
-              <a:t>18 Sep</a:t>
+              <a:t>24 Sep</a:t>
             </a:r>
             <a:endParaRPr lang="en-US" sz="1500" dirty="0"/>
           </a:p>
@@ -13460,13 +11854,13 @@
       </p:sp>
       <p:sp>
         <p:nvSpPr>
-          <p:cNvPr id="13" name="Text 11"/>
-          <p:cNvSpPr txBox="1"/>
-          <p:nvPr/>
-        </p:nvSpPr>
-        <p:spPr>
-          <a:xfrm>
-            <a:off x="685800" y="4059936"/>
+          <p:cNvPr id="19" name="Text 17"/>
+          <p:cNvSpPr txBox="1"/>
+          <p:nvPr/>
+        </p:nvSpPr>
+        <p:spPr>
+          <a:xfrm>
+            <a:off x="3128554" y="4059936"/>
             <a:ext cx="2194560" cy="237744"/>
           </a:xfrm>
           <a:prstGeom prst="rect">
@@ -13491,7 +11885,7 @@
                 <a:ea typeface="Calibri" pitchFamily="34" charset="-122"/>
                 <a:cs typeface="Calibri" pitchFamily="34" charset="-120"/>
               </a:rPr>
-              <a:t>Today</a:t>
+              <a:t>In 6 days</a:t>
             </a:r>
             <a:endParaRPr lang="en-US" sz="1000" dirty="0"/>
           </a:p>
@@ -13499,18 +11893,18 @@
       </p:sp>
       <p:sp>
         <p:nvSpPr>
-          <p:cNvPr id="14" name="Shape 12"/>
+          <p:cNvPr id="20" name="Shape 18"/>
           <p:cNvSpPr/>
           <p:nvPr/>
         </p:nvSpPr>
         <p:spPr>
           <a:xfrm>
-            <a:off x="3165130" y="1719072"/>
-            <a:ext cx="2121408" cy="1517904"/>
+            <a:off x="5607885" y="2322576"/>
+            <a:ext cx="2121408" cy="914400"/>
           </a:xfrm>
           <a:prstGeom prst="roundRect">
             <a:avLst>
-              <a:gd name="adj" fmla="val 6024"/>
+              <a:gd name="adj" fmla="val 10000"/>
             </a:avLst>
           </a:prstGeom>
           <a:solidFill>
@@ -13533,13 +11927,13 @@
       </p:sp>
       <p:sp>
         <p:nvSpPr>
-          <p:cNvPr id="15" name="Text 13"/>
-          <p:cNvSpPr txBox="1"/>
-          <p:nvPr/>
-        </p:nvSpPr>
-        <p:spPr>
-          <a:xfrm>
-            <a:off x="3348010" y="1865376"/>
+          <p:cNvPr id="21" name="Text 19"/>
+          <p:cNvSpPr txBox="1"/>
+          <p:nvPr/>
+        </p:nvSpPr>
+        <p:spPr>
+          <a:xfrm>
+            <a:off x="5790765" y="2468880"/>
             <a:ext cx="1755648" cy="219456"/>
           </a:xfrm>
           <a:prstGeom prst="rect">
@@ -13564,7 +11958,7 @@
                 <a:ea typeface="Calibri" pitchFamily="34" charset="-122"/>
                 <a:cs typeface="Calibri" pitchFamily="34" charset="-120"/>
               </a:rPr>
-              <a:t>Kinbu Canteen Tender</a:t>
+              <a:t>Priority Insurance</a:t>
             </a:r>
             <a:endParaRPr lang="en-US" sz="1050" dirty="0"/>
           </a:p>
@@ -13572,13 +11966,13 @@
       </p:sp>
       <p:sp>
         <p:nvSpPr>
-          <p:cNvPr id="16" name="Text 14"/>
-          <p:cNvSpPr txBox="1"/>
-          <p:nvPr/>
-        </p:nvSpPr>
-        <p:spPr>
-          <a:xfrm>
-            <a:off x="3348010" y="2075688"/>
+          <p:cNvPr id="22" name="Text 20"/>
+          <p:cNvSpPr txBox="1"/>
+          <p:nvPr/>
+        </p:nvSpPr>
+        <p:spPr>
+          <a:xfrm>
+            <a:off x="5790765" y="2679192"/>
             <a:ext cx="1755648" cy="201168"/>
           </a:xfrm>
           <a:prstGeom prst="rect">
@@ -13603,7 +11997,7 @@
                 <a:ea typeface="Calibri" pitchFamily="34" charset="-122"/>
                 <a:cs typeface="Calibri" pitchFamily="34" charset="-120"/>
               </a:rPr>
-              <a:t>Priced BoQ</a:t>
+              <a:t>Complete BoQ</a:t>
             </a:r>
             <a:endParaRPr lang="en-US" sz="950" dirty="0"/>
           </a:p>
@@ -13611,13 +12005,13 @@
       </p:sp>
       <p:sp>
         <p:nvSpPr>
-          <p:cNvPr id="17" name="Text 15"/>
-          <p:cNvSpPr txBox="1"/>
-          <p:nvPr/>
-        </p:nvSpPr>
-        <p:spPr>
-          <a:xfrm>
-            <a:off x="3348010" y="2267712"/>
+          <p:cNvPr id="23" name="Text 21"/>
+          <p:cNvSpPr txBox="1"/>
+          <p:nvPr/>
+        </p:nvSpPr>
+        <p:spPr>
+          <a:xfrm>
+            <a:off x="5790765" y="2871216"/>
             <a:ext cx="1755648" cy="182880"/>
           </a:xfrm>
           <a:prstGeom prst="rect">
@@ -13636,13 +12030,13 @@
             <a:r>
               <a:rPr lang="en-US" sz="850" b="1" dirty="0">
                 <a:solidFill>
-                  <a:srgbClr val="D03B3B"/>
-                </a:solidFill>
-                <a:latin typeface="Calibri" pitchFamily="34" charset="0"/>
-                <a:ea typeface="Calibri" pitchFamily="34" charset="-122"/>
-                <a:cs typeface="Calibri" pitchFamily="34" charset="-120"/>
-              </a:rPr>
-              <a:t>10% complete</a:t>
+                  <a:srgbClr val="FAB219"/>
+                </a:solidFill>
+                <a:latin typeface="Calibri" pitchFamily="34" charset="0"/>
+                <a:ea typeface="Calibri" pitchFamily="34" charset="-122"/>
+                <a:cs typeface="Calibri" pitchFamily="34" charset="-120"/>
+              </a:rPr>
+              <a:t>40% complete</a:t>
             </a:r>
             <a:endParaRPr lang="en-US" sz="850" dirty="0"/>
           </a:p>
@@ -13650,130 +12044,13 @@
       </p:sp>
       <p:sp>
         <p:nvSpPr>
-          <p:cNvPr id="18" name="Text 16"/>
-          <p:cNvSpPr txBox="1"/>
-          <p:nvPr/>
-        </p:nvSpPr>
-        <p:spPr>
-          <a:xfrm>
-            <a:off x="3348010" y="2468880"/>
-            <a:ext cx="1755648" cy="219456"/>
-          </a:xfrm>
-          <a:prstGeom prst="rect">
-            <a:avLst/>
-          </a:prstGeom>
-          <a:noFill/>
-          <a:ln/>
-        </p:spPr>
-        <p:txBody>
-          <a:bodyPr wrap="square" lIns="0" tIns="0" rIns="0" bIns="0" rtlCol="0" anchor="ctr"/>
-          <a:lstStyle/>
-          <a:p>
-            <a:pPr indent="0" marL="0">
-              <a:buNone/>
-            </a:pPr>
-            <a:r>
-              <a:rPr lang="en-US" sz="1050" b="1" dirty="0">
-                <a:solidFill>
-                  <a:srgbClr val="1B2A41"/>
-                </a:solidFill>
-                <a:latin typeface="Calibri" pitchFamily="34" charset="0"/>
-                <a:ea typeface="Calibri" pitchFamily="34" charset="-122"/>
-                <a:cs typeface="Calibri" pitchFamily="34" charset="-120"/>
-              </a:rPr>
-              <a:t>Stanbic Bank</a:t>
-            </a:r>
-            <a:endParaRPr lang="en-US" sz="1050" dirty="0"/>
-          </a:p>
-        </p:txBody>
-      </p:sp>
-      <p:sp>
-        <p:nvSpPr>
-          <p:cNvPr id="19" name="Text 17"/>
-          <p:cNvSpPr txBox="1"/>
-          <p:nvPr/>
-        </p:nvSpPr>
-        <p:spPr>
-          <a:xfrm>
-            <a:off x="3348010" y="2679192"/>
-            <a:ext cx="1755648" cy="201168"/>
-          </a:xfrm>
-          <a:prstGeom prst="rect">
-            <a:avLst/>
-          </a:prstGeom>
-          <a:noFill/>
-          <a:ln/>
-        </p:spPr>
-        <p:txBody>
-          <a:bodyPr wrap="square" lIns="0" tIns="0" rIns="0" bIns="0" rtlCol="0" anchor="ctr"/>
-          <a:lstStyle/>
-          <a:p>
-            <a:pPr indent="0" marL="0">
-              <a:buNone/>
-            </a:pPr>
-            <a:r>
-              <a:rPr lang="en-US" sz="950" dirty="0">
-                <a:solidFill>
-                  <a:srgbClr val="52514E"/>
-                </a:solidFill>
-                <a:latin typeface="Calibri" pitchFamily="34" charset="0"/>
-                <a:ea typeface="Calibri" pitchFamily="34" charset="-122"/>
-                <a:cs typeface="Calibri" pitchFamily="34" charset="-120"/>
-              </a:rPr>
-              <a:t>Preliminary Estimate</a:t>
-            </a:r>
-            <a:endParaRPr lang="en-US" sz="950" dirty="0"/>
-          </a:p>
-        </p:txBody>
-      </p:sp>
-      <p:sp>
-        <p:nvSpPr>
-          <p:cNvPr id="20" name="Text 18"/>
-          <p:cNvSpPr txBox="1"/>
-          <p:nvPr/>
-        </p:nvSpPr>
-        <p:spPr>
-          <a:xfrm>
-            <a:off x="3348010" y="2871216"/>
-            <a:ext cx="1755648" cy="182880"/>
-          </a:xfrm>
-          <a:prstGeom prst="rect">
-            <a:avLst/>
-          </a:prstGeom>
-          <a:noFill/>
-          <a:ln/>
-        </p:spPr>
-        <p:txBody>
-          <a:bodyPr wrap="square" lIns="0" tIns="0" rIns="0" bIns="0" rtlCol="0" anchor="ctr"/>
-          <a:lstStyle/>
-          <a:p>
-            <a:pPr indent="0" marL="0">
-              <a:buNone/>
-            </a:pPr>
-            <a:r>
-              <a:rPr lang="en-US" sz="850" b="1" dirty="0">
-                <a:solidFill>
-                  <a:srgbClr val="D03B3B"/>
-                </a:solidFill>
-                <a:latin typeface="Calibri" pitchFamily="34" charset="0"/>
-                <a:ea typeface="Calibri" pitchFamily="34" charset="-122"/>
-                <a:cs typeface="Calibri" pitchFamily="34" charset="-120"/>
-              </a:rPr>
-              <a:t>50% complete</a:t>
-            </a:r>
-            <a:endParaRPr lang="en-US" sz="850" dirty="0"/>
-          </a:p>
-        </p:txBody>
-      </p:sp>
-      <p:sp>
-        <p:nvSpPr>
-          <p:cNvPr id="21" name="Shape 19"/>
+          <p:cNvPr id="24" name="Shape 22"/>
           <p:cNvSpPr/>
           <p:nvPr/>
         </p:nvSpPr>
         <p:spPr>
           <a:xfrm>
-            <a:off x="4212118" y="3236976"/>
+            <a:off x="6654873" y="3236976"/>
             <a:ext cx="27432" cy="155448"/>
           </a:xfrm>
           <a:prstGeom prst="rect">
@@ -13787,20 +12064,20 @@
       </p:sp>
       <p:sp>
         <p:nvSpPr>
-          <p:cNvPr id="22" name="Shape 20"/>
+          <p:cNvPr id="25" name="Shape 23"/>
           <p:cNvSpPr/>
           <p:nvPr/>
         </p:nvSpPr>
         <p:spPr>
           <a:xfrm>
-            <a:off x="4088674" y="3392424"/>
+            <a:off x="6531429" y="3392424"/>
             <a:ext cx="274320" cy="274320"/>
           </a:xfrm>
           <a:prstGeom prst="ellipse">
             <a:avLst/>
           </a:prstGeom>
           <a:solidFill>
-            <a:srgbClr val="D03B3B"/>
+            <a:srgbClr val="FAB219"/>
           </a:solidFill>
           <a:ln w="31750">
             <a:solidFill>
@@ -13812,13 +12089,13 @@
       </p:sp>
       <p:sp>
         <p:nvSpPr>
-          <p:cNvPr id="23" name="Text 21"/>
-          <p:cNvSpPr txBox="1"/>
-          <p:nvPr/>
-        </p:nvSpPr>
-        <p:spPr>
-          <a:xfrm>
-            <a:off x="3128554" y="3767328"/>
+          <p:cNvPr id="26" name="Text 24"/>
+          <p:cNvSpPr txBox="1"/>
+          <p:nvPr/>
+        </p:nvSpPr>
+        <p:spPr>
+          <a:xfrm>
+            <a:off x="5571309" y="3767328"/>
             <a:ext cx="2194560" cy="292608"/>
           </a:xfrm>
           <a:prstGeom prst="rect">
@@ -13843,7 +12120,7 @@
                 <a:ea typeface="Cambria" pitchFamily="34" charset="-122"/>
                 <a:cs typeface="Cambria" pitchFamily="34" charset="-120"/>
               </a:rPr>
-              <a:t>24 Sep</a:t>
+              <a:t>30 Sep</a:t>
             </a:r>
             <a:endParaRPr lang="en-US" sz="1500" dirty="0"/>
           </a:p>
@@ -13851,13 +12128,13 @@
       </p:sp>
       <p:sp>
         <p:nvSpPr>
-          <p:cNvPr id="24" name="Text 22"/>
-          <p:cNvSpPr txBox="1"/>
-          <p:nvPr/>
-        </p:nvSpPr>
-        <p:spPr>
-          <a:xfrm>
-            <a:off x="3128554" y="4059936"/>
+          <p:cNvPr id="27" name="Text 25"/>
+          <p:cNvSpPr txBox="1"/>
+          <p:nvPr/>
+        </p:nvSpPr>
+        <p:spPr>
+          <a:xfrm>
+            <a:off x="5571309" y="4059936"/>
             <a:ext cx="2194560" cy="237744"/>
           </a:xfrm>
           <a:prstGeom prst="rect">
@@ -13882,7 +12159,7 @@
                 <a:ea typeface="Calibri" pitchFamily="34" charset="-122"/>
                 <a:cs typeface="Calibri" pitchFamily="34" charset="-120"/>
               </a:rPr>
-              <a:t>In 6 days</a:t>
+              <a:t>In 12 days</a:t>
             </a:r>
             <a:endParaRPr lang="en-US" sz="1000" dirty="0"/>
           </a:p>
@@ -13890,13 +12167,13 @@
       </p:sp>
       <p:sp>
         <p:nvSpPr>
-          <p:cNvPr id="25" name="Shape 23"/>
+          <p:cNvPr id="28" name="Shape 26"/>
           <p:cNvSpPr/>
           <p:nvPr/>
         </p:nvSpPr>
         <p:spPr>
           <a:xfrm>
-            <a:off x="5607885" y="2322576"/>
+            <a:off x="9272016" y="2322576"/>
             <a:ext cx="2121408" cy="914400"/>
           </a:xfrm>
           <a:prstGeom prst="roundRect">
@@ -13924,13 +12201,13 @@
       </p:sp>
       <p:sp>
         <p:nvSpPr>
-          <p:cNvPr id="26" name="Text 24"/>
-          <p:cNvSpPr txBox="1"/>
-          <p:nvPr/>
-        </p:nvSpPr>
-        <p:spPr>
-          <a:xfrm>
-            <a:off x="5790765" y="2468880"/>
+          <p:cNvPr id="29" name="Text 27"/>
+          <p:cNvSpPr txBox="1"/>
+          <p:nvPr/>
+        </p:nvSpPr>
+        <p:spPr>
+          <a:xfrm>
+            <a:off x="9454896" y="2468880"/>
             <a:ext cx="1755648" cy="219456"/>
           </a:xfrm>
           <a:prstGeom prst="rect">
@@ -13963,13 +12240,13 @@
       </p:sp>
       <p:sp>
         <p:nvSpPr>
-          <p:cNvPr id="27" name="Text 25"/>
-          <p:cNvSpPr txBox="1"/>
-          <p:nvPr/>
-        </p:nvSpPr>
-        <p:spPr>
-          <a:xfrm>
-            <a:off x="5790765" y="2679192"/>
+          <p:cNvPr id="30" name="Text 28"/>
+          <p:cNvSpPr txBox="1"/>
+          <p:nvPr/>
+        </p:nvSpPr>
+        <p:spPr>
+          <a:xfrm>
+            <a:off x="9454896" y="2679192"/>
             <a:ext cx="1755648" cy="201168"/>
           </a:xfrm>
           <a:prstGeom prst="rect">
@@ -13994,7 +12271,7 @@
                 <a:ea typeface="Calibri" pitchFamily="34" charset="-122"/>
                 <a:cs typeface="Calibri" pitchFamily="34" charset="-120"/>
               </a:rPr>
-              <a:t>Complete BoQ</a:t>
+              <a:t>Complete Budget</a:t>
             </a:r>
             <a:endParaRPr lang="en-US" sz="950" dirty="0"/>
           </a:p>
@@ -14002,13 +12279,13 @@
       </p:sp>
       <p:sp>
         <p:nvSpPr>
-          <p:cNvPr id="28" name="Text 26"/>
-          <p:cNvSpPr txBox="1"/>
-          <p:nvPr/>
-        </p:nvSpPr>
-        <p:spPr>
-          <a:xfrm>
-            <a:off x="5790765" y="2871216"/>
+          <p:cNvPr id="31" name="Text 29"/>
+          <p:cNvSpPr txBox="1"/>
+          <p:nvPr/>
+        </p:nvSpPr>
+        <p:spPr>
+          <a:xfrm>
+            <a:off x="9454896" y="2871216"/>
             <a:ext cx="1755648" cy="182880"/>
           </a:xfrm>
           <a:prstGeom prst="rect">
@@ -14027,13 +12304,13 @@
             <a:r>
               <a:rPr lang="en-US" sz="850" b="1" dirty="0">
                 <a:solidFill>
-                  <a:srgbClr val="FAB219"/>
-                </a:solidFill>
-                <a:latin typeface="Calibri" pitchFamily="34" charset="0"/>
-                <a:ea typeface="Calibri" pitchFamily="34" charset="-122"/>
-                <a:cs typeface="Calibri" pitchFamily="34" charset="-120"/>
-              </a:rPr>
-              <a:t>40% complete</a:t>
+                  <a:srgbClr val="898781"/>
+                </a:solidFill>
+                <a:latin typeface="Calibri" pitchFamily="34" charset="0"/>
+                <a:ea typeface="Calibri" pitchFamily="34" charset="-122"/>
+                <a:cs typeface="Calibri" pitchFamily="34" charset="-120"/>
+              </a:rPr>
+              <a:t>Not started</a:t>
             </a:r>
             <a:endParaRPr lang="en-US" sz="850" dirty="0"/>
           </a:p>
@@ -14041,13 +12318,13 @@
       </p:sp>
       <p:sp>
         <p:nvSpPr>
-          <p:cNvPr id="29" name="Shape 27"/>
+          <p:cNvPr id="32" name="Shape 30"/>
           <p:cNvSpPr/>
           <p:nvPr/>
         </p:nvSpPr>
         <p:spPr>
           <a:xfrm>
-            <a:off x="6654873" y="3236976"/>
+            <a:off x="10319004" y="3236976"/>
             <a:ext cx="27432" cy="155448"/>
           </a:xfrm>
           <a:prstGeom prst="rect">
@@ -14061,281 +12338,7 @@
       </p:sp>
       <p:sp>
         <p:nvSpPr>
-          <p:cNvPr id="30" name="Shape 28"/>
-          <p:cNvSpPr/>
-          <p:nvPr/>
-        </p:nvSpPr>
-        <p:spPr>
-          <a:xfrm>
-            <a:off x="6531429" y="3392424"/>
-            <a:ext cx="274320" cy="274320"/>
-          </a:xfrm>
-          <a:prstGeom prst="ellipse">
-            <a:avLst/>
-          </a:prstGeom>
-          <a:solidFill>
-            <a:srgbClr val="FAB219"/>
-          </a:solidFill>
-          <a:ln w="31750">
-            <a:solidFill>
-              <a:srgbClr val="FFFFFF"/>
-            </a:solidFill>
-            <a:prstDash val="solid"/>
-          </a:ln>
-        </p:spPr>
-      </p:sp>
-      <p:sp>
-        <p:nvSpPr>
-          <p:cNvPr id="31" name="Text 29"/>
-          <p:cNvSpPr txBox="1"/>
-          <p:nvPr/>
-        </p:nvSpPr>
-        <p:spPr>
-          <a:xfrm>
-            <a:off x="5571309" y="3767328"/>
-            <a:ext cx="2194560" cy="292608"/>
-          </a:xfrm>
-          <a:prstGeom prst="rect">
-            <a:avLst/>
-          </a:prstGeom>
-          <a:noFill/>
-          <a:ln/>
-        </p:spPr>
-        <p:txBody>
-          <a:bodyPr wrap="square" lIns="0" tIns="0" rIns="0" bIns="0" rtlCol="0" anchor="ctr"/>
-          <a:lstStyle/>
-          <a:p>
-            <a:pPr algn="ctr" indent="0" marL="0">
-              <a:buNone/>
-            </a:pPr>
-            <a:r>
-              <a:rPr lang="en-US" sz="1500" b="1" dirty="0">
-                <a:solidFill>
-                  <a:srgbClr val="1B2A41"/>
-                </a:solidFill>
-                <a:latin typeface="Cambria" pitchFamily="34" charset="0"/>
-                <a:ea typeface="Cambria" pitchFamily="34" charset="-122"/>
-                <a:cs typeface="Cambria" pitchFamily="34" charset="-120"/>
-              </a:rPr>
-              <a:t>30 Sep</a:t>
-            </a:r>
-            <a:endParaRPr lang="en-US" sz="1500" dirty="0"/>
-          </a:p>
-        </p:txBody>
-      </p:sp>
-      <p:sp>
-        <p:nvSpPr>
-          <p:cNvPr id="32" name="Text 30"/>
-          <p:cNvSpPr txBox="1"/>
-          <p:nvPr/>
-        </p:nvSpPr>
-        <p:spPr>
-          <a:xfrm>
-            <a:off x="5571309" y="4059936"/>
-            <a:ext cx="2194560" cy="237744"/>
-          </a:xfrm>
-          <a:prstGeom prst="rect">
-            <a:avLst/>
-          </a:prstGeom>
-          <a:noFill/>
-          <a:ln/>
-        </p:spPr>
-        <p:txBody>
-          <a:bodyPr wrap="square" lIns="0" tIns="0" rIns="0" bIns="0" rtlCol="0" anchor="ctr"/>
-          <a:lstStyle/>
-          <a:p>
-            <a:pPr algn="ctr" indent="0" marL="0">
-              <a:buNone/>
-            </a:pPr>
-            <a:r>
-              <a:rPr lang="en-US" sz="1000" dirty="0">
-                <a:solidFill>
-                  <a:srgbClr val="898781"/>
-                </a:solidFill>
-                <a:latin typeface="Calibri" pitchFamily="34" charset="0"/>
-                <a:ea typeface="Calibri" pitchFamily="34" charset="-122"/>
-                <a:cs typeface="Calibri" pitchFamily="34" charset="-120"/>
-              </a:rPr>
-              <a:t>In 12 days</a:t>
-            </a:r>
-            <a:endParaRPr lang="en-US" sz="1000" dirty="0"/>
-          </a:p>
-        </p:txBody>
-      </p:sp>
-      <p:sp>
-        <p:nvSpPr>
           <p:cNvPr id="33" name="Shape 31"/>
-          <p:cNvSpPr/>
-          <p:nvPr/>
-        </p:nvSpPr>
-        <p:spPr>
-          <a:xfrm>
-            <a:off x="9272016" y="2322576"/>
-            <a:ext cx="2121408" cy="914400"/>
-          </a:xfrm>
-          <a:prstGeom prst="roundRect">
-            <a:avLst>
-              <a:gd name="adj" fmla="val 10000"/>
-            </a:avLst>
-          </a:prstGeom>
-          <a:solidFill>
-            <a:srgbClr val="FFFFFF"/>
-          </a:solidFill>
-          <a:ln w="12700">
-            <a:solidFill>
-              <a:srgbClr val="E1E0D9"/>
-            </a:solidFill>
-            <a:prstDash val="solid"/>
-          </a:ln>
-          <a:effectLst>
-            <a:outerShdw sx="100000" sy="100000" kx="0" ky="0" algn="bl" rotWithShape="0" blurRad="152400" dist="25400" dir="5400000">
-              <a:srgbClr val="1B2A41">
-                <a:alpha val="10000"/>
-              </a:srgbClr>
-            </a:outerShdw>
-          </a:effectLst>
-        </p:spPr>
-      </p:sp>
-      <p:sp>
-        <p:nvSpPr>
-          <p:cNvPr id="34" name="Text 32"/>
-          <p:cNvSpPr txBox="1"/>
-          <p:nvPr/>
-        </p:nvSpPr>
-        <p:spPr>
-          <a:xfrm>
-            <a:off x="9454896" y="2468880"/>
-            <a:ext cx="1755648" cy="219456"/>
-          </a:xfrm>
-          <a:prstGeom prst="rect">
-            <a:avLst/>
-          </a:prstGeom>
-          <a:noFill/>
-          <a:ln/>
-        </p:spPr>
-        <p:txBody>
-          <a:bodyPr wrap="square" lIns="0" tIns="0" rIns="0" bIns="0" rtlCol="0" anchor="ctr"/>
-          <a:lstStyle/>
-          <a:p>
-            <a:pPr indent="0" marL="0">
-              <a:buNone/>
-            </a:pPr>
-            <a:r>
-              <a:rPr lang="en-US" sz="1050" b="1" dirty="0">
-                <a:solidFill>
-                  <a:srgbClr val="1B2A41"/>
-                </a:solidFill>
-                <a:latin typeface="Calibri" pitchFamily="34" charset="0"/>
-                <a:ea typeface="Calibri" pitchFamily="34" charset="-122"/>
-                <a:cs typeface="Calibri" pitchFamily="34" charset="-120"/>
-              </a:rPr>
-              <a:t>Priority Insurance</a:t>
-            </a:r>
-            <a:endParaRPr lang="en-US" sz="1050" dirty="0"/>
-          </a:p>
-        </p:txBody>
-      </p:sp>
-      <p:sp>
-        <p:nvSpPr>
-          <p:cNvPr id="35" name="Text 33"/>
-          <p:cNvSpPr txBox="1"/>
-          <p:nvPr/>
-        </p:nvSpPr>
-        <p:spPr>
-          <a:xfrm>
-            <a:off x="9454896" y="2679192"/>
-            <a:ext cx="1755648" cy="201168"/>
-          </a:xfrm>
-          <a:prstGeom prst="rect">
-            <a:avLst/>
-          </a:prstGeom>
-          <a:noFill/>
-          <a:ln/>
-        </p:spPr>
-        <p:txBody>
-          <a:bodyPr wrap="square" lIns="0" tIns="0" rIns="0" bIns="0" rtlCol="0" anchor="ctr"/>
-          <a:lstStyle/>
-          <a:p>
-            <a:pPr indent="0" marL="0">
-              <a:buNone/>
-            </a:pPr>
-            <a:r>
-              <a:rPr lang="en-US" sz="950" dirty="0">
-                <a:solidFill>
-                  <a:srgbClr val="52514E"/>
-                </a:solidFill>
-                <a:latin typeface="Calibri" pitchFamily="34" charset="0"/>
-                <a:ea typeface="Calibri" pitchFamily="34" charset="-122"/>
-                <a:cs typeface="Calibri" pitchFamily="34" charset="-120"/>
-              </a:rPr>
-              <a:t>Complete Budget</a:t>
-            </a:r>
-            <a:endParaRPr lang="en-US" sz="950" dirty="0"/>
-          </a:p>
-        </p:txBody>
-      </p:sp>
-      <p:sp>
-        <p:nvSpPr>
-          <p:cNvPr id="36" name="Text 34"/>
-          <p:cNvSpPr txBox="1"/>
-          <p:nvPr/>
-        </p:nvSpPr>
-        <p:spPr>
-          <a:xfrm>
-            <a:off x="9454896" y="2871216"/>
-            <a:ext cx="1755648" cy="182880"/>
-          </a:xfrm>
-          <a:prstGeom prst="rect">
-            <a:avLst/>
-          </a:prstGeom>
-          <a:noFill/>
-          <a:ln/>
-        </p:spPr>
-        <p:txBody>
-          <a:bodyPr wrap="square" lIns="0" tIns="0" rIns="0" bIns="0" rtlCol="0" anchor="ctr"/>
-          <a:lstStyle/>
-          <a:p>
-            <a:pPr indent="0" marL="0">
-              <a:buNone/>
-            </a:pPr>
-            <a:r>
-              <a:rPr lang="en-US" sz="850" b="1" dirty="0">
-                <a:solidFill>
-                  <a:srgbClr val="898781"/>
-                </a:solidFill>
-                <a:latin typeface="Calibri" pitchFamily="34" charset="0"/>
-                <a:ea typeface="Calibri" pitchFamily="34" charset="-122"/>
-                <a:cs typeface="Calibri" pitchFamily="34" charset="-120"/>
-              </a:rPr>
-              <a:t>Not started</a:t>
-            </a:r>
-            <a:endParaRPr lang="en-US" sz="850" dirty="0"/>
-          </a:p>
-        </p:txBody>
-      </p:sp>
-      <p:sp>
-        <p:nvSpPr>
-          <p:cNvPr id="37" name="Shape 35"/>
-          <p:cNvSpPr/>
-          <p:nvPr/>
-        </p:nvSpPr>
-        <p:spPr>
-          <a:xfrm>
-            <a:off x="10319004" y="3236976"/>
-            <a:ext cx="27432" cy="155448"/>
-          </a:xfrm>
-          <a:prstGeom prst="rect">
-            <a:avLst/>
-          </a:prstGeom>
-          <a:solidFill>
-            <a:srgbClr val="E1E0D9"/>
-          </a:solidFill>
-          <a:ln/>
-        </p:spPr>
-      </p:sp>
-      <p:sp>
-        <p:nvSpPr>
-          <p:cNvPr id="38" name="Shape 36"/>
           <p:cNvSpPr/>
           <p:nvPr/>
         </p:nvSpPr>
@@ -14360,7 +12363,7 @@
       </p:sp>
       <p:sp>
         <p:nvSpPr>
-          <p:cNvPr id="39" name="Text 37"/>
+          <p:cNvPr id="34" name="Text 32"/>
           <p:cNvSpPr txBox="1"/>
           <p:nvPr/>
         </p:nvSpPr>
@@ -14399,7 +12402,7 @@
       </p:sp>
       <p:sp>
         <p:nvSpPr>
-          <p:cNvPr id="40" name="Text 38"/>
+          <p:cNvPr id="35" name="Text 33"/>
           <p:cNvSpPr txBox="1"/>
           <p:nvPr/>
         </p:nvSpPr>
@@ -14438,7 +12441,7 @@
       </p:sp>
       <p:sp>
         <p:nvSpPr>
-          <p:cNvPr id="41" name="Shape 39"/>
+          <p:cNvPr id="36" name="Shape 34"/>
           <p:cNvSpPr/>
           <p:nvPr/>
         </p:nvSpPr>
@@ -14472,7 +12475,7 @@
       </p:sp>
       <p:sp>
         <p:nvSpPr>
-          <p:cNvPr id="42" name="Text 40"/>
+          <p:cNvPr id="37" name="Text 35"/>
           <p:cNvSpPr txBox="1"/>
           <p:nvPr/>
         </p:nvSpPr>
@@ -14511,7 +12514,7 @@
       </p:sp>
       <p:sp>
         <p:nvSpPr>
-          <p:cNvPr id="43" name="Text 41"/>
+          <p:cNvPr id="38" name="Text 36"/>
           <p:cNvSpPr txBox="1"/>
           <p:nvPr/>
         </p:nvSpPr>
@@ -14542,7 +12545,7 @@
                 <a:ea typeface="Calibri" pitchFamily="34" charset="-122"/>
                 <a:cs typeface="Calibri" pitchFamily="34" charset="-120"/>
               </a:rPr>
-              <a:t>Two tender submissions close on the same day, 24 September, and both sit with the team rather than a named owner. Between them they account for 1.4 of the 2.0 deliverables we are behind. Naming an owner for each is the single highest-value action available this week.</a:t>
+              <a:t>Two tender submissions close on the same day, 24 September, and both sit with the team rather than a named owner. Between them they account for 1.4 of the 1.5 deliverables we are behind. Naming an owner for each is the single highest-value action available this week.</a:t>
             </a:r>
             <a:endParaRPr lang="en-US" sz="1050" dirty="0"/>
           </a:p>
@@ -14550,7 +12553,7 @@
       </p:sp>
       <p:sp>
         <p:nvSpPr>
-          <p:cNvPr id="44" name="Text 42"/>
+          <p:cNvPr id="39" name="Text 37"/>
           <p:cNvSpPr txBox="1"/>
           <p:nvPr/>
         </p:nvSpPr>
@@ -14589,7 +12592,7 @@
       </p:sp>
       <p:sp>
         <p:nvSpPr>
-          <p:cNvPr id="45" name="Text 43"/>
+          <p:cNvPr id="40" name="Text 38"/>
           <p:cNvSpPr txBox="1"/>
           <p:nvPr/>
         </p:nvSpPr>
@@ -16113,7 +14116,7 @@
                 <a:ea typeface="Calibri" pitchFamily="34" charset="-122"/>
                 <a:cs typeface="Calibri" pitchFamily="34" charset="-120"/>
               </a:rPr>
-              <a:t>Eunice carries the largest load</a:t>
+              <a:t>Eunice has closed every item</a:t>
             </a:r>
             <a:endParaRPr lang="en-US" sz="1150" dirty="0"/>
           </a:p>
@@ -16152,7 +14155,7 @@
                 <a:ea typeface="Calibri" pitchFamily="34" charset="-122"/>
                 <a:cs typeface="Calibri" pitchFamily="34" charset="-120"/>
               </a:rPr>
-              <a:t>Nine deliverables, eight of them already closed. The highest throughput in the department.</a:t>
+              <a:t>Nine deliverables, all of them delivered. The highest throughput in the department by some margin.</a:t>
             </a:r>
             <a:endParaRPr lang="en-US" sz="1000" dirty="0"/>
           </a:p>
@@ -16225,7 +14228,7 @@
                 <a:ea typeface="Calibri" pitchFamily="34" charset="-122"/>
                 <a:cs typeface="Calibri" pitchFamily="34" charset="-120"/>
               </a:rPr>
-              <a:t>Obed has no closed deliverables</a:t>
+              <a:t>Obed’s open work is one project</a:t>
             </a:r>
             <a:endParaRPr lang="en-US" sz="1150" dirty="0"/>
           </a:p>
@@ -16264,7 +14267,7 @@
                 <a:ea typeface="Calibri" pitchFamily="34" charset="-122"/>
                 <a:cs typeface="Calibri" pitchFamily="34" charset="-120"/>
               </a:rPr>
-              <a:t>All three of his items are shared and still open — Priority Insurance and Ecole. Worth checking whether he is blocked rather than behind.</a:t>
+              <a:t>Both of his remaining items sit on Priority Insurance, which is blocked on design information rather than running late.</a:t>
             </a:r>
             <a:endParaRPr lang="en-US" sz="1000" dirty="0"/>
           </a:p>
